--- a/Spectra_RippleGuard.pptx
+++ b/Spectra_RippleGuard.pptx
@@ -1965,9 +1965,35 @@
           </a:prstGeom>
         </p:spPr>
       </p:pic>
-      <p:sp>
-        <p:nvSpPr>
-          <p:cNvPr id="3" name="Text 0"/>
+      <p:pic>
+        <p:nvPicPr>
+          <p:cNvPr id="3" name="Image 1" descr="ripple-light.png">    </p:cNvPr>
+          <p:cNvPicPr>
+            <a:picLocks noChangeAspect="1"/>
+          </p:cNvPicPr>
+          <p:nvPr/>
+        </p:nvPicPr>
+        <p:blipFill>
+          <a:blip r:embed="rId2">
+            <a:alphaModFix amt="55000"/>
+          </a:blip>
+          <a:stretch>
+            <a:fillRect/>
+          </a:stretch>
+        </p:blipFill>
+        <p:spPr>
+          <a:xfrm>
+            <a:off x="5760720" y="1097280"/>
+            <a:ext cx="3840480" cy="3840480"/>
+          </a:xfrm>
+          <a:prstGeom prst="rect">
+            <a:avLst/>
+          </a:prstGeom>
+        </p:spPr>
+      </p:pic>
+      <p:sp>
+        <p:nvSpPr>
+          <p:cNvPr id="4" name="Text 0"/>
           <p:cNvSpPr txBox="1"/>
           <p:nvPr/>
         </p:nvSpPr>
@@ -2006,14 +2032,119 @@
       </p:sp>
       <p:sp>
         <p:nvSpPr>
-          <p:cNvPr id="4" name="Text 1"/>
-          <p:cNvSpPr txBox="1"/>
-          <p:nvPr/>
-        </p:nvSpPr>
-        <p:spPr>
-          <a:xfrm>
-            <a:off x="365760" y="1371600"/>
-            <a:ext cx="8412480" cy="3108960"/>
+          <p:cNvPr id="5" name="Text 1"/>
+          <p:cNvSpPr txBox="1"/>
+          <p:nvPr/>
+        </p:nvSpPr>
+        <p:spPr>
+          <a:xfrm>
+            <a:off x="365760" y="1188720"/>
+            <a:ext cx="5486400" cy="548640"/>
+          </a:xfrm>
+          <a:prstGeom prst="rect">
+            <a:avLst/>
+          </a:prstGeom>
+          <a:noFill/>
+          <a:ln/>
+        </p:spPr>
+        <p:txBody>
+          <a:bodyPr wrap="square" lIns="0" tIns="0" rIns="0" bIns="0" rtlCol="0" anchor="ctr"/>
+          <a:lstStyle/>
+          <a:p>
+            <a:pPr indent="0" marL="0">
+              <a:buNone/>
+            </a:pPr>
+            <a:r>
+              <a:rPr lang="en-US" sz="3400" dirty="0">
+                <a:solidFill>
+                  <a:srgbClr val="7C3AED"/>
+                </a:solidFill>
+                <a:latin typeface="Impact" pitchFamily="34" charset="0"/>
+                <a:ea typeface="Impact" pitchFamily="34" charset="-122"/>
+                <a:cs typeface="Impact" pitchFamily="34" charset="-120"/>
+              </a:rPr>
+              <a:t>RippleGuard</a:t>
+            </a:r>
+            <a:endParaRPr lang="en-US" sz="3400" dirty="0"/>
+          </a:p>
+        </p:txBody>
+      </p:sp>
+      <p:sp>
+        <p:nvSpPr>
+          <p:cNvPr id="6" name="Text 2"/>
+          <p:cNvSpPr txBox="1"/>
+          <p:nvPr/>
+        </p:nvSpPr>
+        <p:spPr>
+          <a:xfrm>
+            <a:off x="365760" y="1719072"/>
+            <a:ext cx="5486400" cy="274320"/>
+          </a:xfrm>
+          <a:prstGeom prst="rect">
+            <a:avLst/>
+          </a:prstGeom>
+          <a:noFill/>
+          <a:ln/>
+        </p:spPr>
+        <p:txBody>
+          <a:bodyPr wrap="square" lIns="0" tIns="0" rIns="0" bIns="0" rtlCol="0" anchor="ctr"/>
+          <a:lstStyle/>
+          <a:p>
+            <a:pPr indent="0" marL="0">
+              <a:buNone/>
+            </a:pPr>
+            <a:r>
+              <a:rPr lang="en-US" sz="1300" i="1" dirty="0">
+                <a:solidFill>
+                  <a:srgbClr val="6B6685"/>
+                </a:solidFill>
+                <a:latin typeface="Arial" pitchFamily="34" charset="0"/>
+                <a:ea typeface="Arial" pitchFamily="34" charset="-122"/>
+                <a:cs typeface="Arial" pitchFamily="34" charset="-120"/>
+              </a:rPr>
+              <a:t>See the ripple before it hits production.</a:t>
+            </a:r>
+            <a:endParaRPr lang="en-US" sz="1300" dirty="0"/>
+          </a:p>
+        </p:txBody>
+      </p:sp>
+      <p:sp>
+        <p:nvSpPr>
+          <p:cNvPr id="7" name="Shape 3"/>
+          <p:cNvSpPr/>
+          <p:nvPr/>
+        </p:nvSpPr>
+        <p:spPr>
+          <a:xfrm>
+            <a:off x="365760" y="2103120"/>
+            <a:ext cx="5852160" cy="2331720"/>
+          </a:xfrm>
+          <a:prstGeom prst="roundRect">
+            <a:avLst>
+              <a:gd name="adj" fmla="val 3922"/>
+            </a:avLst>
+          </a:prstGeom>
+          <a:solidFill>
+            <a:srgbClr val="F4F1FB"/>
+          </a:solidFill>
+          <a:ln w="9525">
+            <a:solidFill>
+              <a:srgbClr val="D9D3EA"/>
+            </a:solidFill>
+            <a:prstDash val="solid"/>
+          </a:ln>
+        </p:spPr>
+      </p:sp>
+      <p:sp>
+        <p:nvSpPr>
+          <p:cNvPr id="8" name="Text 4"/>
+          <p:cNvSpPr txBox="1"/>
+          <p:nvPr/>
+        </p:nvSpPr>
+        <p:spPr>
+          <a:xfrm>
+            <a:off x="548640" y="2240280"/>
+            <a:ext cx="5532120" cy="2103120"/>
           </a:xfrm>
           <a:prstGeom prst="rect">
             <a:avLst/>
@@ -2027,17 +2158,17 @@
           <a:p>
             <a:pPr indent="0" marL="0">
               <a:lnSpc>
-                <a:spcPct val="110000"/>
+                <a:spcPct val="105000"/>
               </a:lnSpc>
               <a:spcAft>
-                <a:spcPts val="1000"/>
+                <a:spcPts val="600"/>
               </a:spcAft>
               <a:buNone/>
             </a:pPr>
             <a:r>
-              <a:rPr lang="en-US" sz="1800" b="1" dirty="0">
-                <a:solidFill>
-                  <a:srgbClr val="1F1B2E"/>
+              <a:rPr lang="en-US" sz="1300" b="1" dirty="0">
+                <a:solidFill>
+                  <a:srgbClr val="351C75"/>
                 </a:solidFill>
                 <a:latin typeface="Roboto Mono" pitchFamily="34" charset="0"/>
                 <a:ea typeface="Roboto Mono" pitchFamily="34" charset="-122"/>
@@ -2047,15 +2178,15 @@
             </a:r>
             <a:pPr indent="0" marL="0">
               <a:lnSpc>
-                <a:spcPct val="110000"/>
+                <a:spcPct val="105000"/>
               </a:lnSpc>
               <a:spcAft>
-                <a:spcPts val="1000"/>
+                <a:spcPts val="600"/>
               </a:spcAft>
               <a:buNone/>
             </a:pPr>
             <a:r>
-              <a:rPr lang="en-US" sz="1600" dirty="0">
+              <a:rPr lang="en-US" sz="1200" dirty="0">
                 <a:solidFill>
                   <a:srgbClr val="1F1B2E"/>
                 </a:solidFill>
@@ -2065,22 +2196,22 @@
               </a:rPr>
               <a:t>Spectra</a:t>
             </a:r>
-            <a:endParaRPr lang="en-US" sz="1800" dirty="0"/>
+            <a:endParaRPr lang="en-US" sz="1300" dirty="0"/>
           </a:p>
           <a:p>
             <a:pPr indent="0" marL="0">
               <a:lnSpc>
-                <a:spcPct val="110000"/>
+                <a:spcPct val="105000"/>
               </a:lnSpc>
               <a:spcAft>
-                <a:spcPts val="1000"/>
+                <a:spcPts val="600"/>
               </a:spcAft>
               <a:buNone/>
             </a:pPr>
             <a:r>
-              <a:rPr lang="en-US" sz="1800" b="1" dirty="0">
-                <a:solidFill>
-                  <a:srgbClr val="1F1B2E"/>
+              <a:rPr lang="en-US" sz="1300" b="1" dirty="0">
+                <a:solidFill>
+                  <a:srgbClr val="351C75"/>
                 </a:solidFill>
                 <a:latin typeface="Roboto Mono" pitchFamily="34" charset="0"/>
                 <a:ea typeface="Roboto Mono" pitchFamily="34" charset="-122"/>
@@ -2090,15 +2221,15 @@
             </a:r>
             <a:pPr indent="0" marL="0">
               <a:lnSpc>
-                <a:spcPct val="110000"/>
+                <a:spcPct val="105000"/>
               </a:lnSpc>
               <a:spcAft>
-                <a:spcPts val="1000"/>
+                <a:spcPts val="600"/>
               </a:spcAft>
               <a:buNone/>
             </a:pPr>
             <a:r>
-              <a:rPr lang="en-US" sz="1600" dirty="0">
+              <a:rPr lang="en-US" sz="1200" dirty="0">
                 <a:solidFill>
                   <a:srgbClr val="1F1B2E"/>
                 </a:solidFill>
@@ -2108,22 +2239,22 @@
               </a:rPr>
               <a:t>Cybersecurity</a:t>
             </a:r>
-            <a:endParaRPr lang="en-US" sz="1800" dirty="0"/>
+            <a:endParaRPr lang="en-US" sz="1300" dirty="0"/>
           </a:p>
           <a:p>
             <a:pPr indent="0" marL="0">
               <a:lnSpc>
-                <a:spcPct val="110000"/>
+                <a:spcPct val="105000"/>
               </a:lnSpc>
               <a:spcAft>
-                <a:spcPts val="1000"/>
+                <a:spcPts val="600"/>
               </a:spcAft>
               <a:buNone/>
             </a:pPr>
             <a:r>
-              <a:rPr lang="en-US" sz="1800" b="1" dirty="0">
-                <a:solidFill>
-                  <a:srgbClr val="1F1B2E"/>
+              <a:rPr lang="en-US" sz="1300" b="1" dirty="0">
+                <a:solidFill>
+                  <a:srgbClr val="351C75"/>
                 </a:solidFill>
                 <a:latin typeface="Roboto Mono" pitchFamily="34" charset="0"/>
                 <a:ea typeface="Roboto Mono" pitchFamily="34" charset="-122"/>
@@ -2133,15 +2264,15 @@
             </a:r>
             <a:pPr indent="0" marL="0">
               <a:lnSpc>
-                <a:spcPct val="110000"/>
+                <a:spcPct val="105000"/>
               </a:lnSpc>
               <a:spcAft>
-                <a:spcPts val="1000"/>
+                <a:spcPts val="600"/>
               </a:spcAft>
               <a:buNone/>
             </a:pPr>
             <a:r>
-              <a:rPr lang="en-US" sz="1600" dirty="0">
+              <a:rPr lang="en-US" sz="1200" dirty="0">
                 <a:solidFill>
                   <a:srgbClr val="1F1B2E"/>
                 </a:solidFill>
@@ -2151,22 +2282,22 @@
               </a:rPr>
               <a:t>P04 · Open Source Supply Chains: The Ripple Effect</a:t>
             </a:r>
-            <a:endParaRPr lang="en-US" sz="1800" dirty="0"/>
+            <a:endParaRPr lang="en-US" sz="1300" dirty="0"/>
           </a:p>
           <a:p>
             <a:pPr indent="0" marL="0">
               <a:lnSpc>
-                <a:spcPct val="110000"/>
+                <a:spcPct val="105000"/>
               </a:lnSpc>
               <a:spcAft>
-                <a:spcPts val="1000"/>
+                <a:spcPts val="600"/>
               </a:spcAft>
               <a:buNone/>
             </a:pPr>
             <a:r>
-              <a:rPr lang="en-US" sz="1800" b="1" dirty="0">
-                <a:solidFill>
-                  <a:srgbClr val="1F1B2E"/>
+              <a:rPr lang="en-US" sz="1300" b="1" dirty="0">
+                <a:solidFill>
+                  <a:srgbClr val="351C75"/>
                 </a:solidFill>
                 <a:latin typeface="Roboto Mono" pitchFamily="34" charset="0"/>
                 <a:ea typeface="Roboto Mono" pitchFamily="34" charset="-122"/>
@@ -2176,15 +2307,15 @@
             </a:r>
             <a:pPr indent="0" marL="0">
               <a:lnSpc>
-                <a:spcPct val="110000"/>
+                <a:spcPct val="105000"/>
               </a:lnSpc>
               <a:spcAft>
-                <a:spcPts val="1000"/>
+                <a:spcPts val="600"/>
               </a:spcAft>
               <a:buNone/>
             </a:pPr>
             <a:r>
-              <a:rPr lang="en-US" sz="1600" dirty="0">
+              <a:rPr lang="en-US" sz="1200" dirty="0">
                 <a:solidFill>
                   <a:srgbClr val="1F1B2E"/>
                 </a:solidFill>
@@ -2194,22 +2325,22 @@
               </a:rPr>
               <a:t>RippleGuard — explainable dependency risk &amp; ripple simulation</a:t>
             </a:r>
-            <a:endParaRPr lang="en-US" sz="1800" dirty="0"/>
+            <a:endParaRPr lang="en-US" sz="1300" dirty="0"/>
           </a:p>
           <a:p>
             <a:pPr indent="0" marL="0">
               <a:lnSpc>
-                <a:spcPct val="110000"/>
+                <a:spcPct val="105000"/>
               </a:lnSpc>
               <a:spcAft>
-                <a:spcPts val="1000"/>
+                <a:spcPts val="600"/>
               </a:spcAft>
               <a:buNone/>
             </a:pPr>
             <a:r>
-              <a:rPr lang="en-US" sz="1800" b="1" dirty="0">
-                <a:solidFill>
-                  <a:srgbClr val="1F1B2E"/>
+              <a:rPr lang="en-US" sz="1300" b="1" dirty="0">
+                <a:solidFill>
+                  <a:srgbClr val="351C75"/>
                 </a:solidFill>
                 <a:latin typeface="Roboto Mono" pitchFamily="34" charset="0"/>
                 <a:ea typeface="Roboto Mono" pitchFamily="34" charset="-122"/>
@@ -2219,15 +2350,15 @@
             </a:r>
             <a:pPr indent="0" marL="0">
               <a:lnSpc>
-                <a:spcPct val="110000"/>
+                <a:spcPct val="105000"/>
               </a:lnSpc>
               <a:spcAft>
-                <a:spcPts val="1000"/>
+                <a:spcPts val="600"/>
               </a:spcAft>
               <a:buNone/>
             </a:pPr>
             <a:r>
-              <a:rPr lang="en-US" sz="1600" dirty="0">
+              <a:rPr lang="en-US" sz="1200" dirty="0">
                 <a:solidFill>
                   <a:srgbClr val="1F1B2E"/>
                 </a:solidFill>
@@ -2237,13 +2368,13 @@
               </a:rPr>
               <a:t>Rohit Girish Belagali · Thambichetty Shashank · M Harshavardan · Tejasvi M H · Varsha K</a:t>
             </a:r>
-            <a:endParaRPr lang="en-US" sz="1800" dirty="0"/>
-          </a:p>
-        </p:txBody>
-      </p:sp>
-      <p:sp>
-        <p:nvSpPr>
-          <p:cNvPr id="5" name="Shape 2"/>
+            <a:endParaRPr lang="en-US" sz="1300" dirty="0"/>
+          </a:p>
+        </p:txBody>
+      </p:sp>
+      <p:sp>
+        <p:nvSpPr>
+          <p:cNvPr id="9" name="Shape 5"/>
           <p:cNvSpPr/>
           <p:nvPr/>
         </p:nvSpPr>
@@ -2270,7 +2401,7 @@
       </p:sp>
       <p:sp>
         <p:nvSpPr>
-          <p:cNvPr id="6" name="Shape 3"/>
+          <p:cNvPr id="10" name="Shape 6"/>
           <p:cNvSpPr/>
           <p:nvPr/>
         </p:nvSpPr>
@@ -2297,7 +2428,7 @@
       </p:sp>
       <p:sp>
         <p:nvSpPr>
-          <p:cNvPr id="7" name="Text 4"/>
+          <p:cNvPr id="11" name="Text 7"/>
           <p:cNvSpPr txBox="1"/>
           <p:nvPr/>
         </p:nvSpPr>
@@ -2336,7 +2467,7 @@
       </p:sp>
       <p:sp>
         <p:nvSpPr>
-          <p:cNvPr id="8" name="Text 5"/>
+          <p:cNvPr id="12" name="Text 8"/>
           <p:cNvSpPr txBox="1"/>
           <p:nvPr/>
         </p:nvSpPr>
@@ -2407,20 +2538,46 @@
       </p:grpSpPr>
       <p:pic>
         <p:nvPicPr>
-          <p:cNvPr id="2" name="Image 0" descr="logo.jpg">    </p:cNvPr>
+          <p:cNvPr id="2" name="Image 0" descr="ripple-light.png">    </p:cNvPr>
           <p:cNvPicPr>
             <a:picLocks noChangeAspect="1"/>
           </p:cNvPicPr>
           <p:nvPr/>
         </p:nvPicPr>
         <p:blipFill>
-          <a:blip r:embed="rId1"/>
+          <a:blip r:embed="rId1">
+            <a:alphaModFix amt="22000"/>
+          </a:blip>
           <a:stretch>
             <a:fillRect/>
           </a:stretch>
         </p:blipFill>
         <p:spPr>
           <a:xfrm>
+            <a:off x="6766560" y="-1371600"/>
+            <a:ext cx="3474720" cy="3474720"/>
+          </a:xfrm>
+          <a:prstGeom prst="rect">
+            <a:avLst/>
+          </a:prstGeom>
+        </p:spPr>
+      </p:pic>
+      <p:pic>
+        <p:nvPicPr>
+          <p:cNvPr id="3" name="Image 1" descr="logo.jpg">    </p:cNvPr>
+          <p:cNvPicPr>
+            <a:picLocks noChangeAspect="1"/>
+          </p:cNvPicPr>
+          <p:nvPr/>
+        </p:nvPicPr>
+        <p:blipFill>
+          <a:blip r:embed="rId2"/>
+          <a:stretch>
+            <a:fillRect/>
+          </a:stretch>
+        </p:blipFill>
+        <p:spPr>
+          <a:xfrm>
             <a:off x="8193024" y="91440"/>
             <a:ext cx="832104" cy="612648"/>
           </a:xfrm>
@@ -2431,7 +2588,46 @@
       </p:pic>
       <p:sp>
         <p:nvSpPr>
-          <p:cNvPr id="3" name="Text 0"/>
+          <p:cNvPr id="4" name="Text 0"/>
+          <p:cNvSpPr txBox="1"/>
+          <p:nvPr/>
+        </p:nvSpPr>
+        <p:spPr>
+          <a:xfrm>
+            <a:off x="310896" y="256032"/>
+            <a:ext cx="5486400" cy="182880"/>
+          </a:xfrm>
+          <a:prstGeom prst="rect">
+            <a:avLst/>
+          </a:prstGeom>
+          <a:noFill/>
+          <a:ln/>
+        </p:spPr>
+        <p:txBody>
+          <a:bodyPr wrap="square" lIns="0" tIns="0" rIns="0" bIns="0" rtlCol="0" anchor="ctr"/>
+          <a:lstStyle/>
+          <a:p>
+            <a:pPr indent="0" marL="0">
+              <a:buNone/>
+            </a:pPr>
+            <a:r>
+              <a:rPr lang="en-US" sz="850" b="1" spc="300" kern="0" dirty="0">
+                <a:solidFill>
+                  <a:srgbClr val="A855F7"/>
+                </a:solidFill>
+                <a:latin typeface="Arial" pitchFamily="34" charset="0"/>
+                <a:ea typeface="Arial" pitchFamily="34" charset="-122"/>
+                <a:cs typeface="Arial" pitchFamily="34" charset="-120"/>
+              </a:rPr>
+              <a:t>THE DEPENDENCY TREE IS THE ATTACK SURFACE</a:t>
+            </a:r>
+            <a:endParaRPr lang="en-US" sz="850" dirty="0"/>
+          </a:p>
+        </p:txBody>
+      </p:sp>
+      <p:sp>
+        <p:nvSpPr>
+          <p:cNvPr id="5" name="Text 1"/>
           <p:cNvSpPr txBox="1"/>
           <p:nvPr/>
         </p:nvSpPr>
@@ -2470,131 +2666,14 @@
       </p:sp>
       <p:sp>
         <p:nvSpPr>
-          <p:cNvPr id="4" name="Text 1"/>
-          <p:cNvSpPr txBox="1"/>
-          <p:nvPr/>
-        </p:nvSpPr>
-        <p:spPr>
-          <a:xfrm>
-            <a:off x="310896" y="1097280"/>
-            <a:ext cx="4572000" cy="868680"/>
-          </a:xfrm>
-          <a:prstGeom prst="rect">
-            <a:avLst/>
-          </a:prstGeom>
-          <a:noFill/>
-          <a:ln/>
-        </p:spPr>
-        <p:txBody>
-          <a:bodyPr wrap="square" lIns="0" tIns="0" rIns="0" bIns="0" rtlCol="0" anchor="ctr"/>
-          <a:lstStyle/>
-          <a:p>
-            <a:pPr indent="0" marL="0">
-              <a:buNone/>
-            </a:pPr>
-            <a:r>
-              <a:rPr lang="en-US" sz="6000" b="1" dirty="0">
-                <a:solidFill>
-                  <a:srgbClr val="7C3AED"/>
-                </a:solidFill>
-                <a:latin typeface="Arial" pitchFamily="34" charset="0"/>
-                <a:ea typeface="Arial" pitchFamily="34" charset="-122"/>
-                <a:cs typeface="Arial" pitchFamily="34" charset="-120"/>
-              </a:rPr>
-              <a:t>454,600</a:t>
-            </a:r>
-            <a:endParaRPr lang="en-US" sz="6000" dirty="0"/>
-          </a:p>
-        </p:txBody>
-      </p:sp>
-      <p:sp>
-        <p:nvSpPr>
-          <p:cNvPr id="5" name="Text 2"/>
-          <p:cNvSpPr txBox="1"/>
-          <p:nvPr/>
-        </p:nvSpPr>
-        <p:spPr>
-          <a:xfrm>
-            <a:off x="310896" y="1965960"/>
-            <a:ext cx="4480560" cy="502920"/>
-          </a:xfrm>
-          <a:prstGeom prst="rect">
-            <a:avLst/>
-          </a:prstGeom>
-          <a:noFill/>
-          <a:ln/>
-        </p:spPr>
-        <p:txBody>
-          <a:bodyPr wrap="square" lIns="0" tIns="0" rIns="0" bIns="0" rtlCol="0" anchor="t"/>
-          <a:lstStyle/>
-          <a:p>
-            <a:pPr indent="0" marL="0">
-              <a:buNone/>
-            </a:pPr>
-            <a:r>
-              <a:rPr lang="en-US" sz="1200" dirty="0">
-                <a:solidFill>
-                  <a:srgbClr val="1F1B2E"/>
-                </a:solidFill>
-                <a:latin typeface="Arial" pitchFamily="34" charset="0"/>
-                <a:ea typeface="Arial" pitchFamily="34" charset="-122"/>
-                <a:cs typeface="Arial" pitchFamily="34" charset="-120"/>
-              </a:rPr>
-              <a:t>new malicious open-source packages catalogued in 2025 — up 75% year on year. 99% of them live on npm.</a:t>
-            </a:r>
-            <a:endParaRPr lang="en-US" sz="1200" dirty="0"/>
-          </a:p>
-        </p:txBody>
-      </p:sp>
-      <p:sp>
-        <p:nvSpPr>
-          <p:cNvPr id="6" name="Text 3"/>
-          <p:cNvSpPr txBox="1"/>
-          <p:nvPr/>
-        </p:nvSpPr>
-        <p:spPr>
-          <a:xfrm>
-            <a:off x="310896" y="2487168"/>
-            <a:ext cx="4480560" cy="182880"/>
-          </a:xfrm>
-          <a:prstGeom prst="rect">
-            <a:avLst/>
-          </a:prstGeom>
-          <a:noFill/>
-          <a:ln/>
-        </p:spPr>
-        <p:txBody>
-          <a:bodyPr wrap="square" lIns="0" tIns="0" rIns="0" bIns="0" rtlCol="0" anchor="ctr"/>
-          <a:lstStyle/>
-          <a:p>
-            <a:pPr indent="0" marL="0">
-              <a:buNone/>
-            </a:pPr>
-            <a:r>
-              <a:rPr lang="en-US" sz="800" i="1" dirty="0">
-                <a:solidFill>
-                  <a:srgbClr val="6B6685"/>
-                </a:solidFill>
-                <a:latin typeface="Arial" pitchFamily="34" charset="0"/>
-                <a:ea typeface="Arial" pitchFamily="34" charset="-122"/>
-                <a:cs typeface="Arial" pitchFamily="34" charset="-120"/>
-              </a:rPr>
-              <a:t>Sonatype · State of the Software Supply Chain 2026</a:t>
-            </a:r>
-            <a:endParaRPr lang="en-US" sz="800" dirty="0"/>
-          </a:p>
-        </p:txBody>
-      </p:sp>
-      <p:sp>
-        <p:nvSpPr>
-          <p:cNvPr id="7" name="Shape 4"/>
+          <p:cNvPr id="6" name="Shape 2"/>
           <p:cNvSpPr/>
           <p:nvPr/>
         </p:nvSpPr>
         <p:spPr>
           <a:xfrm>
-            <a:off x="310896" y="2788920"/>
-            <a:ext cx="4480560" cy="0"/>
+            <a:off x="310896" y="4956048"/>
+            <a:ext cx="8522208" cy="0"/>
           </a:xfrm>
           <a:prstGeom prst="line">
             <a:avLst/>
@@ -2610,14 +2689,14 @@
       </p:sp>
       <p:sp>
         <p:nvSpPr>
-          <p:cNvPr id="8" name="Text 5"/>
-          <p:cNvSpPr txBox="1"/>
-          <p:nvPr/>
-        </p:nvSpPr>
-        <p:spPr>
-          <a:xfrm>
-            <a:off x="310896" y="2907792"/>
-            <a:ext cx="1463040" cy="457200"/>
+          <p:cNvPr id="7" name="Text 3"/>
+          <p:cNvSpPr txBox="1"/>
+          <p:nvPr/>
+        </p:nvSpPr>
+        <p:spPr>
+          <a:xfrm>
+            <a:off x="310896" y="4983480"/>
+            <a:ext cx="5486400" cy="146304"/>
           </a:xfrm>
           <a:prstGeom prst="rect">
             <a:avLst/>
@@ -2633,46 +2712,7 @@
               <a:buNone/>
             </a:pPr>
             <a:r>
-              <a:rPr lang="en-US" sz="2400" b="1" dirty="0">
-                <a:solidFill>
-                  <a:srgbClr val="1F1B2E"/>
-                </a:solidFill>
-                <a:latin typeface="Arial" pitchFamily="34" charset="0"/>
-                <a:ea typeface="Arial" pitchFamily="34" charset="-122"/>
-                <a:cs typeface="Arial" pitchFamily="34" charset="-120"/>
-              </a:rPr>
-              <a:t>$4.91M</a:t>
-            </a:r>
-            <a:endParaRPr lang="en-US" sz="2400" dirty="0"/>
-          </a:p>
-        </p:txBody>
-      </p:sp>
-      <p:sp>
-        <p:nvSpPr>
-          <p:cNvPr id="9" name="Text 6"/>
-          <p:cNvSpPr txBox="1"/>
-          <p:nvPr/>
-        </p:nvSpPr>
-        <p:spPr>
-          <a:xfrm>
-            <a:off x="310896" y="3364992"/>
-            <a:ext cx="1417320" cy="457200"/>
-          </a:xfrm>
-          <a:prstGeom prst="rect">
-            <a:avLst/>
-          </a:prstGeom>
-          <a:noFill/>
-          <a:ln/>
-        </p:spPr>
-        <p:txBody>
-          <a:bodyPr wrap="square" lIns="0" tIns="0" rIns="0" bIns="0" rtlCol="0" anchor="t"/>
-          <a:lstStyle/>
-          <a:p>
-            <a:pPr indent="0" marL="0">
-              <a:buNone/>
-            </a:pPr>
-            <a:r>
-              <a:rPr lang="en-US" sz="850" dirty="0">
+              <a:rPr lang="en-US" sz="700" spc="200" kern="0" dirty="0">
                 <a:solidFill>
                   <a:srgbClr val="6B6685"/>
                 </a:solidFill>
@@ -2680,22 +2720,22 @@
                 <a:ea typeface="Arial" pitchFamily="34" charset="-122"/>
                 <a:cs typeface="Arial" pitchFamily="34" charset="-120"/>
               </a:rPr>
-              <a:t>average cost of one supply-chain compromise</a:t>
-            </a:r>
-            <a:endParaRPr lang="en-US" sz="850" dirty="0"/>
-          </a:p>
-        </p:txBody>
-      </p:sp>
-      <p:sp>
-        <p:nvSpPr>
-          <p:cNvPr id="10" name="Text 7"/>
-          <p:cNvSpPr txBox="1"/>
-          <p:nvPr/>
-        </p:nvSpPr>
-        <p:spPr>
-          <a:xfrm>
-            <a:off x="310896" y="3840480"/>
-            <a:ext cx="1417320" cy="182880"/>
+              <a:t>TEAM SPECTRA  ·  RIPPLEGUARD  ·  MANIPAL HACKATHON 2026</a:t>
+            </a:r>
+            <a:endParaRPr lang="en-US" sz="700" dirty="0"/>
+          </a:p>
+        </p:txBody>
+      </p:sp>
+      <p:sp>
+        <p:nvSpPr>
+          <p:cNvPr id="8" name="Text 4"/>
+          <p:cNvSpPr txBox="1"/>
+          <p:nvPr/>
+        </p:nvSpPr>
+        <p:spPr>
+          <a:xfrm>
+            <a:off x="7863840" y="4983480"/>
+            <a:ext cx="969264" cy="146304"/>
           </a:xfrm>
           <a:prstGeom prst="rect">
             <a:avLst/>
@@ -2707,11 +2747,11 @@
           <a:bodyPr wrap="square" lIns="0" tIns="0" rIns="0" bIns="0" rtlCol="0" anchor="ctr"/>
           <a:lstStyle/>
           <a:p>
-            <a:pPr indent="0" marL="0">
-              <a:buNone/>
-            </a:pPr>
-            <a:r>
-              <a:rPr lang="en-US" sz="750" i="1" dirty="0">
+            <a:pPr algn="r" indent="0" marL="0">
+              <a:buNone/>
+            </a:pPr>
+            <a:r>
+              <a:rPr lang="en-US" sz="700" spc="200" kern="0" dirty="0">
                 <a:solidFill>
                   <a:srgbClr val="6B6685"/>
                 </a:solidFill>
@@ -2719,261 +2759,31 @@
                 <a:ea typeface="Arial" pitchFamily="34" charset="-122"/>
                 <a:cs typeface="Arial" pitchFamily="34" charset="-120"/>
               </a:rPr>
-              <a:t>IBM 2025</a:t>
-            </a:r>
-            <a:endParaRPr lang="en-US" sz="750" dirty="0"/>
-          </a:p>
-        </p:txBody>
-      </p:sp>
-      <p:sp>
-        <p:nvSpPr>
-          <p:cNvPr id="11" name="Text 8"/>
-          <p:cNvSpPr txBox="1"/>
-          <p:nvPr/>
-        </p:nvSpPr>
-        <p:spPr>
-          <a:xfrm>
-            <a:off x="1865376" y="2907792"/>
-            <a:ext cx="1463040" cy="457200"/>
-          </a:xfrm>
-          <a:prstGeom prst="rect">
-            <a:avLst/>
-          </a:prstGeom>
-          <a:noFill/>
-          <a:ln/>
-        </p:spPr>
-        <p:txBody>
-          <a:bodyPr wrap="square" lIns="0" tIns="0" rIns="0" bIns="0" rtlCol="0" anchor="ctr"/>
-          <a:lstStyle/>
-          <a:p>
-            <a:pPr indent="0" marL="0">
-              <a:buNone/>
-            </a:pPr>
-            <a:r>
-              <a:rPr lang="en-US" sz="2400" b="1" dirty="0">
-                <a:solidFill>
-                  <a:srgbClr val="1F1B2E"/>
-                </a:solidFill>
-                <a:latin typeface="Arial" pitchFamily="34" charset="0"/>
-                <a:ea typeface="Arial" pitchFamily="34" charset="-122"/>
-                <a:cs typeface="Arial" pitchFamily="34" charset="-120"/>
-              </a:rPr>
-              <a:t>267 days</a:t>
-            </a:r>
-            <a:endParaRPr lang="en-US" sz="2400" dirty="0"/>
-          </a:p>
-        </p:txBody>
-      </p:sp>
-      <p:sp>
-        <p:nvSpPr>
-          <p:cNvPr id="12" name="Text 9"/>
-          <p:cNvSpPr txBox="1"/>
-          <p:nvPr/>
-        </p:nvSpPr>
-        <p:spPr>
-          <a:xfrm>
-            <a:off x="1865376" y="3364992"/>
-            <a:ext cx="1417320" cy="457200"/>
-          </a:xfrm>
-          <a:prstGeom prst="rect">
-            <a:avLst/>
-          </a:prstGeom>
-          <a:noFill/>
-          <a:ln/>
-        </p:spPr>
-        <p:txBody>
-          <a:bodyPr wrap="square" lIns="0" tIns="0" rIns="0" bIns="0" rtlCol="0" anchor="t"/>
-          <a:lstStyle/>
-          <a:p>
-            <a:pPr indent="0" marL="0">
-              <a:buNone/>
-            </a:pPr>
-            <a:r>
-              <a:rPr lang="en-US" sz="850" dirty="0">
-                <a:solidFill>
-                  <a:srgbClr val="6B6685"/>
-                </a:solidFill>
-                <a:latin typeface="Arial" pitchFamily="34" charset="0"/>
-                <a:ea typeface="Arial" pitchFamily="34" charset="-122"/>
-                <a:cs typeface="Arial" pitchFamily="34" charset="-120"/>
-              </a:rPr>
-              <a:t>to identify and contain — the longest of any breach vector</a:t>
-            </a:r>
-            <a:endParaRPr lang="en-US" sz="850" dirty="0"/>
-          </a:p>
-        </p:txBody>
-      </p:sp>
-      <p:sp>
-        <p:nvSpPr>
-          <p:cNvPr id="13" name="Text 10"/>
-          <p:cNvSpPr txBox="1"/>
-          <p:nvPr/>
-        </p:nvSpPr>
-        <p:spPr>
-          <a:xfrm>
-            <a:off x="1865376" y="3840480"/>
-            <a:ext cx="1417320" cy="182880"/>
-          </a:xfrm>
-          <a:prstGeom prst="rect">
-            <a:avLst/>
-          </a:prstGeom>
-          <a:noFill/>
-          <a:ln/>
-        </p:spPr>
-        <p:txBody>
-          <a:bodyPr wrap="square" lIns="0" tIns="0" rIns="0" bIns="0" rtlCol="0" anchor="ctr"/>
-          <a:lstStyle/>
-          <a:p>
-            <a:pPr indent="0" marL="0">
-              <a:buNone/>
-            </a:pPr>
-            <a:r>
-              <a:rPr lang="en-US" sz="750" i="1" dirty="0">
-                <a:solidFill>
-                  <a:srgbClr val="6B6685"/>
-                </a:solidFill>
-                <a:latin typeface="Arial" pitchFamily="34" charset="0"/>
-                <a:ea typeface="Arial" pitchFamily="34" charset="-122"/>
-                <a:cs typeface="Arial" pitchFamily="34" charset="-120"/>
-              </a:rPr>
-              <a:t>IBM 2025</a:t>
-            </a:r>
-            <a:endParaRPr lang="en-US" sz="750" dirty="0"/>
-          </a:p>
-        </p:txBody>
-      </p:sp>
-      <p:sp>
-        <p:nvSpPr>
-          <p:cNvPr id="14" name="Text 11"/>
-          <p:cNvSpPr txBox="1"/>
-          <p:nvPr/>
-        </p:nvSpPr>
-        <p:spPr>
-          <a:xfrm>
-            <a:off x="3419856" y="2907792"/>
-            <a:ext cx="1463040" cy="457200"/>
-          </a:xfrm>
-          <a:prstGeom prst="rect">
-            <a:avLst/>
-          </a:prstGeom>
-          <a:noFill/>
-          <a:ln/>
-        </p:spPr>
-        <p:txBody>
-          <a:bodyPr wrap="square" lIns="0" tIns="0" rIns="0" bIns="0" rtlCol="0" anchor="ctr"/>
-          <a:lstStyle/>
-          <a:p>
-            <a:pPr indent="0" marL="0">
-              <a:buNone/>
-            </a:pPr>
-            <a:r>
-              <a:rPr lang="en-US" sz="2400" b="1" dirty="0">
-                <a:solidFill>
-                  <a:srgbClr val="1F1B2E"/>
-                </a:solidFill>
-                <a:latin typeface="Arial" pitchFamily="34" charset="0"/>
-                <a:ea typeface="Arial" pitchFamily="34" charset="-122"/>
-                <a:cs typeface="Arial" pitchFamily="34" charset="-120"/>
-              </a:rPr>
-              <a:t>79</a:t>
-            </a:r>
-            <a:endParaRPr lang="en-US" sz="2400" dirty="0"/>
-          </a:p>
-        </p:txBody>
-      </p:sp>
-      <p:sp>
-        <p:nvSpPr>
-          <p:cNvPr id="15" name="Text 12"/>
-          <p:cNvSpPr txBox="1"/>
-          <p:nvPr/>
-        </p:nvSpPr>
-        <p:spPr>
-          <a:xfrm>
-            <a:off x="3419856" y="3364992"/>
-            <a:ext cx="1417320" cy="457200"/>
-          </a:xfrm>
-          <a:prstGeom prst="rect">
-            <a:avLst/>
-          </a:prstGeom>
-          <a:noFill/>
-          <a:ln/>
-        </p:spPr>
-        <p:txBody>
-          <a:bodyPr wrap="square" lIns="0" tIns="0" rIns="0" bIns="0" rtlCol="0" anchor="t"/>
-          <a:lstStyle/>
-          <a:p>
-            <a:pPr indent="0" marL="0">
-              <a:buNone/>
-            </a:pPr>
-            <a:r>
-              <a:rPr lang="en-US" sz="850" dirty="0">
-                <a:solidFill>
-                  <a:srgbClr val="6B6685"/>
-                </a:solidFill>
-                <a:latin typeface="Arial" pitchFamily="34" charset="0"/>
-                <a:ea typeface="Arial" pitchFamily="34" charset="-122"/>
-                <a:cs typeface="Arial" pitchFamily="34" charset="-120"/>
-              </a:rPr>
-              <a:t>transitive packages pulled in by the average npm install</a:t>
-            </a:r>
-            <a:endParaRPr lang="en-US" sz="850" dirty="0"/>
-          </a:p>
-        </p:txBody>
-      </p:sp>
-      <p:sp>
-        <p:nvSpPr>
-          <p:cNvPr id="16" name="Text 13"/>
-          <p:cNvSpPr txBox="1"/>
-          <p:nvPr/>
-        </p:nvSpPr>
-        <p:spPr>
-          <a:xfrm>
-            <a:off x="3419856" y="3840480"/>
-            <a:ext cx="1417320" cy="182880"/>
-          </a:xfrm>
-          <a:prstGeom prst="rect">
-            <a:avLst/>
-          </a:prstGeom>
-          <a:noFill/>
-          <a:ln/>
-        </p:spPr>
-        <p:txBody>
-          <a:bodyPr wrap="square" lIns="0" tIns="0" rIns="0" bIns="0" rtlCol="0" anchor="ctr"/>
-          <a:lstStyle/>
-          <a:p>
-            <a:pPr indent="0" marL="0">
-              <a:buNone/>
-            </a:pPr>
-            <a:r>
-              <a:rPr lang="en-US" sz="750" i="1" dirty="0">
-                <a:solidFill>
-                  <a:srgbClr val="6B6685"/>
-                </a:solidFill>
-                <a:latin typeface="Arial" pitchFamily="34" charset="0"/>
-                <a:ea typeface="Arial" pitchFamily="34" charset="-122"/>
-                <a:cs typeface="Arial" pitchFamily="34" charset="-120"/>
-              </a:rPr>
-              <a:t>Zimmermann et al.</a:t>
-            </a:r>
-            <a:endParaRPr lang="en-US" sz="750" dirty="0"/>
-          </a:p>
-        </p:txBody>
-      </p:sp>
-      <p:sp>
-        <p:nvSpPr>
-          <p:cNvPr id="17" name="Shape 14"/>
+              <a:t>2 / 6</a:t>
+            </a:r>
+            <a:endParaRPr lang="en-US" sz="700" dirty="0"/>
+          </a:p>
+        </p:txBody>
+      </p:sp>
+      <p:sp>
+        <p:nvSpPr>
+          <p:cNvPr id="9" name="Shape 5"/>
           <p:cNvSpPr/>
           <p:nvPr/>
         </p:nvSpPr>
         <p:spPr>
           <a:xfrm>
-            <a:off x="310896" y="4114800"/>
-            <a:ext cx="4480560" cy="0"/>
-          </a:xfrm>
-          <a:prstGeom prst="line">
-            <a:avLst/>
-          </a:prstGeom>
-          <a:noFill/>
+            <a:off x="310896" y="1051560"/>
+            <a:ext cx="4526280" cy="1691640"/>
+          </a:xfrm>
+          <a:prstGeom prst="roundRect">
+            <a:avLst>
+              <a:gd name="adj" fmla="val 5405"/>
+            </a:avLst>
+          </a:prstGeom>
+          <a:solidFill>
+            <a:srgbClr val="F4F1FB"/>
+          </a:solidFill>
           <a:ln w="9525">
             <a:solidFill>
               <a:srgbClr val="D9D3EA"/>
@@ -2984,14 +2794,53 @@
       </p:sp>
       <p:sp>
         <p:nvSpPr>
-          <p:cNvPr id="18" name="Text 15"/>
-          <p:cNvSpPr txBox="1"/>
-          <p:nvPr/>
-        </p:nvSpPr>
-        <p:spPr>
-          <a:xfrm>
-            <a:off x="310896" y="4187952"/>
-            <a:ext cx="4480560" cy="411480"/>
+          <p:cNvPr id="10" name="Text 6"/>
+          <p:cNvSpPr txBox="1"/>
+          <p:nvPr/>
+        </p:nvSpPr>
+        <p:spPr>
+          <a:xfrm>
+            <a:off x="457200" y="1097280"/>
+            <a:ext cx="4297680" cy="868680"/>
+          </a:xfrm>
+          <a:prstGeom prst="rect">
+            <a:avLst/>
+          </a:prstGeom>
+          <a:noFill/>
+          <a:ln/>
+        </p:spPr>
+        <p:txBody>
+          <a:bodyPr wrap="square" lIns="0" tIns="0" rIns="0" bIns="0" rtlCol="0" anchor="ctr"/>
+          <a:lstStyle/>
+          <a:p>
+            <a:pPr indent="0" marL="0">
+              <a:buNone/>
+            </a:pPr>
+            <a:r>
+              <a:rPr lang="en-US" sz="6000" b="1" dirty="0">
+                <a:solidFill>
+                  <a:srgbClr val="7C3AED"/>
+                </a:solidFill>
+                <a:latin typeface="Arial" pitchFamily="34" charset="0"/>
+                <a:ea typeface="Arial" pitchFamily="34" charset="-122"/>
+                <a:cs typeface="Arial" pitchFamily="34" charset="-120"/>
+              </a:rPr>
+              <a:t>454,600</a:t>
+            </a:r>
+            <a:endParaRPr lang="en-US" sz="6000" dirty="0"/>
+          </a:p>
+        </p:txBody>
+      </p:sp>
+      <p:sp>
+        <p:nvSpPr>
+          <p:cNvPr id="11" name="Text 7"/>
+          <p:cNvSpPr txBox="1"/>
+          <p:nvPr/>
+        </p:nvSpPr>
+        <p:spPr>
+          <a:xfrm>
+            <a:off x="457200" y="1938528"/>
+            <a:ext cx="4251960" cy="502920"/>
           </a:xfrm>
           <a:prstGeom prst="rect">
             <a:avLst/>
@@ -3007,21 +2856,7 @@
               <a:buNone/>
             </a:pPr>
             <a:r>
-              <a:rPr lang="en-US" sz="950" b="1" dirty="0">
-                <a:solidFill>
-                  <a:srgbClr val="E11D48"/>
-                </a:solidFill>
-                <a:latin typeface="Arial" pitchFamily="34" charset="0"/>
-                <a:ea typeface="Arial" pitchFamily="34" charset="-122"/>
-                <a:cs typeface="Arial" pitchFamily="34" charset="-120"/>
-              </a:rPr>
-              <a:t>Shai-Hulud, Sep 2025: </a:t>
-            </a:r>
-            <a:pPr indent="0" marL="0">
-              <a:buNone/>
-            </a:pPr>
-            <a:r>
-              <a:rPr lang="en-US" sz="950" dirty="0">
+              <a:rPr lang="en-US" sz="1200" dirty="0">
                 <a:solidFill>
                   <a:srgbClr val="1F1B2E"/>
                 </a:solidFill>
@@ -3029,22 +2864,22 @@
                 <a:ea typeface="Arial" pitchFamily="34" charset="-122"/>
                 <a:cs typeface="Arial" pitchFamily="34" charset="-120"/>
               </a:rPr>
-              <a:t>the first self-replicating npm worm spread package to package through the same dependency edges nobody was watching.</a:t>
-            </a:r>
-            <a:endParaRPr lang="en-US" sz="950" dirty="0"/>
-          </a:p>
-        </p:txBody>
-      </p:sp>
-      <p:sp>
-        <p:nvSpPr>
-          <p:cNvPr id="19" name="Text 16"/>
-          <p:cNvSpPr txBox="1"/>
-          <p:nvPr/>
-        </p:nvSpPr>
-        <p:spPr>
-          <a:xfrm>
-            <a:off x="5212080" y="1143000"/>
-            <a:ext cx="3566160" cy="201168"/>
+              <a:t>new malicious open-source packages catalogued in 2025 — up 75% year on year. 99% of them live on npm.</a:t>
+            </a:r>
+            <a:endParaRPr lang="en-US" sz="1200" dirty="0"/>
+          </a:p>
+        </p:txBody>
+      </p:sp>
+      <p:sp>
+        <p:nvSpPr>
+          <p:cNvPr id="12" name="Text 8"/>
+          <p:cNvSpPr txBox="1"/>
+          <p:nvPr/>
+        </p:nvSpPr>
+        <p:spPr>
+          <a:xfrm>
+            <a:off x="457200" y="2487168"/>
+            <a:ext cx="4251960" cy="182880"/>
           </a:xfrm>
           <a:prstGeom prst="rect">
             <a:avLst/>
@@ -3060,124 +2895,7 @@
               <a:buNone/>
             </a:pPr>
             <a:r>
-              <a:rPr lang="en-US" sz="900" b="1" spc="200" kern="0" dirty="0">
-                <a:solidFill>
-                  <a:srgbClr val="7C3AED"/>
-                </a:solidFill>
-                <a:latin typeface="Arial" pitchFamily="34" charset="0"/>
-                <a:ea typeface="Arial" pitchFamily="34" charset="-122"/>
-                <a:cs typeface="Arial" pitchFamily="34" charset="-120"/>
-              </a:rPr>
-              <a:t>WHY TODAY'S SCANNERS MISS IT</a:t>
-            </a:r>
-            <a:endParaRPr lang="en-US" sz="900" dirty="0"/>
-          </a:p>
-        </p:txBody>
-      </p:sp>
-      <p:sp>
-        <p:nvSpPr>
-          <p:cNvPr id="20" name="Text 17"/>
-          <p:cNvSpPr txBox="1"/>
-          <p:nvPr/>
-        </p:nvSpPr>
-        <p:spPr>
-          <a:xfrm>
-            <a:off x="5212080" y="1463040"/>
-            <a:ext cx="548640" cy="457200"/>
-          </a:xfrm>
-          <a:prstGeom prst="rect">
-            <a:avLst/>
-          </a:prstGeom>
-          <a:noFill/>
-          <a:ln/>
-        </p:spPr>
-        <p:txBody>
-          <a:bodyPr wrap="square" lIns="0" tIns="0" rIns="0" bIns="0" rtlCol="0" anchor="ctr"/>
-          <a:lstStyle/>
-          <a:p>
-            <a:pPr indent="0" marL="0">
-              <a:buNone/>
-            </a:pPr>
-            <a:r>
-              <a:rPr lang="en-US" sz="3000" b="1" dirty="0">
-                <a:solidFill>
-                  <a:srgbClr val="A855F7"/>
-                </a:solidFill>
-                <a:latin typeface="Arial" pitchFamily="34" charset="0"/>
-                <a:ea typeface="Arial" pitchFamily="34" charset="-122"/>
-                <a:cs typeface="Arial" pitchFamily="34" charset="-120"/>
-              </a:rPr>
-              <a:t>01</a:t>
-            </a:r>
-            <a:endParaRPr lang="en-US" sz="3000" dirty="0"/>
-          </a:p>
-        </p:txBody>
-      </p:sp>
-      <p:sp>
-        <p:nvSpPr>
-          <p:cNvPr id="21" name="Text 18"/>
-          <p:cNvSpPr txBox="1"/>
-          <p:nvPr/>
-        </p:nvSpPr>
-        <p:spPr>
-          <a:xfrm>
-            <a:off x="5806440" y="1481328"/>
-            <a:ext cx="2971800" cy="256032"/>
-          </a:xfrm>
-          <a:prstGeom prst="rect">
-            <a:avLst/>
-          </a:prstGeom>
-          <a:noFill/>
-          <a:ln/>
-        </p:spPr>
-        <p:txBody>
-          <a:bodyPr wrap="square" lIns="0" tIns="0" rIns="0" bIns="0" rtlCol="0" anchor="ctr"/>
-          <a:lstStyle/>
-          <a:p>
-            <a:pPr indent="0" marL="0">
-              <a:buNone/>
-            </a:pPr>
-            <a:r>
-              <a:rPr lang="en-US" sz="1200" b="1" dirty="0">
-                <a:solidFill>
-                  <a:srgbClr val="1F1B2E"/>
-                </a:solidFill>
-                <a:latin typeface="Arial" pitchFamily="34" charset="0"/>
-                <a:ea typeface="Arial" pitchFamily="34" charset="-122"/>
-                <a:cs typeface="Arial" pitchFamily="34" charset="-120"/>
-              </a:rPr>
-              <a:t>They score packages one at a time.</a:t>
-            </a:r>
-            <a:endParaRPr lang="en-US" sz="1200" dirty="0"/>
-          </a:p>
-        </p:txBody>
-      </p:sp>
-      <p:sp>
-        <p:nvSpPr>
-          <p:cNvPr id="22" name="Text 19"/>
-          <p:cNvSpPr txBox="1"/>
-          <p:nvPr/>
-        </p:nvSpPr>
-        <p:spPr>
-          <a:xfrm>
-            <a:off x="5806440" y="1755648"/>
-            <a:ext cx="2971800" cy="566928"/>
-          </a:xfrm>
-          <a:prstGeom prst="rect">
-            <a:avLst/>
-          </a:prstGeom>
-          <a:noFill/>
-          <a:ln/>
-        </p:spPr>
-        <p:txBody>
-          <a:bodyPr wrap="square" lIns="0" tIns="0" rIns="0" bIns="0" rtlCol="0" anchor="t"/>
-          <a:lstStyle/>
-          <a:p>
-            <a:pPr indent="0" marL="0">
-              <a:buNone/>
-            </a:pPr>
-            <a:r>
-              <a:rPr lang="en-US" sz="950" dirty="0">
+              <a:rPr lang="en-US" sz="800" i="1" dirty="0">
                 <a:solidFill>
                   <a:srgbClr val="6B6685"/>
                 </a:solidFill>
@@ -3185,22 +2903,22 @@
                 <a:ea typeface="Arial" pitchFamily="34" charset="-122"/>
                 <a:cs typeface="Arial" pitchFamily="34" charset="-120"/>
               </a:rPr>
-              <a:t>A CVSS number says how bad a bug is — never how much of your app sits on top of that package.</a:t>
-            </a:r>
-            <a:endParaRPr lang="en-US" sz="950" dirty="0"/>
-          </a:p>
-        </p:txBody>
-      </p:sp>
-      <p:sp>
-        <p:nvSpPr>
-          <p:cNvPr id="23" name="Shape 20"/>
+              <a:t>Sonatype · State of the Software Supply Chain 2026</a:t>
+            </a:r>
+            <a:endParaRPr lang="en-US" sz="800" dirty="0"/>
+          </a:p>
+        </p:txBody>
+      </p:sp>
+      <p:sp>
+        <p:nvSpPr>
+          <p:cNvPr id="13" name="Shape 9"/>
           <p:cNvSpPr/>
           <p:nvPr/>
         </p:nvSpPr>
         <p:spPr>
           <a:xfrm>
-            <a:off x="5212080" y="2395728"/>
-            <a:ext cx="3566160" cy="0"/>
+            <a:off x="310896" y="2788920"/>
+            <a:ext cx="4480560" cy="0"/>
           </a:xfrm>
           <a:prstGeom prst="line">
             <a:avLst/>
@@ -3216,14 +2934,14 @@
       </p:sp>
       <p:sp>
         <p:nvSpPr>
-          <p:cNvPr id="24" name="Text 21"/>
-          <p:cNvSpPr txBox="1"/>
-          <p:nvPr/>
-        </p:nvSpPr>
-        <p:spPr>
-          <a:xfrm>
-            <a:off x="5212080" y="2514600"/>
-            <a:ext cx="548640" cy="457200"/>
+          <p:cNvPr id="14" name="Text 10"/>
+          <p:cNvSpPr txBox="1"/>
+          <p:nvPr/>
+        </p:nvSpPr>
+        <p:spPr>
+          <a:xfrm>
+            <a:off x="310896" y="2907792"/>
+            <a:ext cx="1463040" cy="457200"/>
           </a:xfrm>
           <a:prstGeom prst="rect">
             <a:avLst/>
@@ -3239,30 +2957,69 @@
               <a:buNone/>
             </a:pPr>
             <a:r>
-              <a:rPr lang="en-US" sz="3000" b="1" dirty="0">
-                <a:solidFill>
-                  <a:srgbClr val="A855F7"/>
-                </a:solidFill>
-                <a:latin typeface="Arial" pitchFamily="34" charset="0"/>
-                <a:ea typeface="Arial" pitchFamily="34" charset="-122"/>
-                <a:cs typeface="Arial" pitchFamily="34" charset="-120"/>
-              </a:rPr>
-              <a:t>02</a:t>
-            </a:r>
-            <a:endParaRPr lang="en-US" sz="3000" dirty="0"/>
-          </a:p>
-        </p:txBody>
-      </p:sp>
-      <p:sp>
-        <p:nvSpPr>
-          <p:cNvPr id="25" name="Text 22"/>
-          <p:cNvSpPr txBox="1"/>
-          <p:nvPr/>
-        </p:nvSpPr>
-        <p:spPr>
-          <a:xfrm>
-            <a:off x="5806440" y="2532888"/>
-            <a:ext cx="2971800" cy="256032"/>
+              <a:rPr lang="en-US" sz="2400" b="1" dirty="0">
+                <a:solidFill>
+                  <a:srgbClr val="1F1B2E"/>
+                </a:solidFill>
+                <a:latin typeface="Arial" pitchFamily="34" charset="0"/>
+                <a:ea typeface="Arial" pitchFamily="34" charset="-122"/>
+                <a:cs typeface="Arial" pitchFamily="34" charset="-120"/>
+              </a:rPr>
+              <a:t>$4.91M</a:t>
+            </a:r>
+            <a:endParaRPr lang="en-US" sz="2400" dirty="0"/>
+          </a:p>
+        </p:txBody>
+      </p:sp>
+      <p:sp>
+        <p:nvSpPr>
+          <p:cNvPr id="15" name="Text 11"/>
+          <p:cNvSpPr txBox="1"/>
+          <p:nvPr/>
+        </p:nvSpPr>
+        <p:spPr>
+          <a:xfrm>
+            <a:off x="310896" y="3364992"/>
+            <a:ext cx="1417320" cy="457200"/>
+          </a:xfrm>
+          <a:prstGeom prst="rect">
+            <a:avLst/>
+          </a:prstGeom>
+          <a:noFill/>
+          <a:ln/>
+        </p:spPr>
+        <p:txBody>
+          <a:bodyPr wrap="square" lIns="0" tIns="0" rIns="0" bIns="0" rtlCol="0" anchor="t"/>
+          <a:lstStyle/>
+          <a:p>
+            <a:pPr indent="0" marL="0">
+              <a:buNone/>
+            </a:pPr>
+            <a:r>
+              <a:rPr lang="en-US" sz="850" dirty="0">
+                <a:solidFill>
+                  <a:srgbClr val="6B6685"/>
+                </a:solidFill>
+                <a:latin typeface="Arial" pitchFamily="34" charset="0"/>
+                <a:ea typeface="Arial" pitchFamily="34" charset="-122"/>
+                <a:cs typeface="Arial" pitchFamily="34" charset="-120"/>
+              </a:rPr>
+              <a:t>average cost of one supply-chain compromise</a:t>
+            </a:r>
+            <a:endParaRPr lang="en-US" sz="850" dirty="0"/>
+          </a:p>
+        </p:txBody>
+      </p:sp>
+      <p:sp>
+        <p:nvSpPr>
+          <p:cNvPr id="16" name="Text 12"/>
+          <p:cNvSpPr txBox="1"/>
+          <p:nvPr/>
+        </p:nvSpPr>
+        <p:spPr>
+          <a:xfrm>
+            <a:off x="310896" y="3840480"/>
+            <a:ext cx="1417320" cy="182880"/>
           </a:xfrm>
           <a:prstGeom prst="rect">
             <a:avLst/>
@@ -3278,7 +3035,46 @@
               <a:buNone/>
             </a:pPr>
             <a:r>
-              <a:rPr lang="en-US" sz="1200" b="1" dirty="0">
+              <a:rPr lang="en-US" sz="750" i="1" dirty="0">
+                <a:solidFill>
+                  <a:srgbClr val="6B6685"/>
+                </a:solidFill>
+                <a:latin typeface="Arial" pitchFamily="34" charset="0"/>
+                <a:ea typeface="Arial" pitchFamily="34" charset="-122"/>
+                <a:cs typeface="Arial" pitchFamily="34" charset="-120"/>
+              </a:rPr>
+              <a:t>IBM 2025</a:t>
+            </a:r>
+            <a:endParaRPr lang="en-US" sz="750" dirty="0"/>
+          </a:p>
+        </p:txBody>
+      </p:sp>
+      <p:sp>
+        <p:nvSpPr>
+          <p:cNvPr id="17" name="Text 13"/>
+          <p:cNvSpPr txBox="1"/>
+          <p:nvPr/>
+        </p:nvSpPr>
+        <p:spPr>
+          <a:xfrm>
+            <a:off x="1865376" y="2907792"/>
+            <a:ext cx="1463040" cy="457200"/>
+          </a:xfrm>
+          <a:prstGeom prst="rect">
+            <a:avLst/>
+          </a:prstGeom>
+          <a:noFill/>
+          <a:ln/>
+        </p:spPr>
+        <p:txBody>
+          <a:bodyPr wrap="square" lIns="0" tIns="0" rIns="0" bIns="0" rtlCol="0" anchor="ctr"/>
+          <a:lstStyle/>
+          <a:p>
+            <a:pPr indent="0" marL="0">
+              <a:buNone/>
+            </a:pPr>
+            <a:r>
+              <a:rPr lang="en-US" sz="2400" b="1" dirty="0">
                 <a:solidFill>
                   <a:srgbClr val="1F1B2E"/>
                 </a:solidFill>
@@ -3286,22 +3082,22 @@
                 <a:ea typeface="Arial" pitchFamily="34" charset="-122"/>
                 <a:cs typeface="Arial" pitchFamily="34" charset="-120"/>
               </a:rPr>
-              <a:t>They can't show the path.</a:t>
-            </a:r>
-            <a:endParaRPr lang="en-US" sz="1200" dirty="0"/>
-          </a:p>
-        </p:txBody>
-      </p:sp>
-      <p:sp>
-        <p:nvSpPr>
-          <p:cNvPr id="26" name="Text 23"/>
-          <p:cNvSpPr txBox="1"/>
-          <p:nvPr/>
-        </p:nvSpPr>
-        <p:spPr>
-          <a:xfrm>
-            <a:off x="5806440" y="2807208"/>
-            <a:ext cx="2971800" cy="566928"/>
+              <a:t>267 days</a:t>
+            </a:r>
+            <a:endParaRPr lang="en-US" sz="2400" dirty="0"/>
+          </a:p>
+        </p:txBody>
+      </p:sp>
+      <p:sp>
+        <p:nvSpPr>
+          <p:cNvPr id="18" name="Text 14"/>
+          <p:cNvSpPr txBox="1"/>
+          <p:nvPr/>
+        </p:nvSpPr>
+        <p:spPr>
+          <a:xfrm>
+            <a:off x="1865376" y="3364992"/>
+            <a:ext cx="1417320" cy="457200"/>
           </a:xfrm>
           <a:prstGeom prst="rect">
             <a:avLst/>
@@ -3317,7 +3113,7 @@
               <a:buNone/>
             </a:pPr>
             <a:r>
-              <a:rPr lang="en-US" sz="950" dirty="0">
+              <a:rPr lang="en-US" sz="850" dirty="0">
                 <a:solidFill>
                   <a:srgbClr val="6B6685"/>
                 </a:solidFill>
@@ -3325,22 +3121,178 @@
                 <a:ea typeface="Arial" pitchFamily="34" charset="-122"/>
                 <a:cs typeface="Arial" pitchFamily="34" charset="-120"/>
               </a:rPr>
-              <a:t>Which apps get hit, through which chain, in what order? The graph is never modelled.</a:t>
-            </a:r>
-            <a:endParaRPr lang="en-US" sz="950" dirty="0"/>
-          </a:p>
-        </p:txBody>
-      </p:sp>
-      <p:sp>
-        <p:nvSpPr>
-          <p:cNvPr id="27" name="Shape 24"/>
+              <a:t>to identify and contain — the longest of any breach vector</a:t>
+            </a:r>
+            <a:endParaRPr lang="en-US" sz="850" dirty="0"/>
+          </a:p>
+        </p:txBody>
+      </p:sp>
+      <p:sp>
+        <p:nvSpPr>
+          <p:cNvPr id="19" name="Text 15"/>
+          <p:cNvSpPr txBox="1"/>
+          <p:nvPr/>
+        </p:nvSpPr>
+        <p:spPr>
+          <a:xfrm>
+            <a:off x="1865376" y="3840480"/>
+            <a:ext cx="1417320" cy="182880"/>
+          </a:xfrm>
+          <a:prstGeom prst="rect">
+            <a:avLst/>
+          </a:prstGeom>
+          <a:noFill/>
+          <a:ln/>
+        </p:spPr>
+        <p:txBody>
+          <a:bodyPr wrap="square" lIns="0" tIns="0" rIns="0" bIns="0" rtlCol="0" anchor="ctr"/>
+          <a:lstStyle/>
+          <a:p>
+            <a:pPr indent="0" marL="0">
+              <a:buNone/>
+            </a:pPr>
+            <a:r>
+              <a:rPr lang="en-US" sz="750" i="1" dirty="0">
+                <a:solidFill>
+                  <a:srgbClr val="6B6685"/>
+                </a:solidFill>
+                <a:latin typeface="Arial" pitchFamily="34" charset="0"/>
+                <a:ea typeface="Arial" pitchFamily="34" charset="-122"/>
+                <a:cs typeface="Arial" pitchFamily="34" charset="-120"/>
+              </a:rPr>
+              <a:t>IBM 2025</a:t>
+            </a:r>
+            <a:endParaRPr lang="en-US" sz="750" dirty="0"/>
+          </a:p>
+        </p:txBody>
+      </p:sp>
+      <p:sp>
+        <p:nvSpPr>
+          <p:cNvPr id="20" name="Text 16"/>
+          <p:cNvSpPr txBox="1"/>
+          <p:nvPr/>
+        </p:nvSpPr>
+        <p:spPr>
+          <a:xfrm>
+            <a:off x="3419856" y="2907792"/>
+            <a:ext cx="1463040" cy="457200"/>
+          </a:xfrm>
+          <a:prstGeom prst="rect">
+            <a:avLst/>
+          </a:prstGeom>
+          <a:noFill/>
+          <a:ln/>
+        </p:spPr>
+        <p:txBody>
+          <a:bodyPr wrap="square" lIns="0" tIns="0" rIns="0" bIns="0" rtlCol="0" anchor="ctr"/>
+          <a:lstStyle/>
+          <a:p>
+            <a:pPr indent="0" marL="0">
+              <a:buNone/>
+            </a:pPr>
+            <a:r>
+              <a:rPr lang="en-US" sz="2400" b="1" dirty="0">
+                <a:solidFill>
+                  <a:srgbClr val="1F1B2E"/>
+                </a:solidFill>
+                <a:latin typeface="Arial" pitchFamily="34" charset="0"/>
+                <a:ea typeface="Arial" pitchFamily="34" charset="-122"/>
+                <a:cs typeface="Arial" pitchFamily="34" charset="-120"/>
+              </a:rPr>
+              <a:t>79</a:t>
+            </a:r>
+            <a:endParaRPr lang="en-US" sz="2400" dirty="0"/>
+          </a:p>
+        </p:txBody>
+      </p:sp>
+      <p:sp>
+        <p:nvSpPr>
+          <p:cNvPr id="21" name="Text 17"/>
+          <p:cNvSpPr txBox="1"/>
+          <p:nvPr/>
+        </p:nvSpPr>
+        <p:spPr>
+          <a:xfrm>
+            <a:off x="3419856" y="3364992"/>
+            <a:ext cx="1417320" cy="457200"/>
+          </a:xfrm>
+          <a:prstGeom prst="rect">
+            <a:avLst/>
+          </a:prstGeom>
+          <a:noFill/>
+          <a:ln/>
+        </p:spPr>
+        <p:txBody>
+          <a:bodyPr wrap="square" lIns="0" tIns="0" rIns="0" bIns="0" rtlCol="0" anchor="t"/>
+          <a:lstStyle/>
+          <a:p>
+            <a:pPr indent="0" marL="0">
+              <a:buNone/>
+            </a:pPr>
+            <a:r>
+              <a:rPr lang="en-US" sz="850" dirty="0">
+                <a:solidFill>
+                  <a:srgbClr val="6B6685"/>
+                </a:solidFill>
+                <a:latin typeface="Arial" pitchFamily="34" charset="0"/>
+                <a:ea typeface="Arial" pitchFamily="34" charset="-122"/>
+                <a:cs typeface="Arial" pitchFamily="34" charset="-120"/>
+              </a:rPr>
+              <a:t>transitive packages pulled in by the average npm install</a:t>
+            </a:r>
+            <a:endParaRPr lang="en-US" sz="850" dirty="0"/>
+          </a:p>
+        </p:txBody>
+      </p:sp>
+      <p:sp>
+        <p:nvSpPr>
+          <p:cNvPr id="22" name="Text 18"/>
+          <p:cNvSpPr txBox="1"/>
+          <p:nvPr/>
+        </p:nvSpPr>
+        <p:spPr>
+          <a:xfrm>
+            <a:off x="3419856" y="3840480"/>
+            <a:ext cx="1417320" cy="182880"/>
+          </a:xfrm>
+          <a:prstGeom prst="rect">
+            <a:avLst/>
+          </a:prstGeom>
+          <a:noFill/>
+          <a:ln/>
+        </p:spPr>
+        <p:txBody>
+          <a:bodyPr wrap="square" lIns="0" tIns="0" rIns="0" bIns="0" rtlCol="0" anchor="ctr"/>
+          <a:lstStyle/>
+          <a:p>
+            <a:pPr indent="0" marL="0">
+              <a:buNone/>
+            </a:pPr>
+            <a:r>
+              <a:rPr lang="en-US" sz="750" i="1" dirty="0">
+                <a:solidFill>
+                  <a:srgbClr val="6B6685"/>
+                </a:solidFill>
+                <a:latin typeface="Arial" pitchFamily="34" charset="0"/>
+                <a:ea typeface="Arial" pitchFamily="34" charset="-122"/>
+                <a:cs typeface="Arial" pitchFamily="34" charset="-120"/>
+              </a:rPr>
+              <a:t>Zimmermann et al.</a:t>
+            </a:r>
+            <a:endParaRPr lang="en-US" sz="750" dirty="0"/>
+          </a:p>
+        </p:txBody>
+      </p:sp>
+      <p:sp>
+        <p:nvSpPr>
+          <p:cNvPr id="23" name="Shape 19"/>
           <p:cNvSpPr/>
           <p:nvPr/>
         </p:nvSpPr>
         <p:spPr>
           <a:xfrm>
-            <a:off x="5212080" y="3447288"/>
-            <a:ext cx="3566160" cy="0"/>
+            <a:off x="310896" y="4114800"/>
+            <a:ext cx="4480560" cy="0"/>
           </a:xfrm>
           <a:prstGeom prst="line">
             <a:avLst/>
@@ -3356,14 +3308,67 @@
       </p:sp>
       <p:sp>
         <p:nvSpPr>
-          <p:cNvPr id="28" name="Text 25"/>
-          <p:cNvSpPr txBox="1"/>
-          <p:nvPr/>
-        </p:nvSpPr>
-        <p:spPr>
-          <a:xfrm>
-            <a:off x="5212080" y="3566160"/>
-            <a:ext cx="548640" cy="457200"/>
+          <p:cNvPr id="24" name="Text 20"/>
+          <p:cNvSpPr txBox="1"/>
+          <p:nvPr/>
+        </p:nvSpPr>
+        <p:spPr>
+          <a:xfrm>
+            <a:off x="310896" y="4187952"/>
+            <a:ext cx="4480560" cy="411480"/>
+          </a:xfrm>
+          <a:prstGeom prst="rect">
+            <a:avLst/>
+          </a:prstGeom>
+          <a:noFill/>
+          <a:ln/>
+        </p:spPr>
+        <p:txBody>
+          <a:bodyPr wrap="square" lIns="0" tIns="0" rIns="0" bIns="0" rtlCol="0" anchor="t"/>
+          <a:lstStyle/>
+          <a:p>
+            <a:pPr indent="0" marL="0">
+              <a:buNone/>
+            </a:pPr>
+            <a:r>
+              <a:rPr lang="en-US" sz="950" b="1" dirty="0">
+                <a:solidFill>
+                  <a:srgbClr val="E11D48"/>
+                </a:solidFill>
+                <a:latin typeface="Arial" pitchFamily="34" charset="0"/>
+                <a:ea typeface="Arial" pitchFamily="34" charset="-122"/>
+                <a:cs typeface="Arial" pitchFamily="34" charset="-120"/>
+              </a:rPr>
+              <a:t>Shai-Hulud, Sep 2025: </a:t>
+            </a:r>
+            <a:pPr indent="0" marL="0">
+              <a:buNone/>
+            </a:pPr>
+            <a:r>
+              <a:rPr lang="en-US" sz="950" dirty="0">
+                <a:solidFill>
+                  <a:srgbClr val="1F1B2E"/>
+                </a:solidFill>
+                <a:latin typeface="Arial" pitchFamily="34" charset="0"/>
+                <a:ea typeface="Arial" pitchFamily="34" charset="-122"/>
+                <a:cs typeface="Arial" pitchFamily="34" charset="-120"/>
+              </a:rPr>
+              <a:t>the first self-replicating npm worm spread package to package through the same dependency edges nobody was watching.</a:t>
+            </a:r>
+            <a:endParaRPr lang="en-US" sz="950" dirty="0"/>
+          </a:p>
+        </p:txBody>
+      </p:sp>
+      <p:sp>
+        <p:nvSpPr>
+          <p:cNvPr id="25" name="Text 21"/>
+          <p:cNvSpPr txBox="1"/>
+          <p:nvPr/>
+        </p:nvSpPr>
+        <p:spPr>
+          <a:xfrm>
+            <a:off x="5212080" y="1143000"/>
+            <a:ext cx="3566160" cy="201168"/>
           </a:xfrm>
           <a:prstGeom prst="rect">
             <a:avLst/>
@@ -3379,23 +3384,372 @@
               <a:buNone/>
             </a:pPr>
             <a:r>
-              <a:rPr lang="en-US" sz="3000" b="1" dirty="0">
-                <a:solidFill>
-                  <a:srgbClr val="A855F7"/>
-                </a:solidFill>
-                <a:latin typeface="Arial" pitchFamily="34" charset="0"/>
-                <a:ea typeface="Arial" pitchFamily="34" charset="-122"/>
-                <a:cs typeface="Arial" pitchFamily="34" charset="-120"/>
-              </a:rPr>
-              <a:t>03</a:t>
-            </a:r>
-            <a:endParaRPr lang="en-US" sz="3000" dirty="0"/>
-          </a:p>
-        </p:txBody>
-      </p:sp>
-      <p:sp>
-        <p:nvSpPr>
-          <p:cNvPr id="29" name="Text 26"/>
+              <a:rPr lang="en-US" sz="900" b="1" spc="200" kern="0" dirty="0">
+                <a:solidFill>
+                  <a:srgbClr val="7C3AED"/>
+                </a:solidFill>
+                <a:latin typeface="Arial" pitchFamily="34" charset="0"/>
+                <a:ea typeface="Arial" pitchFamily="34" charset="-122"/>
+                <a:cs typeface="Arial" pitchFamily="34" charset="-120"/>
+              </a:rPr>
+              <a:t>WHY TODAY'S SCANNERS MISS IT</a:t>
+            </a:r>
+            <a:endParaRPr lang="en-US" sz="900" dirty="0"/>
+          </a:p>
+        </p:txBody>
+      </p:sp>
+      <p:sp>
+        <p:nvSpPr>
+          <p:cNvPr id="26" name="Shape 22"/>
+          <p:cNvSpPr/>
+          <p:nvPr/>
+        </p:nvSpPr>
+        <p:spPr>
+          <a:xfrm>
+            <a:off x="5212080" y="1481328"/>
+            <a:ext cx="438912" cy="438912"/>
+          </a:xfrm>
+          <a:prstGeom prst="ellipse">
+            <a:avLst/>
+          </a:prstGeom>
+          <a:solidFill>
+            <a:srgbClr val="7C3AED"/>
+          </a:solidFill>
+          <a:ln w="12700">
+            <a:solidFill>
+              <a:srgbClr val="7C3AED"/>
+            </a:solidFill>
+            <a:prstDash val="solid"/>
+          </a:ln>
+        </p:spPr>
+      </p:sp>
+      <p:pic>
+        <p:nvPicPr>
+          <p:cNvPr id="27" name="Image 2" descr="preencoded.png">    </p:cNvPr>
+          <p:cNvPicPr>
+            <a:picLocks noChangeAspect="1"/>
+          </p:cNvPicPr>
+          <p:nvPr/>
+        </p:nvPicPr>
+        <p:blipFill>
+          <a:blip r:embed="rId3"/>
+          <a:stretch>
+            <a:fillRect/>
+          </a:stretch>
+        </p:blipFill>
+        <p:spPr>
+          <a:xfrm>
+            <a:off x="5321808" y="1591056"/>
+            <a:ext cx="219456" cy="219456"/>
+          </a:xfrm>
+          <a:prstGeom prst="rect">
+            <a:avLst/>
+          </a:prstGeom>
+        </p:spPr>
+      </p:pic>
+      <p:sp>
+        <p:nvSpPr>
+          <p:cNvPr id="28" name="Text 23"/>
+          <p:cNvSpPr txBox="1"/>
+          <p:nvPr/>
+        </p:nvSpPr>
+        <p:spPr>
+          <a:xfrm>
+            <a:off x="5806440" y="1481328"/>
+            <a:ext cx="2971800" cy="256032"/>
+          </a:xfrm>
+          <a:prstGeom prst="rect">
+            <a:avLst/>
+          </a:prstGeom>
+          <a:noFill/>
+          <a:ln/>
+        </p:spPr>
+        <p:txBody>
+          <a:bodyPr wrap="square" lIns="0" tIns="0" rIns="0" bIns="0" rtlCol="0" anchor="ctr"/>
+          <a:lstStyle/>
+          <a:p>
+            <a:pPr indent="0" marL="0">
+              <a:buNone/>
+            </a:pPr>
+            <a:r>
+              <a:rPr lang="en-US" sz="1200" b="1" dirty="0">
+                <a:solidFill>
+                  <a:srgbClr val="1F1B2E"/>
+                </a:solidFill>
+                <a:latin typeface="Arial" pitchFamily="34" charset="0"/>
+                <a:ea typeface="Arial" pitchFamily="34" charset="-122"/>
+                <a:cs typeface="Arial" pitchFamily="34" charset="-120"/>
+              </a:rPr>
+              <a:t>They score packages one at a time.</a:t>
+            </a:r>
+            <a:endParaRPr lang="en-US" sz="1200" dirty="0"/>
+          </a:p>
+        </p:txBody>
+      </p:sp>
+      <p:sp>
+        <p:nvSpPr>
+          <p:cNvPr id="29" name="Text 24"/>
+          <p:cNvSpPr txBox="1"/>
+          <p:nvPr/>
+        </p:nvSpPr>
+        <p:spPr>
+          <a:xfrm>
+            <a:off x="5806440" y="1755648"/>
+            <a:ext cx="2971800" cy="566928"/>
+          </a:xfrm>
+          <a:prstGeom prst="rect">
+            <a:avLst/>
+          </a:prstGeom>
+          <a:noFill/>
+          <a:ln/>
+        </p:spPr>
+        <p:txBody>
+          <a:bodyPr wrap="square" lIns="0" tIns="0" rIns="0" bIns="0" rtlCol="0" anchor="t"/>
+          <a:lstStyle/>
+          <a:p>
+            <a:pPr indent="0" marL="0">
+              <a:buNone/>
+            </a:pPr>
+            <a:r>
+              <a:rPr lang="en-US" sz="950" dirty="0">
+                <a:solidFill>
+                  <a:srgbClr val="6B6685"/>
+                </a:solidFill>
+                <a:latin typeface="Arial" pitchFamily="34" charset="0"/>
+                <a:ea typeface="Arial" pitchFamily="34" charset="-122"/>
+                <a:cs typeface="Arial" pitchFamily="34" charset="-120"/>
+              </a:rPr>
+              <a:t>A CVSS number says how bad a bug is — never how much of your app sits on top of that package.</a:t>
+            </a:r>
+            <a:endParaRPr lang="en-US" sz="950" dirty="0"/>
+          </a:p>
+        </p:txBody>
+      </p:sp>
+      <p:sp>
+        <p:nvSpPr>
+          <p:cNvPr id="30" name="Shape 25"/>
+          <p:cNvSpPr/>
+          <p:nvPr/>
+        </p:nvSpPr>
+        <p:spPr>
+          <a:xfrm>
+            <a:off x="5212080" y="2395728"/>
+            <a:ext cx="3566160" cy="0"/>
+          </a:xfrm>
+          <a:prstGeom prst="line">
+            <a:avLst/>
+          </a:prstGeom>
+          <a:noFill/>
+          <a:ln w="9525">
+            <a:solidFill>
+              <a:srgbClr val="D9D3EA"/>
+            </a:solidFill>
+            <a:prstDash val="solid"/>
+          </a:ln>
+        </p:spPr>
+      </p:sp>
+      <p:sp>
+        <p:nvSpPr>
+          <p:cNvPr id="31" name="Shape 26"/>
+          <p:cNvSpPr/>
+          <p:nvPr/>
+        </p:nvSpPr>
+        <p:spPr>
+          <a:xfrm>
+            <a:off x="5212080" y="2532888"/>
+            <a:ext cx="438912" cy="438912"/>
+          </a:xfrm>
+          <a:prstGeom prst="ellipse">
+            <a:avLst/>
+          </a:prstGeom>
+          <a:solidFill>
+            <a:srgbClr val="7C3AED"/>
+          </a:solidFill>
+          <a:ln w="12700">
+            <a:solidFill>
+              <a:srgbClr val="7C3AED"/>
+            </a:solidFill>
+            <a:prstDash val="solid"/>
+          </a:ln>
+        </p:spPr>
+      </p:sp>
+      <p:pic>
+        <p:nvPicPr>
+          <p:cNvPr id="32" name="Image 3" descr="preencoded.png">    </p:cNvPr>
+          <p:cNvPicPr>
+            <a:picLocks noChangeAspect="1"/>
+          </p:cNvPicPr>
+          <p:nvPr/>
+        </p:nvPicPr>
+        <p:blipFill>
+          <a:blip r:embed="rId4"/>
+          <a:stretch>
+            <a:fillRect/>
+          </a:stretch>
+        </p:blipFill>
+        <p:spPr>
+          <a:xfrm>
+            <a:off x="5321808" y="2642616"/>
+            <a:ext cx="219456" cy="219456"/>
+          </a:xfrm>
+          <a:prstGeom prst="rect">
+            <a:avLst/>
+          </a:prstGeom>
+        </p:spPr>
+      </p:pic>
+      <p:sp>
+        <p:nvSpPr>
+          <p:cNvPr id="33" name="Text 27"/>
+          <p:cNvSpPr txBox="1"/>
+          <p:nvPr/>
+        </p:nvSpPr>
+        <p:spPr>
+          <a:xfrm>
+            <a:off x="5806440" y="2532888"/>
+            <a:ext cx="2971800" cy="256032"/>
+          </a:xfrm>
+          <a:prstGeom prst="rect">
+            <a:avLst/>
+          </a:prstGeom>
+          <a:noFill/>
+          <a:ln/>
+        </p:spPr>
+        <p:txBody>
+          <a:bodyPr wrap="square" lIns="0" tIns="0" rIns="0" bIns="0" rtlCol="0" anchor="ctr"/>
+          <a:lstStyle/>
+          <a:p>
+            <a:pPr indent="0" marL="0">
+              <a:buNone/>
+            </a:pPr>
+            <a:r>
+              <a:rPr lang="en-US" sz="1200" b="1" dirty="0">
+                <a:solidFill>
+                  <a:srgbClr val="1F1B2E"/>
+                </a:solidFill>
+                <a:latin typeface="Arial" pitchFamily="34" charset="0"/>
+                <a:ea typeface="Arial" pitchFamily="34" charset="-122"/>
+                <a:cs typeface="Arial" pitchFamily="34" charset="-120"/>
+              </a:rPr>
+              <a:t>They can't show the path.</a:t>
+            </a:r>
+            <a:endParaRPr lang="en-US" sz="1200" dirty="0"/>
+          </a:p>
+        </p:txBody>
+      </p:sp>
+      <p:sp>
+        <p:nvSpPr>
+          <p:cNvPr id="34" name="Text 28"/>
+          <p:cNvSpPr txBox="1"/>
+          <p:nvPr/>
+        </p:nvSpPr>
+        <p:spPr>
+          <a:xfrm>
+            <a:off x="5806440" y="2807208"/>
+            <a:ext cx="2971800" cy="566928"/>
+          </a:xfrm>
+          <a:prstGeom prst="rect">
+            <a:avLst/>
+          </a:prstGeom>
+          <a:noFill/>
+          <a:ln/>
+        </p:spPr>
+        <p:txBody>
+          <a:bodyPr wrap="square" lIns="0" tIns="0" rIns="0" bIns="0" rtlCol="0" anchor="t"/>
+          <a:lstStyle/>
+          <a:p>
+            <a:pPr indent="0" marL="0">
+              <a:buNone/>
+            </a:pPr>
+            <a:r>
+              <a:rPr lang="en-US" sz="950" dirty="0">
+                <a:solidFill>
+                  <a:srgbClr val="6B6685"/>
+                </a:solidFill>
+                <a:latin typeface="Arial" pitchFamily="34" charset="0"/>
+                <a:ea typeface="Arial" pitchFamily="34" charset="-122"/>
+                <a:cs typeface="Arial" pitchFamily="34" charset="-120"/>
+              </a:rPr>
+              <a:t>Which apps get hit, through which chain, in what order? The graph is never modelled.</a:t>
+            </a:r>
+            <a:endParaRPr lang="en-US" sz="950" dirty="0"/>
+          </a:p>
+        </p:txBody>
+      </p:sp>
+      <p:sp>
+        <p:nvSpPr>
+          <p:cNvPr id="35" name="Shape 29"/>
+          <p:cNvSpPr/>
+          <p:nvPr/>
+        </p:nvSpPr>
+        <p:spPr>
+          <a:xfrm>
+            <a:off x="5212080" y="3447288"/>
+            <a:ext cx="3566160" cy="0"/>
+          </a:xfrm>
+          <a:prstGeom prst="line">
+            <a:avLst/>
+          </a:prstGeom>
+          <a:noFill/>
+          <a:ln w="9525">
+            <a:solidFill>
+              <a:srgbClr val="D9D3EA"/>
+            </a:solidFill>
+            <a:prstDash val="solid"/>
+          </a:ln>
+        </p:spPr>
+      </p:sp>
+      <p:sp>
+        <p:nvSpPr>
+          <p:cNvPr id="36" name="Shape 30"/>
+          <p:cNvSpPr/>
+          <p:nvPr/>
+        </p:nvSpPr>
+        <p:spPr>
+          <a:xfrm>
+            <a:off x="5212080" y="3584448"/>
+            <a:ext cx="438912" cy="438912"/>
+          </a:xfrm>
+          <a:prstGeom prst="ellipse">
+            <a:avLst/>
+          </a:prstGeom>
+          <a:solidFill>
+            <a:srgbClr val="7C3AED"/>
+          </a:solidFill>
+          <a:ln w="12700">
+            <a:solidFill>
+              <a:srgbClr val="7C3AED"/>
+            </a:solidFill>
+            <a:prstDash val="solid"/>
+          </a:ln>
+        </p:spPr>
+      </p:sp>
+      <p:pic>
+        <p:nvPicPr>
+          <p:cNvPr id="37" name="Image 4" descr="preencoded.png">    </p:cNvPr>
+          <p:cNvPicPr>
+            <a:picLocks noChangeAspect="1"/>
+          </p:cNvPicPr>
+          <p:nvPr/>
+        </p:nvPicPr>
+        <p:blipFill>
+          <a:blip r:embed="rId5"/>
+          <a:stretch>
+            <a:fillRect/>
+          </a:stretch>
+        </p:blipFill>
+        <p:spPr>
+          <a:xfrm>
+            <a:off x="5321808" y="3694176"/>
+            <a:ext cx="219456" cy="219456"/>
+          </a:xfrm>
+          <a:prstGeom prst="rect">
+            <a:avLst/>
+          </a:prstGeom>
+        </p:spPr>
+      </p:pic>
+      <p:sp>
+        <p:nvSpPr>
+          <p:cNvPr id="38" name="Text 31"/>
           <p:cNvSpPr txBox="1"/>
           <p:nvPr/>
         </p:nvSpPr>
@@ -3434,7 +3788,7 @@
       </p:sp>
       <p:sp>
         <p:nvSpPr>
-          <p:cNvPr id="30" name="Text 27"/>
+          <p:cNvPr id="39" name="Text 32"/>
           <p:cNvSpPr txBox="1"/>
           <p:nvPr/>
         </p:nvSpPr>
@@ -3505,109 +3859,33 @@
       </p:grpSpPr>
       <p:pic>
         <p:nvPicPr>
-          <p:cNvPr id="2" name="Image 0" descr="logo.jpg">    </p:cNvPr>
+          <p:cNvPr id="2" name="Image 0" descr="ripple-light.png">    </p:cNvPr>
           <p:cNvPicPr>
             <a:picLocks noChangeAspect="1"/>
           </p:cNvPicPr>
           <p:nvPr/>
         </p:nvPicPr>
         <p:blipFill>
-          <a:blip r:embed="rId1"/>
+          <a:blip r:embed="rId1">
+            <a:alphaModFix amt="22000"/>
+          </a:blip>
           <a:stretch>
             <a:fillRect/>
           </a:stretch>
         </p:blipFill>
         <p:spPr>
           <a:xfrm>
-            <a:off x="8193024" y="91440"/>
-            <a:ext cx="832104" cy="612648"/>
+            <a:off x="6766560" y="-1371600"/>
+            <a:ext cx="3474720" cy="3474720"/>
           </a:xfrm>
           <a:prstGeom prst="rect">
             <a:avLst/>
           </a:prstGeom>
         </p:spPr>
       </p:pic>
-      <p:sp>
-        <p:nvSpPr>
-          <p:cNvPr id="3" name="Text 0"/>
-          <p:cNvSpPr txBox="1"/>
-          <p:nvPr/>
-        </p:nvSpPr>
-        <p:spPr>
-          <a:xfrm>
-            <a:off x="310896" y="448056"/>
-            <a:ext cx="7680960" cy="576072"/>
-          </a:xfrm>
-          <a:prstGeom prst="rect">
-            <a:avLst/>
-          </a:prstGeom>
-          <a:noFill/>
-          <a:ln/>
-        </p:spPr>
-        <p:txBody>
-          <a:bodyPr wrap="square" lIns="0" tIns="0" rIns="0" bIns="0" rtlCol="0" anchor="ctr"/>
-          <a:lstStyle/>
-          <a:p>
-            <a:pPr indent="0" marL="0">
-              <a:buNone/>
-            </a:pPr>
-            <a:r>
-              <a:rPr lang="en-US" sz="2800" dirty="0">
-                <a:solidFill>
-                  <a:srgbClr val="351C75"/>
-                </a:solidFill>
-                <a:latin typeface="Impact" pitchFamily="34" charset="0"/>
-                <a:ea typeface="Impact" pitchFamily="34" charset="-122"/>
-                <a:cs typeface="Impact" pitchFamily="34" charset="-120"/>
-              </a:rPr>
-              <a:t>Solution</a:t>
-            </a:r>
-            <a:endParaRPr lang="en-US" sz="2800" dirty="0"/>
-          </a:p>
-        </p:txBody>
-      </p:sp>
-      <p:sp>
-        <p:nvSpPr>
-          <p:cNvPr id="4" name="Text 1"/>
-          <p:cNvSpPr txBox="1"/>
-          <p:nvPr/>
-        </p:nvSpPr>
-        <p:spPr>
-          <a:xfrm>
-            <a:off x="310896" y="1024128"/>
-            <a:ext cx="8503920" cy="365760"/>
-          </a:xfrm>
-          <a:prstGeom prst="rect">
-            <a:avLst/>
-          </a:prstGeom>
-          <a:noFill/>
-          <a:ln/>
-        </p:spPr>
-        <p:txBody>
-          <a:bodyPr wrap="square" lIns="0" tIns="0" rIns="0" bIns="0" rtlCol="0" anchor="ctr"/>
-          <a:lstStyle/>
-          <a:p>
-            <a:pPr indent="0" marL="0">
-              <a:buNone/>
-            </a:pPr>
-            <a:r>
-              <a:rPr lang="en-US" sz="1150" dirty="0">
-                <a:solidFill>
-                  <a:srgbClr val="6B6685"/>
-                </a:solidFill>
-                <a:latin typeface="Arial" pitchFamily="34" charset="0"/>
-                <a:ea typeface="Arial" pitchFamily="34" charset="-122"/>
-                <a:cs typeface="Arial" pitchFamily="34" charset="-120"/>
-              </a:rPr>
-              <a:t>RippleGuard models the ecosystem as a graph, scores every package with reasons, and simulates how a compromise ripples to production.</a:t>
-            </a:r>
-            <a:endParaRPr lang="en-US" sz="1150" dirty="0"/>
-          </a:p>
-        </p:txBody>
-      </p:sp>
       <p:pic>
         <p:nvPicPr>
-          <p:cNvPr id="5" name="Image 1" descr="graph-light.png">    </p:cNvPr>
+          <p:cNvPr id="3" name="Image 1" descr="logo.jpg">    </p:cNvPr>
           <p:cNvPicPr>
             <a:picLocks noChangeAspect="1"/>
           </p:cNvPicPr>
@@ -3621,8 +3899,8 @@
         </p:blipFill>
         <p:spPr>
           <a:xfrm>
-            <a:off x="274320" y="1417320"/>
-            <a:ext cx="4663440" cy="3328416"/>
+            <a:off x="8193024" y="91440"/>
+            <a:ext cx="832104" cy="612648"/>
           </a:xfrm>
           <a:prstGeom prst="rect">
             <a:avLst/>
@@ -3631,14 +3909,14 @@
       </p:pic>
       <p:sp>
         <p:nvSpPr>
-          <p:cNvPr id="6" name="Text 2"/>
-          <p:cNvSpPr txBox="1"/>
-          <p:nvPr/>
-        </p:nvSpPr>
-        <p:spPr>
-          <a:xfrm>
-            <a:off x="310896" y="4754880"/>
-            <a:ext cx="4754880" cy="182880"/>
+          <p:cNvPr id="4" name="Text 0"/>
+          <p:cNvSpPr txBox="1"/>
+          <p:nvPr/>
+        </p:nvSpPr>
+        <p:spPr>
+          <a:xfrm>
+            <a:off x="310896" y="256032"/>
+            <a:ext cx="5486400" cy="182880"/>
           </a:xfrm>
           <a:prstGeom prst="rect">
             <a:avLst/>
@@ -3654,30 +3932,30 @@
               <a:buNone/>
             </a:pPr>
             <a:r>
-              <a:rPr lang="en-US" sz="750" i="1" dirty="0">
-                <a:solidFill>
-                  <a:srgbClr val="6B6685"/>
-                </a:solidFill>
-                <a:latin typeface="Arial" pitchFamily="34" charset="0"/>
-                <a:ea typeface="Arial" pitchFamily="34" charset="-122"/>
-                <a:cs typeface="Arial" pitchFamily="34" charset="-120"/>
-              </a:rPr>
-              <a:t>fixtures/demo-project · 49 packages · real RippleGuard scores · red = critical path</a:t>
-            </a:r>
-            <a:endParaRPr lang="en-US" sz="750" dirty="0"/>
-          </a:p>
-        </p:txBody>
-      </p:sp>
-      <p:sp>
-        <p:nvSpPr>
-          <p:cNvPr id="7" name="Text 3"/>
-          <p:cNvSpPr txBox="1"/>
-          <p:nvPr/>
-        </p:nvSpPr>
-        <p:spPr>
-          <a:xfrm>
-            <a:off x="5212080" y="1490472"/>
-            <a:ext cx="411480" cy="274320"/>
+              <a:rPr lang="en-US" sz="850" b="1" spc="300" kern="0" dirty="0">
+                <a:solidFill>
+                  <a:srgbClr val="A855F7"/>
+                </a:solidFill>
+                <a:latin typeface="Arial" pitchFamily="34" charset="0"/>
+                <a:ea typeface="Arial" pitchFamily="34" charset="-122"/>
+                <a:cs typeface="Arial" pitchFamily="34" charset="-120"/>
+              </a:rPr>
+              <a:t>RIPPLEGUARD · MAP, SCORE, SIMULATE, EXPLAIN</a:t>
+            </a:r>
+            <a:endParaRPr lang="en-US" sz="850" dirty="0"/>
+          </a:p>
+        </p:txBody>
+      </p:sp>
+      <p:sp>
+        <p:nvSpPr>
+          <p:cNvPr id="5" name="Text 1"/>
+          <p:cNvSpPr txBox="1"/>
+          <p:nvPr/>
+        </p:nvSpPr>
+        <p:spPr>
+          <a:xfrm>
+            <a:off x="310896" y="448056"/>
+            <a:ext cx="7680960" cy="576072"/>
           </a:xfrm>
           <a:prstGeom prst="rect">
             <a:avLst/>
@@ -3693,108 +3971,30 @@
               <a:buNone/>
             </a:pPr>
             <a:r>
-              <a:rPr lang="en-US" sz="1100" b="1" dirty="0">
-                <a:solidFill>
-                  <a:srgbClr val="7C3AED"/>
-                </a:solidFill>
-                <a:latin typeface="Courier New" pitchFamily="34" charset="0"/>
-                <a:ea typeface="Courier New" pitchFamily="34" charset="-122"/>
-                <a:cs typeface="Courier New" pitchFamily="34" charset="-120"/>
-              </a:rPr>
-              <a:t>01</a:t>
-            </a:r>
-            <a:endParaRPr lang="en-US" sz="1100" dirty="0"/>
-          </a:p>
-        </p:txBody>
-      </p:sp>
-      <p:sp>
-        <p:nvSpPr>
-          <p:cNvPr id="8" name="Text 4"/>
-          <p:cNvSpPr txBox="1"/>
-          <p:nvPr/>
-        </p:nvSpPr>
-        <p:spPr>
-          <a:xfrm>
-            <a:off x="5623560" y="1463040"/>
-            <a:ext cx="3108960" cy="292608"/>
-          </a:xfrm>
-          <a:prstGeom prst="rect">
-            <a:avLst/>
-          </a:prstGeom>
-          <a:noFill/>
-          <a:ln/>
-        </p:spPr>
-        <p:txBody>
-          <a:bodyPr wrap="square" lIns="0" tIns="0" rIns="0" bIns="0" rtlCol="0" anchor="ctr"/>
-          <a:lstStyle/>
-          <a:p>
-            <a:pPr indent="0" marL="0">
-              <a:buNone/>
-            </a:pPr>
-            <a:r>
-              <a:rPr lang="en-US" sz="1500" b="1" dirty="0">
+              <a:rPr lang="en-US" sz="2800" dirty="0">
                 <a:solidFill>
                   <a:srgbClr val="351C75"/>
                 </a:solidFill>
-                <a:latin typeface="Arial" pitchFamily="34" charset="0"/>
-                <a:ea typeface="Arial" pitchFamily="34" charset="-122"/>
-                <a:cs typeface="Arial" pitchFamily="34" charset="-120"/>
-              </a:rPr>
-              <a:t>Map</a:t>
-            </a:r>
-            <a:endParaRPr lang="en-US" sz="1500" dirty="0"/>
-          </a:p>
-        </p:txBody>
-      </p:sp>
-      <p:sp>
-        <p:nvSpPr>
-          <p:cNvPr id="9" name="Text 5"/>
-          <p:cNvSpPr txBox="1"/>
-          <p:nvPr/>
-        </p:nvSpPr>
-        <p:spPr>
-          <a:xfrm>
-            <a:off x="5623560" y="1755648"/>
-            <a:ext cx="3154680" cy="457200"/>
-          </a:xfrm>
-          <a:prstGeom prst="rect">
-            <a:avLst/>
-          </a:prstGeom>
-          <a:noFill/>
-          <a:ln/>
-        </p:spPr>
-        <p:txBody>
-          <a:bodyPr wrap="square" lIns="0" tIns="0" rIns="0" bIns="0" rtlCol="0" anchor="t"/>
-          <a:lstStyle/>
-          <a:p>
-            <a:pPr indent="0" marL="0">
-              <a:buNone/>
-            </a:pPr>
-            <a:r>
-              <a:rPr lang="en-US" sz="900" dirty="0">
-                <a:solidFill>
-                  <a:srgbClr val="6B6685"/>
-                </a:solidFill>
-                <a:latin typeface="Arial" pitchFamily="34" charset="0"/>
-                <a:ea typeface="Arial" pitchFamily="34" charset="-122"/>
-                <a:cs typeface="Arial" pitchFamily="34" charset="-120"/>
-              </a:rPr>
-              <a:t>package-lock.json → full graph with reverse “dependents” edges. Blast radius of any node is one traversal away.</a:t>
-            </a:r>
-            <a:endParaRPr lang="en-US" sz="900" dirty="0"/>
-          </a:p>
-        </p:txBody>
-      </p:sp>
-      <p:sp>
-        <p:nvSpPr>
-          <p:cNvPr id="10" name="Shape 6"/>
+                <a:latin typeface="Impact" pitchFamily="34" charset="0"/>
+                <a:ea typeface="Impact" pitchFamily="34" charset="-122"/>
+                <a:cs typeface="Impact" pitchFamily="34" charset="-120"/>
+              </a:rPr>
+              <a:t>Solution</a:t>
+            </a:r>
+            <a:endParaRPr lang="en-US" sz="2800" dirty="0"/>
+          </a:p>
+        </p:txBody>
+      </p:sp>
+      <p:sp>
+        <p:nvSpPr>
+          <p:cNvPr id="6" name="Shape 2"/>
           <p:cNvSpPr/>
           <p:nvPr/>
         </p:nvSpPr>
         <p:spPr>
           <a:xfrm>
-            <a:off x="5212080" y="2240280"/>
-            <a:ext cx="3566160" cy="0"/>
+            <a:off x="310896" y="4956048"/>
+            <a:ext cx="8522208" cy="0"/>
           </a:xfrm>
           <a:prstGeom prst="line">
             <a:avLst/>
@@ -3810,14 +4010,14 @@
       </p:sp>
       <p:sp>
         <p:nvSpPr>
-          <p:cNvPr id="11" name="Text 7"/>
-          <p:cNvSpPr txBox="1"/>
-          <p:nvPr/>
-        </p:nvSpPr>
-        <p:spPr>
-          <a:xfrm>
-            <a:off x="5212080" y="2313432"/>
-            <a:ext cx="411480" cy="274320"/>
+          <p:cNvPr id="7" name="Text 3"/>
+          <p:cNvSpPr txBox="1"/>
+          <p:nvPr/>
+        </p:nvSpPr>
+        <p:spPr>
+          <a:xfrm>
+            <a:off x="310896" y="4983480"/>
+            <a:ext cx="5486400" cy="146304"/>
           </a:xfrm>
           <a:prstGeom prst="rect">
             <a:avLst/>
@@ -3833,30 +4033,30 @@
               <a:buNone/>
             </a:pPr>
             <a:r>
-              <a:rPr lang="en-US" sz="1100" b="1" dirty="0">
-                <a:solidFill>
-                  <a:srgbClr val="7C3AED"/>
-                </a:solidFill>
-                <a:latin typeface="Courier New" pitchFamily="34" charset="0"/>
-                <a:ea typeface="Courier New" pitchFamily="34" charset="-122"/>
-                <a:cs typeface="Courier New" pitchFamily="34" charset="-120"/>
-              </a:rPr>
-              <a:t>02</a:t>
-            </a:r>
-            <a:endParaRPr lang="en-US" sz="1100" dirty="0"/>
-          </a:p>
-        </p:txBody>
-      </p:sp>
-      <p:sp>
-        <p:nvSpPr>
-          <p:cNvPr id="12" name="Text 8"/>
-          <p:cNvSpPr txBox="1"/>
-          <p:nvPr/>
-        </p:nvSpPr>
-        <p:spPr>
-          <a:xfrm>
-            <a:off x="5623560" y="2286000"/>
-            <a:ext cx="3108960" cy="292608"/>
+              <a:rPr lang="en-US" sz="700" spc="200" kern="0" dirty="0">
+                <a:solidFill>
+                  <a:srgbClr val="6B6685"/>
+                </a:solidFill>
+                <a:latin typeface="Arial" pitchFamily="34" charset="0"/>
+                <a:ea typeface="Arial" pitchFamily="34" charset="-122"/>
+                <a:cs typeface="Arial" pitchFamily="34" charset="-120"/>
+              </a:rPr>
+              <a:t>TEAM SPECTRA  ·  RIPPLEGUARD  ·  MANIPAL HACKATHON 2026</a:t>
+            </a:r>
+            <a:endParaRPr lang="en-US" sz="700" dirty="0"/>
+          </a:p>
+        </p:txBody>
+      </p:sp>
+      <p:sp>
+        <p:nvSpPr>
+          <p:cNvPr id="8" name="Text 4"/>
+          <p:cNvSpPr txBox="1"/>
+          <p:nvPr/>
+        </p:nvSpPr>
+        <p:spPr>
+          <a:xfrm>
+            <a:off x="7863840" y="4983480"/>
+            <a:ext cx="969264" cy="146304"/>
           </a:xfrm>
           <a:prstGeom prst="rect">
             <a:avLst/>
@@ -3868,50 +4068,11 @@
           <a:bodyPr wrap="square" lIns="0" tIns="0" rIns="0" bIns="0" rtlCol="0" anchor="ctr"/>
           <a:lstStyle/>
           <a:p>
-            <a:pPr indent="0" marL="0">
-              <a:buNone/>
-            </a:pPr>
-            <a:r>
-              <a:rPr lang="en-US" sz="1500" b="1" dirty="0">
-                <a:solidFill>
-                  <a:srgbClr val="351C75"/>
-                </a:solidFill>
-                <a:latin typeface="Arial" pitchFamily="34" charset="0"/>
-                <a:ea typeface="Arial" pitchFamily="34" charset="-122"/>
-                <a:cs typeface="Arial" pitchFamily="34" charset="-120"/>
-              </a:rPr>
-              <a:t>Score</a:t>
-            </a:r>
-            <a:endParaRPr lang="en-US" sz="1500" dirty="0"/>
-          </a:p>
-        </p:txBody>
-      </p:sp>
-      <p:sp>
-        <p:nvSpPr>
-          <p:cNvPr id="13" name="Text 9"/>
-          <p:cNvSpPr txBox="1"/>
-          <p:nvPr/>
-        </p:nvSpPr>
-        <p:spPr>
-          <a:xfrm>
-            <a:off x="5623560" y="2578608"/>
-            <a:ext cx="3154680" cy="457200"/>
-          </a:xfrm>
-          <a:prstGeom prst="rect">
-            <a:avLst/>
-          </a:prstGeom>
-          <a:noFill/>
-          <a:ln/>
-        </p:spPr>
-        <p:txBody>
-          <a:bodyPr wrap="square" lIns="0" tIns="0" rIns="0" bIns="0" rtlCol="0" anchor="t"/>
-          <a:lstStyle/>
-          <a:p>
-            <a:pPr indent="0" marL="0">
-              <a:buNone/>
-            </a:pPr>
-            <a:r>
-              <a:rPr lang="en-US" sz="900" dirty="0">
+            <a:pPr algn="r" indent="0" marL="0">
+              <a:buNone/>
+            </a:pPr>
+            <a:r>
+              <a:rPr lang="en-US" sz="700" spc="200" kern="0" dirty="0">
                 <a:solidFill>
                   <a:srgbClr val="6B6685"/>
                 </a:solidFill>
@@ -3919,27 +4080,31 @@
                 <a:ea typeface="Arial" pitchFamily="34" charset="-122"/>
                 <a:cs typeface="Arial" pitchFamily="34" charset="-120"/>
               </a:rPr>
-              <a:t>Four explainable factors — exposure, compromise signal, blast radius, evidence confidence — fed by live OSV.dev, EPSS and CVSS 3.1 data.</a:t>
-            </a:r>
-            <a:endParaRPr lang="en-US" sz="900" dirty="0"/>
-          </a:p>
-        </p:txBody>
-      </p:sp>
-      <p:sp>
-        <p:nvSpPr>
-          <p:cNvPr id="14" name="Shape 10"/>
+              <a:t>3 / 6</a:t>
+            </a:r>
+            <a:endParaRPr lang="en-US" sz="700" dirty="0"/>
+          </a:p>
+        </p:txBody>
+      </p:sp>
+      <p:sp>
+        <p:nvSpPr>
+          <p:cNvPr id="9" name="Shape 5"/>
           <p:cNvSpPr/>
           <p:nvPr/>
         </p:nvSpPr>
         <p:spPr>
           <a:xfrm>
-            <a:off x="5212080" y="3063240"/>
-            <a:ext cx="3566160" cy="0"/>
-          </a:xfrm>
-          <a:prstGeom prst="line">
-            <a:avLst/>
-          </a:prstGeom>
-          <a:noFill/>
+            <a:off x="5074920" y="1371600"/>
+            <a:ext cx="3749040" cy="3429000"/>
+          </a:xfrm>
+          <a:prstGeom prst="roundRect">
+            <a:avLst>
+              <a:gd name="adj" fmla="val 2667"/>
+            </a:avLst>
+          </a:prstGeom>
+          <a:solidFill>
+            <a:srgbClr val="F4F1FB"/>
+          </a:solidFill>
           <a:ln w="9525">
             <a:solidFill>
               <a:srgbClr val="D9D3EA"/>
@@ -3950,14 +4115,14 @@
       </p:sp>
       <p:sp>
         <p:nvSpPr>
-          <p:cNvPr id="15" name="Text 11"/>
-          <p:cNvSpPr txBox="1"/>
-          <p:nvPr/>
-        </p:nvSpPr>
-        <p:spPr>
-          <a:xfrm>
-            <a:off x="5212080" y="3136392"/>
-            <a:ext cx="411480" cy="274320"/>
+          <p:cNvPr id="10" name="Text 6"/>
+          <p:cNvSpPr txBox="1"/>
+          <p:nvPr/>
+        </p:nvSpPr>
+        <p:spPr>
+          <a:xfrm>
+            <a:off x="310896" y="1024128"/>
+            <a:ext cx="8503920" cy="365760"/>
           </a:xfrm>
           <a:prstGeom prst="rect">
             <a:avLst/>
@@ -3973,30 +4138,54 @@
               <a:buNone/>
             </a:pPr>
             <a:r>
-              <a:rPr lang="en-US" sz="1100" b="1" dirty="0">
-                <a:solidFill>
-                  <a:srgbClr val="7C3AED"/>
-                </a:solidFill>
-                <a:latin typeface="Courier New" pitchFamily="34" charset="0"/>
-                <a:ea typeface="Courier New" pitchFamily="34" charset="-122"/>
-                <a:cs typeface="Courier New" pitchFamily="34" charset="-120"/>
-              </a:rPr>
-              <a:t>03</a:t>
-            </a:r>
-            <a:endParaRPr lang="en-US" sz="1100" dirty="0"/>
-          </a:p>
-        </p:txBody>
-      </p:sp>
-      <p:sp>
-        <p:nvSpPr>
-          <p:cNvPr id="16" name="Text 12"/>
-          <p:cNvSpPr txBox="1"/>
-          <p:nvPr/>
-        </p:nvSpPr>
-        <p:spPr>
-          <a:xfrm>
-            <a:off x="5623560" y="3108960"/>
-            <a:ext cx="3108960" cy="292608"/>
+              <a:rPr lang="en-US" sz="1150" dirty="0">
+                <a:solidFill>
+                  <a:srgbClr val="6B6685"/>
+                </a:solidFill>
+                <a:latin typeface="Arial" pitchFamily="34" charset="0"/>
+                <a:ea typeface="Arial" pitchFamily="34" charset="-122"/>
+                <a:cs typeface="Arial" pitchFamily="34" charset="-120"/>
+              </a:rPr>
+              <a:t>RippleGuard models the ecosystem as a graph, scores every package with reasons, and simulates how a compromise ripples to production.</a:t>
+            </a:r>
+            <a:endParaRPr lang="en-US" sz="1150" dirty="0"/>
+          </a:p>
+        </p:txBody>
+      </p:sp>
+      <p:pic>
+        <p:nvPicPr>
+          <p:cNvPr id="11" name="Image 2" descr="graph-light.png">    </p:cNvPr>
+          <p:cNvPicPr>
+            <a:picLocks noChangeAspect="1"/>
+          </p:cNvPicPr>
+          <p:nvPr/>
+        </p:nvPicPr>
+        <p:blipFill>
+          <a:blip r:embed="rId3"/>
+          <a:stretch>
+            <a:fillRect/>
+          </a:stretch>
+        </p:blipFill>
+        <p:spPr>
+          <a:xfrm>
+            <a:off x="274320" y="1417320"/>
+            <a:ext cx="4663440" cy="3328416"/>
+          </a:xfrm>
+          <a:prstGeom prst="rect">
+            <a:avLst/>
+          </a:prstGeom>
+        </p:spPr>
+      </p:pic>
+      <p:sp>
+        <p:nvSpPr>
+          <p:cNvPr id="12" name="Text 7"/>
+          <p:cNvSpPr txBox="1"/>
+          <p:nvPr/>
+        </p:nvSpPr>
+        <p:spPr>
+          <a:xfrm>
+            <a:off x="310896" y="4754880"/>
+            <a:ext cx="4754880" cy="182880"/>
           </a:xfrm>
           <a:prstGeom prst="rect">
             <a:avLst/>
@@ -4012,6 +4201,94 @@
               <a:buNone/>
             </a:pPr>
             <a:r>
+              <a:rPr lang="en-US" sz="750" i="1" dirty="0">
+                <a:solidFill>
+                  <a:srgbClr val="6B6685"/>
+                </a:solidFill>
+                <a:latin typeface="Arial" pitchFamily="34" charset="0"/>
+                <a:ea typeface="Arial" pitchFamily="34" charset="-122"/>
+                <a:cs typeface="Arial" pitchFamily="34" charset="-120"/>
+              </a:rPr>
+              <a:t>fixtures/demo-project · 49 packages · real RippleGuard scores · red = critical path</a:t>
+            </a:r>
+            <a:endParaRPr lang="en-US" sz="750" dirty="0"/>
+          </a:p>
+        </p:txBody>
+      </p:sp>
+      <p:sp>
+        <p:nvSpPr>
+          <p:cNvPr id="13" name="Shape 8"/>
+          <p:cNvSpPr/>
+          <p:nvPr/>
+        </p:nvSpPr>
+        <p:spPr>
+          <a:xfrm>
+            <a:off x="5230368" y="1490472"/>
+            <a:ext cx="420624" cy="420624"/>
+          </a:xfrm>
+          <a:prstGeom prst="ellipse">
+            <a:avLst/>
+          </a:prstGeom>
+          <a:solidFill>
+            <a:srgbClr val="7C3AED"/>
+          </a:solidFill>
+          <a:ln w="12700">
+            <a:solidFill>
+              <a:srgbClr val="7C3AED"/>
+            </a:solidFill>
+            <a:prstDash val="solid"/>
+          </a:ln>
+        </p:spPr>
+      </p:sp>
+      <p:pic>
+        <p:nvPicPr>
+          <p:cNvPr id="14" name="Image 3" descr="preencoded.png">    </p:cNvPr>
+          <p:cNvPicPr>
+            <a:picLocks noChangeAspect="1"/>
+          </p:cNvPicPr>
+          <p:nvPr/>
+        </p:nvPicPr>
+        <p:blipFill>
+          <a:blip r:embed="rId4"/>
+          <a:stretch>
+            <a:fillRect/>
+          </a:stretch>
+        </p:blipFill>
+        <p:spPr>
+          <a:xfrm>
+            <a:off x="5335524" y="1595628"/>
+            <a:ext cx="210312" cy="210312"/>
+          </a:xfrm>
+          <a:prstGeom prst="rect">
+            <a:avLst/>
+          </a:prstGeom>
+        </p:spPr>
+      </p:pic>
+      <p:sp>
+        <p:nvSpPr>
+          <p:cNvPr id="15" name="Text 9"/>
+          <p:cNvSpPr txBox="1"/>
+          <p:nvPr/>
+        </p:nvSpPr>
+        <p:spPr>
+          <a:xfrm>
+            <a:off x="5779008" y="1463040"/>
+            <a:ext cx="2926080" cy="292608"/>
+          </a:xfrm>
+          <a:prstGeom prst="rect">
+            <a:avLst/>
+          </a:prstGeom>
+          <a:noFill/>
+          <a:ln/>
+        </p:spPr>
+        <p:txBody>
+          <a:bodyPr wrap="square" lIns="0" tIns="0" rIns="0" bIns="0" rtlCol="0" anchor="ctr"/>
+          <a:lstStyle/>
+          <a:p>
+            <a:pPr indent="0" marL="0">
+              <a:buNone/>
+            </a:pPr>
+            <a:r>
               <a:rPr lang="en-US" sz="1500" b="1" dirty="0">
                 <a:solidFill>
                   <a:srgbClr val="351C75"/>
@@ -4020,7 +4297,7 @@
                 <a:ea typeface="Arial" pitchFamily="34" charset="-122"/>
                 <a:cs typeface="Arial" pitchFamily="34" charset="-120"/>
               </a:rPr>
-              <a:t>Simulate</a:t>
+              <a:t>Map</a:t>
             </a:r>
             <a:endParaRPr lang="en-US" sz="1500" dirty="0"/>
           </a:p>
@@ -4028,14 +4305,14 @@
       </p:sp>
       <p:sp>
         <p:nvSpPr>
-          <p:cNvPr id="17" name="Text 13"/>
-          <p:cNvSpPr txBox="1"/>
-          <p:nvPr/>
-        </p:nvSpPr>
-        <p:spPr>
-          <a:xfrm>
-            <a:off x="5623560" y="3401568"/>
-            <a:ext cx="3154680" cy="457200"/>
+          <p:cNvPr id="16" name="Text 10"/>
+          <p:cNvSpPr txBox="1"/>
+          <p:nvPr/>
+        </p:nvSpPr>
+        <p:spPr>
+          <a:xfrm>
+            <a:off x="5779008" y="1755648"/>
+            <a:ext cx="2926080" cy="457200"/>
           </a:xfrm>
           <a:prstGeom prst="rect">
             <a:avLst/>
@@ -4059,7 +4336,7 @@
                 <a:ea typeface="Arial" pitchFamily="34" charset="-122"/>
                 <a:cs typeface="Arial" pitchFamily="34" charset="-120"/>
               </a:rPr>
-              <a:t>Time-step ripple from any package to the production root. Quarantine a node and get the before/after blast radius instantly.</a:t>
+              <a:t>package-lock.json → full graph with reverse “dependents” edges. Blast radius of any node is one traversal away.</a:t>
             </a:r>
             <a:endParaRPr lang="en-US" sz="900" dirty="0"/>
           </a:p>
@@ -4067,14 +4344,14 @@
       </p:sp>
       <p:sp>
         <p:nvSpPr>
-          <p:cNvPr id="18" name="Shape 14"/>
+          <p:cNvPr id="17" name="Shape 11"/>
           <p:cNvSpPr/>
           <p:nvPr/>
         </p:nvSpPr>
         <p:spPr>
           <a:xfrm>
-            <a:off x="5212080" y="3886200"/>
-            <a:ext cx="3566160" cy="0"/>
+            <a:off x="5230368" y="2240280"/>
+            <a:ext cx="3429000" cy="0"/>
           </a:xfrm>
           <a:prstGeom prst="line">
             <a:avLst/>
@@ -4090,14 +4367,63 @@
       </p:sp>
       <p:sp>
         <p:nvSpPr>
-          <p:cNvPr id="19" name="Text 15"/>
-          <p:cNvSpPr txBox="1"/>
-          <p:nvPr/>
-        </p:nvSpPr>
-        <p:spPr>
-          <a:xfrm>
-            <a:off x="5212080" y="3959352"/>
-            <a:ext cx="411480" cy="274320"/>
+          <p:cNvPr id="18" name="Shape 12"/>
+          <p:cNvSpPr/>
+          <p:nvPr/>
+        </p:nvSpPr>
+        <p:spPr>
+          <a:xfrm>
+            <a:off x="5230368" y="2313432"/>
+            <a:ext cx="420624" cy="420624"/>
+          </a:xfrm>
+          <a:prstGeom prst="ellipse">
+            <a:avLst/>
+          </a:prstGeom>
+          <a:solidFill>
+            <a:srgbClr val="7C3AED"/>
+          </a:solidFill>
+          <a:ln w="12700">
+            <a:solidFill>
+              <a:srgbClr val="7C3AED"/>
+            </a:solidFill>
+            <a:prstDash val="solid"/>
+          </a:ln>
+        </p:spPr>
+      </p:sp>
+      <p:pic>
+        <p:nvPicPr>
+          <p:cNvPr id="19" name="Image 4" descr="preencoded.png">    </p:cNvPr>
+          <p:cNvPicPr>
+            <a:picLocks noChangeAspect="1"/>
+          </p:cNvPicPr>
+          <p:nvPr/>
+        </p:nvPicPr>
+        <p:blipFill>
+          <a:blip r:embed="rId5"/>
+          <a:stretch>
+            <a:fillRect/>
+          </a:stretch>
+        </p:blipFill>
+        <p:spPr>
+          <a:xfrm>
+            <a:off x="5335524" y="2418588"/>
+            <a:ext cx="210312" cy="210312"/>
+          </a:xfrm>
+          <a:prstGeom prst="rect">
+            <a:avLst/>
+          </a:prstGeom>
+        </p:spPr>
+      </p:pic>
+      <p:sp>
+        <p:nvSpPr>
+          <p:cNvPr id="20" name="Text 13"/>
+          <p:cNvSpPr txBox="1"/>
+          <p:nvPr/>
+        </p:nvSpPr>
+        <p:spPr>
+          <a:xfrm>
+            <a:off x="5779008" y="2286000"/>
+            <a:ext cx="2926080" cy="292608"/>
           </a:xfrm>
           <a:prstGeom prst="rect">
             <a:avLst/>
@@ -4113,30 +4439,141 @@
               <a:buNone/>
             </a:pPr>
             <a:r>
-              <a:rPr lang="en-US" sz="1100" b="1" dirty="0">
-                <a:solidFill>
-                  <a:srgbClr val="7C3AED"/>
-                </a:solidFill>
-                <a:latin typeface="Courier New" pitchFamily="34" charset="0"/>
-                <a:ea typeface="Courier New" pitchFamily="34" charset="-122"/>
-                <a:cs typeface="Courier New" pitchFamily="34" charset="-120"/>
-              </a:rPr>
-              <a:t>04</a:t>
-            </a:r>
-            <a:endParaRPr lang="en-US" sz="1100" dirty="0"/>
-          </a:p>
-        </p:txBody>
-      </p:sp>
-      <p:sp>
-        <p:nvSpPr>
-          <p:cNvPr id="20" name="Text 16"/>
-          <p:cNvSpPr txBox="1"/>
-          <p:nvPr/>
-        </p:nvSpPr>
-        <p:spPr>
-          <a:xfrm>
-            <a:off x="5623560" y="3931920"/>
-            <a:ext cx="3108960" cy="292608"/>
+              <a:rPr lang="en-US" sz="1500" b="1" dirty="0">
+                <a:solidFill>
+                  <a:srgbClr val="351C75"/>
+                </a:solidFill>
+                <a:latin typeface="Arial" pitchFamily="34" charset="0"/>
+                <a:ea typeface="Arial" pitchFamily="34" charset="-122"/>
+                <a:cs typeface="Arial" pitchFamily="34" charset="-120"/>
+              </a:rPr>
+              <a:t>Score</a:t>
+            </a:r>
+            <a:endParaRPr lang="en-US" sz="1500" dirty="0"/>
+          </a:p>
+        </p:txBody>
+      </p:sp>
+      <p:sp>
+        <p:nvSpPr>
+          <p:cNvPr id="21" name="Text 14"/>
+          <p:cNvSpPr txBox="1"/>
+          <p:nvPr/>
+        </p:nvSpPr>
+        <p:spPr>
+          <a:xfrm>
+            <a:off x="5779008" y="2578608"/>
+            <a:ext cx="2926080" cy="457200"/>
+          </a:xfrm>
+          <a:prstGeom prst="rect">
+            <a:avLst/>
+          </a:prstGeom>
+          <a:noFill/>
+          <a:ln/>
+        </p:spPr>
+        <p:txBody>
+          <a:bodyPr wrap="square" lIns="0" tIns="0" rIns="0" bIns="0" rtlCol="0" anchor="t"/>
+          <a:lstStyle/>
+          <a:p>
+            <a:pPr indent="0" marL="0">
+              <a:buNone/>
+            </a:pPr>
+            <a:r>
+              <a:rPr lang="en-US" sz="900" dirty="0">
+                <a:solidFill>
+                  <a:srgbClr val="6B6685"/>
+                </a:solidFill>
+                <a:latin typeface="Arial" pitchFamily="34" charset="0"/>
+                <a:ea typeface="Arial" pitchFamily="34" charset="-122"/>
+                <a:cs typeface="Arial" pitchFamily="34" charset="-120"/>
+              </a:rPr>
+              <a:t>Four explainable factors — exposure, compromise signal, blast radius, evidence confidence — fed by live OSV.dev, EPSS and CVSS 3.1 data.</a:t>
+            </a:r>
+            <a:endParaRPr lang="en-US" sz="900" dirty="0"/>
+          </a:p>
+        </p:txBody>
+      </p:sp>
+      <p:sp>
+        <p:nvSpPr>
+          <p:cNvPr id="22" name="Shape 15"/>
+          <p:cNvSpPr/>
+          <p:nvPr/>
+        </p:nvSpPr>
+        <p:spPr>
+          <a:xfrm>
+            <a:off x="5230368" y="3063240"/>
+            <a:ext cx="3429000" cy="0"/>
+          </a:xfrm>
+          <a:prstGeom prst="line">
+            <a:avLst/>
+          </a:prstGeom>
+          <a:noFill/>
+          <a:ln w="9525">
+            <a:solidFill>
+              <a:srgbClr val="D9D3EA"/>
+            </a:solidFill>
+            <a:prstDash val="solid"/>
+          </a:ln>
+        </p:spPr>
+      </p:sp>
+      <p:sp>
+        <p:nvSpPr>
+          <p:cNvPr id="23" name="Shape 16"/>
+          <p:cNvSpPr/>
+          <p:nvPr/>
+        </p:nvSpPr>
+        <p:spPr>
+          <a:xfrm>
+            <a:off x="5230368" y="3136392"/>
+            <a:ext cx="420624" cy="420624"/>
+          </a:xfrm>
+          <a:prstGeom prst="ellipse">
+            <a:avLst/>
+          </a:prstGeom>
+          <a:solidFill>
+            <a:srgbClr val="7C3AED"/>
+          </a:solidFill>
+          <a:ln w="12700">
+            <a:solidFill>
+              <a:srgbClr val="7C3AED"/>
+            </a:solidFill>
+            <a:prstDash val="solid"/>
+          </a:ln>
+        </p:spPr>
+      </p:sp>
+      <p:pic>
+        <p:nvPicPr>
+          <p:cNvPr id="24" name="Image 5" descr="preencoded.png">    </p:cNvPr>
+          <p:cNvPicPr>
+            <a:picLocks noChangeAspect="1"/>
+          </p:cNvPicPr>
+          <p:nvPr/>
+        </p:nvPicPr>
+        <p:blipFill>
+          <a:blip r:embed="rId6"/>
+          <a:stretch>
+            <a:fillRect/>
+          </a:stretch>
+        </p:blipFill>
+        <p:spPr>
+          <a:xfrm>
+            <a:off x="5335524" y="3241548"/>
+            <a:ext cx="210312" cy="210312"/>
+          </a:xfrm>
+          <a:prstGeom prst="rect">
+            <a:avLst/>
+          </a:prstGeom>
+        </p:spPr>
+      </p:pic>
+      <p:sp>
+        <p:nvSpPr>
+          <p:cNvPr id="25" name="Text 17"/>
+          <p:cNvSpPr txBox="1"/>
+          <p:nvPr/>
+        </p:nvSpPr>
+        <p:spPr>
+          <a:xfrm>
+            <a:off x="5779008" y="3108960"/>
+            <a:ext cx="2926080" cy="292608"/>
           </a:xfrm>
           <a:prstGeom prst="rect">
             <a:avLst/>
@@ -4160,6 +4597,156 @@
                 <a:ea typeface="Arial" pitchFamily="34" charset="-122"/>
                 <a:cs typeface="Arial" pitchFamily="34" charset="-120"/>
               </a:rPr>
+              <a:t>Simulate</a:t>
+            </a:r>
+            <a:endParaRPr lang="en-US" sz="1500" dirty="0"/>
+          </a:p>
+        </p:txBody>
+      </p:sp>
+      <p:sp>
+        <p:nvSpPr>
+          <p:cNvPr id="26" name="Text 18"/>
+          <p:cNvSpPr txBox="1"/>
+          <p:nvPr/>
+        </p:nvSpPr>
+        <p:spPr>
+          <a:xfrm>
+            <a:off x="5779008" y="3401568"/>
+            <a:ext cx="2926080" cy="457200"/>
+          </a:xfrm>
+          <a:prstGeom prst="rect">
+            <a:avLst/>
+          </a:prstGeom>
+          <a:noFill/>
+          <a:ln/>
+        </p:spPr>
+        <p:txBody>
+          <a:bodyPr wrap="square" lIns="0" tIns="0" rIns="0" bIns="0" rtlCol="0" anchor="t"/>
+          <a:lstStyle/>
+          <a:p>
+            <a:pPr indent="0" marL="0">
+              <a:buNone/>
+            </a:pPr>
+            <a:r>
+              <a:rPr lang="en-US" sz="900" dirty="0">
+                <a:solidFill>
+                  <a:srgbClr val="6B6685"/>
+                </a:solidFill>
+                <a:latin typeface="Arial" pitchFamily="34" charset="0"/>
+                <a:ea typeface="Arial" pitchFamily="34" charset="-122"/>
+                <a:cs typeface="Arial" pitchFamily="34" charset="-120"/>
+              </a:rPr>
+              <a:t>Time-step ripple from any package to the production root. Quarantine a node and get the before/after blast radius instantly.</a:t>
+            </a:r>
+            <a:endParaRPr lang="en-US" sz="900" dirty="0"/>
+          </a:p>
+        </p:txBody>
+      </p:sp>
+      <p:sp>
+        <p:nvSpPr>
+          <p:cNvPr id="27" name="Shape 19"/>
+          <p:cNvSpPr/>
+          <p:nvPr/>
+        </p:nvSpPr>
+        <p:spPr>
+          <a:xfrm>
+            <a:off x="5230368" y="3886200"/>
+            <a:ext cx="3429000" cy="0"/>
+          </a:xfrm>
+          <a:prstGeom prst="line">
+            <a:avLst/>
+          </a:prstGeom>
+          <a:noFill/>
+          <a:ln w="9525">
+            <a:solidFill>
+              <a:srgbClr val="D9D3EA"/>
+            </a:solidFill>
+            <a:prstDash val="solid"/>
+          </a:ln>
+        </p:spPr>
+      </p:sp>
+      <p:sp>
+        <p:nvSpPr>
+          <p:cNvPr id="28" name="Shape 20"/>
+          <p:cNvSpPr/>
+          <p:nvPr/>
+        </p:nvSpPr>
+        <p:spPr>
+          <a:xfrm>
+            <a:off x="5230368" y="3959352"/>
+            <a:ext cx="420624" cy="420624"/>
+          </a:xfrm>
+          <a:prstGeom prst="ellipse">
+            <a:avLst/>
+          </a:prstGeom>
+          <a:solidFill>
+            <a:srgbClr val="7C3AED"/>
+          </a:solidFill>
+          <a:ln w="12700">
+            <a:solidFill>
+              <a:srgbClr val="7C3AED"/>
+            </a:solidFill>
+            <a:prstDash val="solid"/>
+          </a:ln>
+        </p:spPr>
+      </p:sp>
+      <p:pic>
+        <p:nvPicPr>
+          <p:cNvPr id="29" name="Image 6" descr="preencoded.png">    </p:cNvPr>
+          <p:cNvPicPr>
+            <a:picLocks noChangeAspect="1"/>
+          </p:cNvPicPr>
+          <p:nvPr/>
+        </p:nvPicPr>
+        <p:blipFill>
+          <a:blip r:embed="rId7"/>
+          <a:stretch>
+            <a:fillRect/>
+          </a:stretch>
+        </p:blipFill>
+        <p:spPr>
+          <a:xfrm>
+            <a:off x="5335524" y="4064508"/>
+            <a:ext cx="210312" cy="210312"/>
+          </a:xfrm>
+          <a:prstGeom prst="rect">
+            <a:avLst/>
+          </a:prstGeom>
+        </p:spPr>
+      </p:pic>
+      <p:sp>
+        <p:nvSpPr>
+          <p:cNvPr id="30" name="Text 21"/>
+          <p:cNvSpPr txBox="1"/>
+          <p:nvPr/>
+        </p:nvSpPr>
+        <p:spPr>
+          <a:xfrm>
+            <a:off x="5779008" y="3931920"/>
+            <a:ext cx="2926080" cy="292608"/>
+          </a:xfrm>
+          <a:prstGeom prst="rect">
+            <a:avLst/>
+          </a:prstGeom>
+          <a:noFill/>
+          <a:ln/>
+        </p:spPr>
+        <p:txBody>
+          <a:bodyPr wrap="square" lIns="0" tIns="0" rIns="0" bIns="0" rtlCol="0" anchor="ctr"/>
+          <a:lstStyle/>
+          <a:p>
+            <a:pPr indent="0" marL="0">
+              <a:buNone/>
+            </a:pPr>
+            <a:r>
+              <a:rPr lang="en-US" sz="1500" b="1" dirty="0">
+                <a:solidFill>
+                  <a:srgbClr val="351C75"/>
+                </a:solidFill>
+                <a:latin typeface="Arial" pitchFamily="34" charset="0"/>
+                <a:ea typeface="Arial" pitchFamily="34" charset="-122"/>
+                <a:cs typeface="Arial" pitchFamily="34" charset="-120"/>
+              </a:rPr>
               <a:t>Explain</a:t>
             </a:r>
             <a:endParaRPr lang="en-US" sz="1500" dirty="0"/>
@@ -4168,14 +4755,14 @@
       </p:sp>
       <p:sp>
         <p:nvSpPr>
-          <p:cNvPr id="21" name="Text 17"/>
-          <p:cNvSpPr txBox="1"/>
-          <p:nvPr/>
-        </p:nvSpPr>
-        <p:spPr>
-          <a:xfrm>
-            <a:off x="5623560" y="4224528"/>
-            <a:ext cx="3154680" cy="457200"/>
+          <p:cNvPr id="31" name="Text 22"/>
+          <p:cNvSpPr txBox="1"/>
+          <p:nvPr/>
+        </p:nvSpPr>
+        <p:spPr>
+          <a:xfrm>
+            <a:off x="5779008" y="4224528"/>
+            <a:ext cx="2926080" cy="457200"/>
           </a:xfrm>
           <a:prstGeom prst="rect">
             <a:avLst/>
@@ -4239,70 +4826,33 @@
       </p:grpSpPr>
       <p:pic>
         <p:nvPicPr>
-          <p:cNvPr id="2" name="Image 0" descr="logo.jpg">    </p:cNvPr>
+          <p:cNvPr id="2" name="Image 0" descr="ripple-light.png">    </p:cNvPr>
           <p:cNvPicPr>
             <a:picLocks noChangeAspect="1"/>
           </p:cNvPicPr>
           <p:nvPr/>
         </p:nvPicPr>
         <p:blipFill>
-          <a:blip r:embed="rId1"/>
+          <a:blip r:embed="rId1">
+            <a:alphaModFix amt="22000"/>
+          </a:blip>
           <a:stretch>
             <a:fillRect/>
           </a:stretch>
         </p:blipFill>
         <p:spPr>
           <a:xfrm>
-            <a:off x="8193024" y="91440"/>
-            <a:ext cx="832104" cy="612648"/>
+            <a:off x="6766560" y="-1371600"/>
+            <a:ext cx="3474720" cy="3474720"/>
           </a:xfrm>
           <a:prstGeom prst="rect">
             <a:avLst/>
           </a:prstGeom>
         </p:spPr>
       </p:pic>
-      <p:sp>
-        <p:nvSpPr>
-          <p:cNvPr id="3" name="Text 0"/>
-          <p:cNvSpPr txBox="1"/>
-          <p:nvPr/>
-        </p:nvSpPr>
-        <p:spPr>
-          <a:xfrm>
-            <a:off x="310896" y="448056"/>
-            <a:ext cx="7680960" cy="576072"/>
-          </a:xfrm>
-          <a:prstGeom prst="rect">
-            <a:avLst/>
-          </a:prstGeom>
-          <a:noFill/>
-          <a:ln/>
-        </p:spPr>
-        <p:txBody>
-          <a:bodyPr wrap="square" lIns="0" tIns="0" rIns="0" bIns="0" rtlCol="0" anchor="ctr"/>
-          <a:lstStyle/>
-          <a:p>
-            <a:pPr indent="0" marL="0">
-              <a:buNone/>
-            </a:pPr>
-            <a:r>
-              <a:rPr lang="en-US" sz="2800" dirty="0">
-                <a:solidFill>
-                  <a:srgbClr val="351C75"/>
-                </a:solidFill>
-                <a:latin typeface="Impact" pitchFamily="34" charset="0"/>
-                <a:ea typeface="Impact" pitchFamily="34" charset="-122"/>
-                <a:cs typeface="Impact" pitchFamily="34" charset="-120"/>
-              </a:rPr>
-              <a:t>Technical Implementation</a:t>
-            </a:r>
-            <a:endParaRPr lang="en-US" sz="2800" dirty="0"/>
-          </a:p>
-        </p:txBody>
-      </p:sp>
       <p:pic>
         <p:nvPicPr>
-          <p:cNvPr id="4" name="Image 1" descr="arch-light.png">    </p:cNvPr>
+          <p:cNvPr id="3" name="Image 1" descr="logo.jpg">    </p:cNvPr>
           <p:cNvPicPr>
             <a:picLocks noChangeAspect="1"/>
           </p:cNvPicPr>
@@ -4316,8 +4866,8 @@
         </p:blipFill>
         <p:spPr>
           <a:xfrm>
-            <a:off x="274320" y="1051560"/>
-            <a:ext cx="8503920" cy="1984248"/>
+            <a:off x="8193024" y="91440"/>
+            <a:ext cx="832104" cy="612648"/>
           </a:xfrm>
           <a:prstGeom prst="rect">
             <a:avLst/>
@@ -4326,14 +4876,53 @@
       </p:pic>
       <p:sp>
         <p:nvSpPr>
+          <p:cNvPr id="4" name="Text 0"/>
+          <p:cNvSpPr txBox="1"/>
+          <p:nvPr/>
+        </p:nvSpPr>
+        <p:spPr>
+          <a:xfrm>
+            <a:off x="310896" y="256032"/>
+            <a:ext cx="5486400" cy="182880"/>
+          </a:xfrm>
+          <a:prstGeom prst="rect">
+            <a:avLst/>
+          </a:prstGeom>
+          <a:noFill/>
+          <a:ln/>
+        </p:spPr>
+        <p:txBody>
+          <a:bodyPr wrap="square" lIns="0" tIns="0" rIns="0" bIns="0" rtlCol="0" anchor="ctr"/>
+          <a:lstStyle/>
+          <a:p>
+            <a:pPr indent="0" marL="0">
+              <a:buNone/>
+            </a:pPr>
+            <a:r>
+              <a:rPr lang="en-US" sz="850" b="1" spc="300" kern="0" dirty="0">
+                <a:solidFill>
+                  <a:srgbClr val="A855F7"/>
+                </a:solidFill>
+                <a:latin typeface="Arial" pitchFamily="34" charset="0"/>
+                <a:ea typeface="Arial" pitchFamily="34" charset="-122"/>
+                <a:cs typeface="Arial" pitchFamily="34" charset="-120"/>
+              </a:rPr>
+              <a:t>ARCHITECTURE · RISK ENGINE · REAL OUTPUT</a:t>
+            </a:r>
+            <a:endParaRPr lang="en-US" sz="850" dirty="0"/>
+          </a:p>
+        </p:txBody>
+      </p:sp>
+      <p:sp>
+        <p:nvSpPr>
           <p:cNvPr id="5" name="Text 1"/>
           <p:cNvSpPr txBox="1"/>
           <p:nvPr/>
         </p:nvSpPr>
         <p:spPr>
           <a:xfrm>
-            <a:off x="310896" y="3154680"/>
-            <a:ext cx="1783080" cy="292608"/>
+            <a:off x="310896" y="448056"/>
+            <a:ext cx="7680960" cy="576072"/>
           </a:xfrm>
           <a:prstGeom prst="rect">
             <a:avLst/>
@@ -4349,459 +4938,30 @@
               <a:buNone/>
             </a:pPr>
             <a:r>
-              <a:rPr lang="en-US" sz="1500" b="1" dirty="0">
-                <a:solidFill>
-                  <a:srgbClr val="1F1B2E"/>
-                </a:solidFill>
-                <a:latin typeface="Arial" pitchFamily="34" charset="0"/>
-                <a:ea typeface="Arial" pitchFamily="34" charset="-122"/>
-                <a:cs typeface="Arial" pitchFamily="34" charset="-120"/>
-              </a:rPr>
-              <a:t>Exposure</a:t>
-            </a:r>
-            <a:endParaRPr lang="en-US" sz="1500" dirty="0"/>
-          </a:p>
-        </p:txBody>
-      </p:sp>
-      <p:sp>
-        <p:nvSpPr>
-          <p:cNvPr id="6" name="Text 2"/>
-          <p:cNvSpPr txBox="1"/>
-          <p:nvPr/>
-        </p:nvSpPr>
-        <p:spPr>
-          <a:xfrm>
-            <a:off x="310896" y="3447288"/>
-            <a:ext cx="1783080" cy="201168"/>
-          </a:xfrm>
-          <a:prstGeom prst="rect">
-            <a:avLst/>
-          </a:prstGeom>
-          <a:noFill/>
-          <a:ln/>
-        </p:spPr>
-        <p:txBody>
-          <a:bodyPr wrap="square" lIns="0" tIns="0" rIns="0" bIns="0" rtlCol="0" anchor="ctr"/>
-          <a:lstStyle/>
-          <a:p>
-            <a:pPr indent="0" marL="0">
-              <a:buNone/>
-            </a:pPr>
-            <a:r>
-              <a:rPr lang="en-US" sz="800" dirty="0">
-                <a:solidFill>
-                  <a:srgbClr val="6B6685"/>
-                </a:solidFill>
-                <a:latin typeface="Arial" pitchFamily="34" charset="0"/>
-                <a:ea typeface="Arial" pitchFamily="34" charset="-122"/>
-                <a:cs typeface="Arial" pitchFamily="34" charset="-120"/>
-              </a:rPr>
-              <a:t>CVSS × EPSS × reachability</a:t>
-            </a:r>
-            <a:endParaRPr lang="en-US" sz="800" dirty="0"/>
-          </a:p>
-        </p:txBody>
-      </p:sp>
-      <p:sp>
-        <p:nvSpPr>
-          <p:cNvPr id="7" name="Text 3"/>
-          <p:cNvSpPr txBox="1"/>
-          <p:nvPr/>
-        </p:nvSpPr>
-        <p:spPr>
-          <a:xfrm>
-            <a:off x="2093976" y="3154680"/>
-            <a:ext cx="320040" cy="365760"/>
-          </a:xfrm>
-          <a:prstGeom prst="rect">
-            <a:avLst/>
-          </a:prstGeom>
-          <a:noFill/>
-          <a:ln/>
-        </p:spPr>
-        <p:txBody>
-          <a:bodyPr wrap="square" lIns="0" tIns="0" rIns="0" bIns="0" rtlCol="0" anchor="ctr"/>
-          <a:lstStyle/>
-          <a:p>
-            <a:pPr algn="ctr" indent="0" marL="0">
-              <a:buNone/>
-            </a:pPr>
-            <a:r>
-              <a:rPr lang="en-US" sz="2000" dirty="0">
-                <a:solidFill>
-                  <a:srgbClr val="7C3AED"/>
-                </a:solidFill>
-                <a:latin typeface="Arial" pitchFamily="34" charset="0"/>
-                <a:ea typeface="Arial" pitchFamily="34" charset="-122"/>
-                <a:cs typeface="Arial" pitchFamily="34" charset="-120"/>
-              </a:rPr>
-              <a:t>×</a:t>
-            </a:r>
-            <a:endParaRPr lang="en-US" sz="2000" dirty="0"/>
-          </a:p>
-        </p:txBody>
-      </p:sp>
-      <p:sp>
-        <p:nvSpPr>
-          <p:cNvPr id="8" name="Text 4"/>
-          <p:cNvSpPr txBox="1"/>
-          <p:nvPr/>
-        </p:nvSpPr>
-        <p:spPr>
-          <a:xfrm>
-            <a:off x="2414016" y="3154680"/>
-            <a:ext cx="1783080" cy="292608"/>
-          </a:xfrm>
-          <a:prstGeom prst="rect">
-            <a:avLst/>
-          </a:prstGeom>
-          <a:noFill/>
-          <a:ln/>
-        </p:spPr>
-        <p:txBody>
-          <a:bodyPr wrap="square" lIns="0" tIns="0" rIns="0" bIns="0" rtlCol="0" anchor="ctr"/>
-          <a:lstStyle/>
-          <a:p>
-            <a:pPr indent="0" marL="0">
-              <a:buNone/>
-            </a:pPr>
-            <a:r>
-              <a:rPr lang="en-US" sz="1500" b="1" dirty="0">
-                <a:solidFill>
-                  <a:srgbClr val="1F1B2E"/>
-                </a:solidFill>
-                <a:latin typeface="Arial" pitchFamily="34" charset="0"/>
-                <a:ea typeface="Arial" pitchFamily="34" charset="-122"/>
-                <a:cs typeface="Arial" pitchFamily="34" charset="-120"/>
-              </a:rPr>
-              <a:t>Compromise</a:t>
-            </a:r>
-            <a:endParaRPr lang="en-US" sz="1500" dirty="0"/>
-          </a:p>
-        </p:txBody>
-      </p:sp>
-      <p:sp>
-        <p:nvSpPr>
-          <p:cNvPr id="9" name="Text 5"/>
-          <p:cNvSpPr txBox="1"/>
-          <p:nvPr/>
-        </p:nvSpPr>
-        <p:spPr>
-          <a:xfrm>
-            <a:off x="2414016" y="3447288"/>
-            <a:ext cx="1783080" cy="201168"/>
-          </a:xfrm>
-          <a:prstGeom prst="rect">
-            <a:avLst/>
-          </a:prstGeom>
-          <a:noFill/>
-          <a:ln/>
-        </p:spPr>
-        <p:txBody>
-          <a:bodyPr wrap="square" lIns="0" tIns="0" rIns="0" bIns="0" rtlCol="0" anchor="ctr"/>
-          <a:lstStyle/>
-          <a:p>
-            <a:pPr indent="0" marL="0">
-              <a:buNone/>
-            </a:pPr>
-            <a:r>
-              <a:rPr lang="en-US" sz="800" dirty="0">
-                <a:solidFill>
-                  <a:srgbClr val="6B6685"/>
-                </a:solidFill>
-                <a:latin typeface="Arial" pitchFamily="34" charset="0"/>
-                <a:ea typeface="Arial" pitchFamily="34" charset="-122"/>
-                <a:cs typeface="Arial" pitchFamily="34" charset="-120"/>
-              </a:rPr>
-              <a:t>trust + drift × mutability</a:t>
-            </a:r>
-            <a:endParaRPr lang="en-US" sz="800" dirty="0"/>
-          </a:p>
-        </p:txBody>
-      </p:sp>
-      <p:sp>
-        <p:nvSpPr>
-          <p:cNvPr id="10" name="Text 6"/>
-          <p:cNvSpPr txBox="1"/>
-          <p:nvPr/>
-        </p:nvSpPr>
-        <p:spPr>
-          <a:xfrm>
-            <a:off x="4197096" y="3154680"/>
-            <a:ext cx="320040" cy="365760"/>
-          </a:xfrm>
-          <a:prstGeom prst="rect">
-            <a:avLst/>
-          </a:prstGeom>
-          <a:noFill/>
-          <a:ln/>
-        </p:spPr>
-        <p:txBody>
-          <a:bodyPr wrap="square" lIns="0" tIns="0" rIns="0" bIns="0" rtlCol="0" anchor="ctr"/>
-          <a:lstStyle/>
-          <a:p>
-            <a:pPr algn="ctr" indent="0" marL="0">
-              <a:buNone/>
-            </a:pPr>
-            <a:r>
-              <a:rPr lang="en-US" sz="2000" dirty="0">
-                <a:solidFill>
-                  <a:srgbClr val="7C3AED"/>
-                </a:solidFill>
-                <a:latin typeface="Arial" pitchFamily="34" charset="0"/>
-                <a:ea typeface="Arial" pitchFamily="34" charset="-122"/>
-                <a:cs typeface="Arial" pitchFamily="34" charset="-120"/>
-              </a:rPr>
-              <a:t>×</a:t>
-            </a:r>
-            <a:endParaRPr lang="en-US" sz="2000" dirty="0"/>
-          </a:p>
-        </p:txBody>
-      </p:sp>
-      <p:sp>
-        <p:nvSpPr>
-          <p:cNvPr id="11" name="Text 7"/>
-          <p:cNvSpPr txBox="1"/>
-          <p:nvPr/>
-        </p:nvSpPr>
-        <p:spPr>
-          <a:xfrm>
-            <a:off x="4517136" y="3154680"/>
-            <a:ext cx="1783080" cy="292608"/>
-          </a:xfrm>
-          <a:prstGeom prst="rect">
-            <a:avLst/>
-          </a:prstGeom>
-          <a:noFill/>
-          <a:ln/>
-        </p:spPr>
-        <p:txBody>
-          <a:bodyPr wrap="square" lIns="0" tIns="0" rIns="0" bIns="0" rtlCol="0" anchor="ctr"/>
-          <a:lstStyle/>
-          <a:p>
-            <a:pPr indent="0" marL="0">
-              <a:buNone/>
-            </a:pPr>
-            <a:r>
-              <a:rPr lang="en-US" sz="1500" b="1" dirty="0">
-                <a:solidFill>
-                  <a:srgbClr val="1F1B2E"/>
-                </a:solidFill>
-                <a:latin typeface="Arial" pitchFamily="34" charset="0"/>
-                <a:ea typeface="Arial" pitchFamily="34" charset="-122"/>
-                <a:cs typeface="Arial" pitchFamily="34" charset="-120"/>
-              </a:rPr>
-              <a:t>Blast radius</a:t>
-            </a:r>
-            <a:endParaRPr lang="en-US" sz="1500" dirty="0"/>
-          </a:p>
-        </p:txBody>
-      </p:sp>
-      <p:sp>
-        <p:nvSpPr>
-          <p:cNvPr id="12" name="Text 8"/>
-          <p:cNvSpPr txBox="1"/>
-          <p:nvPr/>
-        </p:nvSpPr>
-        <p:spPr>
-          <a:xfrm>
-            <a:off x="4517136" y="3447288"/>
-            <a:ext cx="1783080" cy="201168"/>
-          </a:xfrm>
-          <a:prstGeom prst="rect">
-            <a:avLst/>
-          </a:prstGeom>
-          <a:noFill/>
-          <a:ln/>
-        </p:spPr>
-        <p:txBody>
-          <a:bodyPr wrap="square" lIns="0" tIns="0" rIns="0" bIns="0" rtlCol="0" anchor="ctr"/>
-          <a:lstStyle/>
-          <a:p>
-            <a:pPr indent="0" marL="0">
-              <a:buNone/>
-            </a:pPr>
-            <a:r>
-              <a:rPr lang="en-US" sz="800" dirty="0">
-                <a:solidFill>
-                  <a:srgbClr val="6B6685"/>
-                </a:solidFill>
-                <a:latin typeface="Arial" pitchFamily="34" charset="0"/>
-                <a:ea typeface="Arial" pitchFamily="34" charset="-122"/>
-                <a:cs typeface="Arial" pitchFamily="34" charset="-120"/>
-              </a:rPr>
-              <a:t>downstream reach × centrality</a:t>
-            </a:r>
-            <a:endParaRPr lang="en-US" sz="800" dirty="0"/>
-          </a:p>
-        </p:txBody>
-      </p:sp>
-      <p:sp>
-        <p:nvSpPr>
-          <p:cNvPr id="13" name="Text 9"/>
-          <p:cNvSpPr txBox="1"/>
-          <p:nvPr/>
-        </p:nvSpPr>
-        <p:spPr>
-          <a:xfrm>
-            <a:off x="6300216" y="3154680"/>
-            <a:ext cx="320040" cy="365760"/>
-          </a:xfrm>
-          <a:prstGeom prst="rect">
-            <a:avLst/>
-          </a:prstGeom>
-          <a:noFill/>
-          <a:ln/>
-        </p:spPr>
-        <p:txBody>
-          <a:bodyPr wrap="square" lIns="0" tIns="0" rIns="0" bIns="0" rtlCol="0" anchor="ctr"/>
-          <a:lstStyle/>
-          <a:p>
-            <a:pPr algn="ctr" indent="0" marL="0">
-              <a:buNone/>
-            </a:pPr>
-            <a:r>
-              <a:rPr lang="en-US" sz="2000" dirty="0">
-                <a:solidFill>
-                  <a:srgbClr val="7C3AED"/>
-                </a:solidFill>
-                <a:latin typeface="Arial" pitchFamily="34" charset="0"/>
-                <a:ea typeface="Arial" pitchFamily="34" charset="-122"/>
-                <a:cs typeface="Arial" pitchFamily="34" charset="-120"/>
-              </a:rPr>
-              <a:t>·</a:t>
-            </a:r>
-            <a:endParaRPr lang="en-US" sz="2000" dirty="0"/>
-          </a:p>
-        </p:txBody>
-      </p:sp>
-      <p:sp>
-        <p:nvSpPr>
-          <p:cNvPr id="14" name="Text 10"/>
-          <p:cNvSpPr txBox="1"/>
-          <p:nvPr/>
-        </p:nvSpPr>
-        <p:spPr>
-          <a:xfrm>
-            <a:off x="6620256" y="3154680"/>
-            <a:ext cx="1783080" cy="292608"/>
-          </a:xfrm>
-          <a:prstGeom prst="rect">
-            <a:avLst/>
-          </a:prstGeom>
-          <a:noFill/>
-          <a:ln/>
-        </p:spPr>
-        <p:txBody>
-          <a:bodyPr wrap="square" lIns="0" tIns="0" rIns="0" bIns="0" rtlCol="0" anchor="ctr"/>
-          <a:lstStyle/>
-          <a:p>
-            <a:pPr indent="0" marL="0">
-              <a:buNone/>
-            </a:pPr>
-            <a:r>
-              <a:rPr lang="en-US" sz="1500" b="1" dirty="0">
-                <a:solidFill>
-                  <a:srgbClr val="1F1B2E"/>
-                </a:solidFill>
-                <a:latin typeface="Arial" pitchFamily="34" charset="0"/>
-                <a:ea typeface="Arial" pitchFamily="34" charset="-122"/>
-                <a:cs typeface="Arial" pitchFamily="34" charset="-120"/>
-              </a:rPr>
-              <a:t>Confidence</a:t>
-            </a:r>
-            <a:endParaRPr lang="en-US" sz="1500" dirty="0"/>
-          </a:p>
-        </p:txBody>
-      </p:sp>
-      <p:sp>
-        <p:nvSpPr>
-          <p:cNvPr id="15" name="Text 11"/>
-          <p:cNvSpPr txBox="1"/>
-          <p:nvPr/>
-        </p:nvSpPr>
-        <p:spPr>
-          <a:xfrm>
-            <a:off x="6620256" y="3447288"/>
-            <a:ext cx="1783080" cy="201168"/>
-          </a:xfrm>
-          <a:prstGeom prst="rect">
-            <a:avLst/>
-          </a:prstGeom>
-          <a:noFill/>
-          <a:ln/>
-        </p:spPr>
-        <p:txBody>
-          <a:bodyPr wrap="square" lIns="0" tIns="0" rIns="0" bIns="0" rtlCol="0" anchor="ctr"/>
-          <a:lstStyle/>
-          <a:p>
-            <a:pPr indent="0" marL="0">
-              <a:buNone/>
-            </a:pPr>
-            <a:r>
-              <a:rPr lang="en-US" sz="800" dirty="0">
-                <a:solidFill>
-                  <a:srgbClr val="6B6685"/>
-                </a:solidFill>
-                <a:latin typeface="Arial" pitchFamily="34" charset="0"/>
-                <a:ea typeface="Arial" pitchFamily="34" charset="-122"/>
-                <a:cs typeface="Arial" pitchFamily="34" charset="-120"/>
-              </a:rPr>
-              <a:t>penalty on thin evidence</a:t>
-            </a:r>
-            <a:endParaRPr lang="en-US" sz="800" dirty="0"/>
-          </a:p>
-        </p:txBody>
-      </p:sp>
-      <p:sp>
-        <p:nvSpPr>
-          <p:cNvPr id="16" name="Text 12"/>
-          <p:cNvSpPr txBox="1"/>
-          <p:nvPr/>
-        </p:nvSpPr>
-        <p:spPr>
-          <a:xfrm>
-            <a:off x="310896" y="3675888"/>
-            <a:ext cx="4572000" cy="201168"/>
-          </a:xfrm>
-          <a:prstGeom prst="rect">
-            <a:avLst/>
-          </a:prstGeom>
-          <a:noFill/>
-          <a:ln/>
-        </p:spPr>
-        <p:txBody>
-          <a:bodyPr wrap="square" lIns="0" tIns="0" rIns="0" bIns="0" rtlCol="0" anchor="ctr"/>
-          <a:lstStyle/>
-          <a:p>
-            <a:pPr indent="0" marL="0">
-              <a:buNone/>
-            </a:pPr>
-            <a:r>
-              <a:rPr lang="en-US" sz="850" dirty="0">
-                <a:solidFill>
-                  <a:srgbClr val="7C3AED"/>
-                </a:solidFill>
-                <a:latin typeface="Courier New" pitchFamily="34" charset="0"/>
-                <a:ea typeface="Courier New" pitchFamily="34" charset="-122"/>
-                <a:cs typeface="Courier New" pitchFamily="34" charset="-120"/>
-              </a:rPr>
-              <a:t>score = 1 − e^(−risk)  ·  stays in 0–1, no hard clamp</a:t>
-            </a:r>
-            <a:endParaRPr lang="en-US" sz="850" dirty="0"/>
-          </a:p>
-        </p:txBody>
-      </p:sp>
-      <p:sp>
-        <p:nvSpPr>
-          <p:cNvPr id="17" name="Shape 13"/>
+              <a:rPr lang="en-US" sz="2800" dirty="0">
+                <a:solidFill>
+                  <a:srgbClr val="351C75"/>
+                </a:solidFill>
+                <a:latin typeface="Impact" pitchFamily="34" charset="0"/>
+                <a:ea typeface="Impact" pitchFamily="34" charset="-122"/>
+                <a:cs typeface="Impact" pitchFamily="34" charset="-120"/>
+              </a:rPr>
+              <a:t>Technical Implementation</a:t>
+            </a:r>
+            <a:endParaRPr lang="en-US" sz="2800" dirty="0"/>
+          </a:p>
+        </p:txBody>
+      </p:sp>
+      <p:sp>
+        <p:nvSpPr>
+          <p:cNvPr id="6" name="Shape 2"/>
           <p:cNvSpPr/>
           <p:nvPr/>
         </p:nvSpPr>
         <p:spPr>
           <a:xfrm>
-            <a:off x="310896" y="3950208"/>
-            <a:ext cx="8503920" cy="0"/>
+            <a:off x="310896" y="4956048"/>
+            <a:ext cx="8522208" cy="0"/>
           </a:xfrm>
           <a:prstGeom prst="line">
             <a:avLst/>
@@ -4815,31 +4975,678 @@
           </a:ln>
         </p:spPr>
       </p:sp>
+      <p:sp>
+        <p:nvSpPr>
+          <p:cNvPr id="7" name="Text 3"/>
+          <p:cNvSpPr txBox="1"/>
+          <p:nvPr/>
+        </p:nvSpPr>
+        <p:spPr>
+          <a:xfrm>
+            <a:off x="310896" y="4983480"/>
+            <a:ext cx="5486400" cy="146304"/>
+          </a:xfrm>
+          <a:prstGeom prst="rect">
+            <a:avLst/>
+          </a:prstGeom>
+          <a:noFill/>
+          <a:ln/>
+        </p:spPr>
+        <p:txBody>
+          <a:bodyPr wrap="square" lIns="0" tIns="0" rIns="0" bIns="0" rtlCol="0" anchor="ctr"/>
+          <a:lstStyle/>
+          <a:p>
+            <a:pPr indent="0" marL="0">
+              <a:buNone/>
+            </a:pPr>
+            <a:r>
+              <a:rPr lang="en-US" sz="700" spc="200" kern="0" dirty="0">
+                <a:solidFill>
+                  <a:srgbClr val="6B6685"/>
+                </a:solidFill>
+                <a:latin typeface="Arial" pitchFamily="34" charset="0"/>
+                <a:ea typeface="Arial" pitchFamily="34" charset="-122"/>
+                <a:cs typeface="Arial" pitchFamily="34" charset="-120"/>
+              </a:rPr>
+              <a:t>TEAM SPECTRA  ·  RIPPLEGUARD  ·  MANIPAL HACKATHON 2026</a:t>
+            </a:r>
+            <a:endParaRPr lang="en-US" sz="700" dirty="0"/>
+          </a:p>
+        </p:txBody>
+      </p:sp>
+      <p:sp>
+        <p:nvSpPr>
+          <p:cNvPr id="8" name="Text 4"/>
+          <p:cNvSpPr txBox="1"/>
+          <p:nvPr/>
+        </p:nvSpPr>
+        <p:spPr>
+          <a:xfrm>
+            <a:off x="7863840" y="4983480"/>
+            <a:ext cx="969264" cy="146304"/>
+          </a:xfrm>
+          <a:prstGeom prst="rect">
+            <a:avLst/>
+          </a:prstGeom>
+          <a:noFill/>
+          <a:ln/>
+        </p:spPr>
+        <p:txBody>
+          <a:bodyPr wrap="square" lIns="0" tIns="0" rIns="0" bIns="0" rtlCol="0" anchor="ctr"/>
+          <a:lstStyle/>
+          <a:p>
+            <a:pPr algn="r" indent="0" marL="0">
+              <a:buNone/>
+            </a:pPr>
+            <a:r>
+              <a:rPr lang="en-US" sz="700" spc="200" kern="0" dirty="0">
+                <a:solidFill>
+                  <a:srgbClr val="6B6685"/>
+                </a:solidFill>
+                <a:latin typeface="Arial" pitchFamily="34" charset="0"/>
+                <a:ea typeface="Arial" pitchFamily="34" charset="-122"/>
+                <a:cs typeface="Arial" pitchFamily="34" charset="-120"/>
+              </a:rPr>
+              <a:t>4 / 6</a:t>
+            </a:r>
+            <a:endParaRPr lang="en-US" sz="700" dirty="0"/>
+          </a:p>
+        </p:txBody>
+      </p:sp>
+      <p:sp>
+        <p:nvSpPr>
+          <p:cNvPr id="9" name="Shape 5"/>
+          <p:cNvSpPr/>
+          <p:nvPr/>
+        </p:nvSpPr>
+        <p:spPr>
+          <a:xfrm>
+            <a:off x="310896" y="3090672"/>
+            <a:ext cx="8522208" cy="841248"/>
+          </a:xfrm>
+          <a:prstGeom prst="roundRect">
+            <a:avLst>
+              <a:gd name="adj" fmla="val 10870"/>
+            </a:avLst>
+          </a:prstGeom>
+          <a:solidFill>
+            <a:srgbClr val="FFFFFF"/>
+          </a:solidFill>
+          <a:ln w="9525">
+            <a:solidFill>
+              <a:srgbClr val="D9D3EA"/>
+            </a:solidFill>
+            <a:prstDash val="solid"/>
+          </a:ln>
+        </p:spPr>
+      </p:sp>
+      <p:sp>
+        <p:nvSpPr>
+          <p:cNvPr id="10" name="Shape 6"/>
+          <p:cNvSpPr/>
+          <p:nvPr/>
+        </p:nvSpPr>
+        <p:spPr>
+          <a:xfrm>
+            <a:off x="4663440" y="3977640"/>
+            <a:ext cx="4160520" cy="914400"/>
+          </a:xfrm>
+          <a:prstGeom prst="roundRect">
+            <a:avLst>
+              <a:gd name="adj" fmla="val 10000"/>
+            </a:avLst>
+          </a:prstGeom>
+          <a:solidFill>
+            <a:srgbClr val="F4F1FB"/>
+          </a:solidFill>
+          <a:ln w="9525">
+            <a:solidFill>
+              <a:srgbClr val="D9D3EA"/>
+            </a:solidFill>
+            <a:prstDash val="solid"/>
+          </a:ln>
+        </p:spPr>
+      </p:sp>
+      <p:pic>
+        <p:nvPicPr>
+          <p:cNvPr id="11" name="Image 2" descr="arch-light.png">    </p:cNvPr>
+          <p:cNvPicPr>
+            <a:picLocks noChangeAspect="1"/>
+          </p:cNvPicPr>
+          <p:nvPr/>
+        </p:nvPicPr>
+        <p:blipFill>
+          <a:blip r:embed="rId3"/>
+          <a:stretch>
+            <a:fillRect/>
+          </a:stretch>
+        </p:blipFill>
+        <p:spPr>
+          <a:xfrm>
+            <a:off x="274320" y="1051560"/>
+            <a:ext cx="8503920" cy="1984248"/>
+          </a:xfrm>
+          <a:prstGeom prst="rect">
+            <a:avLst/>
+          </a:prstGeom>
+        </p:spPr>
+      </p:pic>
+      <p:sp>
+        <p:nvSpPr>
+          <p:cNvPr id="12" name="Text 7"/>
+          <p:cNvSpPr txBox="1"/>
+          <p:nvPr/>
+        </p:nvSpPr>
+        <p:spPr>
+          <a:xfrm>
+            <a:off x="310896" y="3154680"/>
+            <a:ext cx="1783080" cy="292608"/>
+          </a:xfrm>
+          <a:prstGeom prst="rect">
+            <a:avLst/>
+          </a:prstGeom>
+          <a:noFill/>
+          <a:ln/>
+        </p:spPr>
+        <p:txBody>
+          <a:bodyPr wrap="square" lIns="0" tIns="0" rIns="0" bIns="0" rtlCol="0" anchor="ctr"/>
+          <a:lstStyle/>
+          <a:p>
+            <a:pPr indent="0" marL="0">
+              <a:buNone/>
+            </a:pPr>
+            <a:r>
+              <a:rPr lang="en-US" sz="1500" b="1" dirty="0">
+                <a:solidFill>
+                  <a:srgbClr val="1F1B2E"/>
+                </a:solidFill>
+                <a:latin typeface="Arial" pitchFamily="34" charset="0"/>
+                <a:ea typeface="Arial" pitchFamily="34" charset="-122"/>
+                <a:cs typeface="Arial" pitchFamily="34" charset="-120"/>
+              </a:rPr>
+              <a:t>Exposure</a:t>
+            </a:r>
+            <a:endParaRPr lang="en-US" sz="1500" dirty="0"/>
+          </a:p>
+        </p:txBody>
+      </p:sp>
+      <p:sp>
+        <p:nvSpPr>
+          <p:cNvPr id="13" name="Text 8"/>
+          <p:cNvSpPr txBox="1"/>
+          <p:nvPr/>
+        </p:nvSpPr>
+        <p:spPr>
+          <a:xfrm>
+            <a:off x="310896" y="3447288"/>
+            <a:ext cx="1783080" cy="201168"/>
+          </a:xfrm>
+          <a:prstGeom prst="rect">
+            <a:avLst/>
+          </a:prstGeom>
+          <a:noFill/>
+          <a:ln/>
+        </p:spPr>
+        <p:txBody>
+          <a:bodyPr wrap="square" lIns="0" tIns="0" rIns="0" bIns="0" rtlCol="0" anchor="ctr"/>
+          <a:lstStyle/>
+          <a:p>
+            <a:pPr indent="0" marL="0">
+              <a:buNone/>
+            </a:pPr>
+            <a:r>
+              <a:rPr lang="en-US" sz="800" dirty="0">
+                <a:solidFill>
+                  <a:srgbClr val="6B6685"/>
+                </a:solidFill>
+                <a:latin typeface="Arial" pitchFamily="34" charset="0"/>
+                <a:ea typeface="Arial" pitchFamily="34" charset="-122"/>
+                <a:cs typeface="Arial" pitchFamily="34" charset="-120"/>
+              </a:rPr>
+              <a:t>CVSS × EPSS × reachability</a:t>
+            </a:r>
+            <a:endParaRPr lang="en-US" sz="800" dirty="0"/>
+          </a:p>
+        </p:txBody>
+      </p:sp>
+      <p:sp>
+        <p:nvSpPr>
+          <p:cNvPr id="14" name="Text 9"/>
+          <p:cNvSpPr txBox="1"/>
+          <p:nvPr/>
+        </p:nvSpPr>
+        <p:spPr>
+          <a:xfrm>
+            <a:off x="2093976" y="3154680"/>
+            <a:ext cx="320040" cy="365760"/>
+          </a:xfrm>
+          <a:prstGeom prst="rect">
+            <a:avLst/>
+          </a:prstGeom>
+          <a:noFill/>
+          <a:ln/>
+        </p:spPr>
+        <p:txBody>
+          <a:bodyPr wrap="square" lIns="0" tIns="0" rIns="0" bIns="0" rtlCol="0" anchor="ctr"/>
+          <a:lstStyle/>
+          <a:p>
+            <a:pPr algn="ctr" indent="0" marL="0">
+              <a:buNone/>
+            </a:pPr>
+            <a:r>
+              <a:rPr lang="en-US" sz="2000" dirty="0">
+                <a:solidFill>
+                  <a:srgbClr val="7C3AED"/>
+                </a:solidFill>
+                <a:latin typeface="Arial" pitchFamily="34" charset="0"/>
+                <a:ea typeface="Arial" pitchFamily="34" charset="-122"/>
+                <a:cs typeface="Arial" pitchFamily="34" charset="-120"/>
+              </a:rPr>
+              <a:t>×</a:t>
+            </a:r>
+            <a:endParaRPr lang="en-US" sz="2000" dirty="0"/>
+          </a:p>
+        </p:txBody>
+      </p:sp>
+      <p:sp>
+        <p:nvSpPr>
+          <p:cNvPr id="15" name="Text 10"/>
+          <p:cNvSpPr txBox="1"/>
+          <p:nvPr/>
+        </p:nvSpPr>
+        <p:spPr>
+          <a:xfrm>
+            <a:off x="2414016" y="3154680"/>
+            <a:ext cx="1783080" cy="292608"/>
+          </a:xfrm>
+          <a:prstGeom prst="rect">
+            <a:avLst/>
+          </a:prstGeom>
+          <a:noFill/>
+          <a:ln/>
+        </p:spPr>
+        <p:txBody>
+          <a:bodyPr wrap="square" lIns="0" tIns="0" rIns="0" bIns="0" rtlCol="0" anchor="ctr"/>
+          <a:lstStyle/>
+          <a:p>
+            <a:pPr indent="0" marL="0">
+              <a:buNone/>
+            </a:pPr>
+            <a:r>
+              <a:rPr lang="en-US" sz="1500" b="1" dirty="0">
+                <a:solidFill>
+                  <a:srgbClr val="1F1B2E"/>
+                </a:solidFill>
+                <a:latin typeface="Arial" pitchFamily="34" charset="0"/>
+                <a:ea typeface="Arial" pitchFamily="34" charset="-122"/>
+                <a:cs typeface="Arial" pitchFamily="34" charset="-120"/>
+              </a:rPr>
+              <a:t>Compromise</a:t>
+            </a:r>
+            <a:endParaRPr lang="en-US" sz="1500" dirty="0"/>
+          </a:p>
+        </p:txBody>
+      </p:sp>
+      <p:sp>
+        <p:nvSpPr>
+          <p:cNvPr id="16" name="Text 11"/>
+          <p:cNvSpPr txBox="1"/>
+          <p:nvPr/>
+        </p:nvSpPr>
+        <p:spPr>
+          <a:xfrm>
+            <a:off x="2414016" y="3447288"/>
+            <a:ext cx="1783080" cy="201168"/>
+          </a:xfrm>
+          <a:prstGeom prst="rect">
+            <a:avLst/>
+          </a:prstGeom>
+          <a:noFill/>
+          <a:ln/>
+        </p:spPr>
+        <p:txBody>
+          <a:bodyPr wrap="square" lIns="0" tIns="0" rIns="0" bIns="0" rtlCol="0" anchor="ctr"/>
+          <a:lstStyle/>
+          <a:p>
+            <a:pPr indent="0" marL="0">
+              <a:buNone/>
+            </a:pPr>
+            <a:r>
+              <a:rPr lang="en-US" sz="800" dirty="0">
+                <a:solidFill>
+                  <a:srgbClr val="6B6685"/>
+                </a:solidFill>
+                <a:latin typeface="Arial" pitchFamily="34" charset="0"/>
+                <a:ea typeface="Arial" pitchFamily="34" charset="-122"/>
+                <a:cs typeface="Arial" pitchFamily="34" charset="-120"/>
+              </a:rPr>
+              <a:t>trust + drift × mutability</a:t>
+            </a:r>
+            <a:endParaRPr lang="en-US" sz="800" dirty="0"/>
+          </a:p>
+        </p:txBody>
+      </p:sp>
+      <p:sp>
+        <p:nvSpPr>
+          <p:cNvPr id="17" name="Text 12"/>
+          <p:cNvSpPr txBox="1"/>
+          <p:nvPr/>
+        </p:nvSpPr>
+        <p:spPr>
+          <a:xfrm>
+            <a:off x="4197096" y="3154680"/>
+            <a:ext cx="320040" cy="365760"/>
+          </a:xfrm>
+          <a:prstGeom prst="rect">
+            <a:avLst/>
+          </a:prstGeom>
+          <a:noFill/>
+          <a:ln/>
+        </p:spPr>
+        <p:txBody>
+          <a:bodyPr wrap="square" lIns="0" tIns="0" rIns="0" bIns="0" rtlCol="0" anchor="ctr"/>
+          <a:lstStyle/>
+          <a:p>
+            <a:pPr algn="ctr" indent="0" marL="0">
+              <a:buNone/>
+            </a:pPr>
+            <a:r>
+              <a:rPr lang="en-US" sz="2000" dirty="0">
+                <a:solidFill>
+                  <a:srgbClr val="7C3AED"/>
+                </a:solidFill>
+                <a:latin typeface="Arial" pitchFamily="34" charset="0"/>
+                <a:ea typeface="Arial" pitchFamily="34" charset="-122"/>
+                <a:cs typeface="Arial" pitchFamily="34" charset="-120"/>
+              </a:rPr>
+              <a:t>×</a:t>
+            </a:r>
+            <a:endParaRPr lang="en-US" sz="2000" dirty="0"/>
+          </a:p>
+        </p:txBody>
+      </p:sp>
+      <p:sp>
+        <p:nvSpPr>
+          <p:cNvPr id="18" name="Text 13"/>
+          <p:cNvSpPr txBox="1"/>
+          <p:nvPr/>
+        </p:nvSpPr>
+        <p:spPr>
+          <a:xfrm>
+            <a:off x="4517136" y="3154680"/>
+            <a:ext cx="1783080" cy="292608"/>
+          </a:xfrm>
+          <a:prstGeom prst="rect">
+            <a:avLst/>
+          </a:prstGeom>
+          <a:noFill/>
+          <a:ln/>
+        </p:spPr>
+        <p:txBody>
+          <a:bodyPr wrap="square" lIns="0" tIns="0" rIns="0" bIns="0" rtlCol="0" anchor="ctr"/>
+          <a:lstStyle/>
+          <a:p>
+            <a:pPr indent="0" marL="0">
+              <a:buNone/>
+            </a:pPr>
+            <a:r>
+              <a:rPr lang="en-US" sz="1500" b="1" dirty="0">
+                <a:solidFill>
+                  <a:srgbClr val="1F1B2E"/>
+                </a:solidFill>
+                <a:latin typeface="Arial" pitchFamily="34" charset="0"/>
+                <a:ea typeface="Arial" pitchFamily="34" charset="-122"/>
+                <a:cs typeface="Arial" pitchFamily="34" charset="-120"/>
+              </a:rPr>
+              <a:t>Blast radius</a:t>
+            </a:r>
+            <a:endParaRPr lang="en-US" sz="1500" dirty="0"/>
+          </a:p>
+        </p:txBody>
+      </p:sp>
+      <p:sp>
+        <p:nvSpPr>
+          <p:cNvPr id="19" name="Text 14"/>
+          <p:cNvSpPr txBox="1"/>
+          <p:nvPr/>
+        </p:nvSpPr>
+        <p:spPr>
+          <a:xfrm>
+            <a:off x="4517136" y="3447288"/>
+            <a:ext cx="1783080" cy="201168"/>
+          </a:xfrm>
+          <a:prstGeom prst="rect">
+            <a:avLst/>
+          </a:prstGeom>
+          <a:noFill/>
+          <a:ln/>
+        </p:spPr>
+        <p:txBody>
+          <a:bodyPr wrap="square" lIns="0" tIns="0" rIns="0" bIns="0" rtlCol="0" anchor="ctr"/>
+          <a:lstStyle/>
+          <a:p>
+            <a:pPr indent="0" marL="0">
+              <a:buNone/>
+            </a:pPr>
+            <a:r>
+              <a:rPr lang="en-US" sz="800" dirty="0">
+                <a:solidFill>
+                  <a:srgbClr val="6B6685"/>
+                </a:solidFill>
+                <a:latin typeface="Arial" pitchFamily="34" charset="0"/>
+                <a:ea typeface="Arial" pitchFamily="34" charset="-122"/>
+                <a:cs typeface="Arial" pitchFamily="34" charset="-120"/>
+              </a:rPr>
+              <a:t>downstream reach × centrality</a:t>
+            </a:r>
+            <a:endParaRPr lang="en-US" sz="800" dirty="0"/>
+          </a:p>
+        </p:txBody>
+      </p:sp>
+      <p:sp>
+        <p:nvSpPr>
+          <p:cNvPr id="20" name="Text 15"/>
+          <p:cNvSpPr txBox="1"/>
+          <p:nvPr/>
+        </p:nvSpPr>
+        <p:spPr>
+          <a:xfrm>
+            <a:off x="6300216" y="3154680"/>
+            <a:ext cx="320040" cy="365760"/>
+          </a:xfrm>
+          <a:prstGeom prst="rect">
+            <a:avLst/>
+          </a:prstGeom>
+          <a:noFill/>
+          <a:ln/>
+        </p:spPr>
+        <p:txBody>
+          <a:bodyPr wrap="square" lIns="0" tIns="0" rIns="0" bIns="0" rtlCol="0" anchor="ctr"/>
+          <a:lstStyle/>
+          <a:p>
+            <a:pPr algn="ctr" indent="0" marL="0">
+              <a:buNone/>
+            </a:pPr>
+            <a:r>
+              <a:rPr lang="en-US" sz="2000" dirty="0">
+                <a:solidFill>
+                  <a:srgbClr val="7C3AED"/>
+                </a:solidFill>
+                <a:latin typeface="Arial" pitchFamily="34" charset="0"/>
+                <a:ea typeface="Arial" pitchFamily="34" charset="-122"/>
+                <a:cs typeface="Arial" pitchFamily="34" charset="-120"/>
+              </a:rPr>
+              <a:t>·</a:t>
+            </a:r>
+            <a:endParaRPr lang="en-US" sz="2000" dirty="0"/>
+          </a:p>
+        </p:txBody>
+      </p:sp>
+      <p:sp>
+        <p:nvSpPr>
+          <p:cNvPr id="21" name="Text 16"/>
+          <p:cNvSpPr txBox="1"/>
+          <p:nvPr/>
+        </p:nvSpPr>
+        <p:spPr>
+          <a:xfrm>
+            <a:off x="6620256" y="3154680"/>
+            <a:ext cx="1783080" cy="292608"/>
+          </a:xfrm>
+          <a:prstGeom prst="rect">
+            <a:avLst/>
+          </a:prstGeom>
+          <a:noFill/>
+          <a:ln/>
+        </p:spPr>
+        <p:txBody>
+          <a:bodyPr wrap="square" lIns="0" tIns="0" rIns="0" bIns="0" rtlCol="0" anchor="ctr"/>
+          <a:lstStyle/>
+          <a:p>
+            <a:pPr indent="0" marL="0">
+              <a:buNone/>
+            </a:pPr>
+            <a:r>
+              <a:rPr lang="en-US" sz="1500" b="1" dirty="0">
+                <a:solidFill>
+                  <a:srgbClr val="1F1B2E"/>
+                </a:solidFill>
+                <a:latin typeface="Arial" pitchFamily="34" charset="0"/>
+                <a:ea typeface="Arial" pitchFamily="34" charset="-122"/>
+                <a:cs typeface="Arial" pitchFamily="34" charset="-120"/>
+              </a:rPr>
+              <a:t>Confidence</a:t>
+            </a:r>
+            <a:endParaRPr lang="en-US" sz="1500" dirty="0"/>
+          </a:p>
+        </p:txBody>
+      </p:sp>
+      <p:sp>
+        <p:nvSpPr>
+          <p:cNvPr id="22" name="Text 17"/>
+          <p:cNvSpPr txBox="1"/>
+          <p:nvPr/>
+        </p:nvSpPr>
+        <p:spPr>
+          <a:xfrm>
+            <a:off x="6620256" y="3447288"/>
+            <a:ext cx="1783080" cy="201168"/>
+          </a:xfrm>
+          <a:prstGeom prst="rect">
+            <a:avLst/>
+          </a:prstGeom>
+          <a:noFill/>
+          <a:ln/>
+        </p:spPr>
+        <p:txBody>
+          <a:bodyPr wrap="square" lIns="0" tIns="0" rIns="0" bIns="0" rtlCol="0" anchor="ctr"/>
+          <a:lstStyle/>
+          <a:p>
+            <a:pPr indent="0" marL="0">
+              <a:buNone/>
+            </a:pPr>
+            <a:r>
+              <a:rPr lang="en-US" sz="800" dirty="0">
+                <a:solidFill>
+                  <a:srgbClr val="6B6685"/>
+                </a:solidFill>
+                <a:latin typeface="Arial" pitchFamily="34" charset="0"/>
+                <a:ea typeface="Arial" pitchFamily="34" charset="-122"/>
+                <a:cs typeface="Arial" pitchFamily="34" charset="-120"/>
+              </a:rPr>
+              <a:t>penalty on thin evidence</a:t>
+            </a:r>
+            <a:endParaRPr lang="en-US" sz="800" dirty="0"/>
+          </a:p>
+        </p:txBody>
+      </p:sp>
+      <p:sp>
+        <p:nvSpPr>
+          <p:cNvPr id="23" name="Text 18"/>
+          <p:cNvSpPr txBox="1"/>
+          <p:nvPr/>
+        </p:nvSpPr>
+        <p:spPr>
+          <a:xfrm>
+            <a:off x="310896" y="3675888"/>
+            <a:ext cx="4572000" cy="201168"/>
+          </a:xfrm>
+          <a:prstGeom prst="rect">
+            <a:avLst/>
+          </a:prstGeom>
+          <a:noFill/>
+          <a:ln/>
+        </p:spPr>
+        <p:txBody>
+          <a:bodyPr wrap="square" lIns="0" tIns="0" rIns="0" bIns="0" rtlCol="0" anchor="ctr"/>
+          <a:lstStyle/>
+          <a:p>
+            <a:pPr indent="0" marL="0">
+              <a:buNone/>
+            </a:pPr>
+            <a:r>
+              <a:rPr lang="en-US" sz="850" dirty="0">
+                <a:solidFill>
+                  <a:srgbClr val="7C3AED"/>
+                </a:solidFill>
+                <a:latin typeface="Courier New" pitchFamily="34" charset="0"/>
+                <a:ea typeface="Courier New" pitchFamily="34" charset="-122"/>
+                <a:cs typeface="Courier New" pitchFamily="34" charset="-120"/>
+              </a:rPr>
+              <a:t>score = 1 − e^(−risk)  ·  stays in 0–1, no hard clamp</a:t>
+            </a:r>
+            <a:endParaRPr lang="en-US" sz="850" dirty="0"/>
+          </a:p>
+        </p:txBody>
+      </p:sp>
+      <p:sp>
+        <p:nvSpPr>
+          <p:cNvPr id="24" name="Shape 19"/>
+          <p:cNvSpPr/>
+          <p:nvPr/>
+        </p:nvSpPr>
+        <p:spPr>
+          <a:xfrm>
+            <a:off x="310896" y="3950208"/>
+            <a:ext cx="8503920" cy="0"/>
+          </a:xfrm>
+          <a:prstGeom prst="line">
+            <a:avLst/>
+          </a:prstGeom>
+          <a:noFill/>
+          <a:ln w="9525">
+            <a:solidFill>
+              <a:srgbClr val="D9D3EA"/>
+            </a:solidFill>
+            <a:prstDash val="solid"/>
+          </a:ln>
+        </p:spPr>
+      </p:sp>
       <p:graphicFrame>
         <p:nvGraphicFramePr>
-          <p:cNvPr id="18" name="Chart 0" descr=""/>
+          <p:cNvPr id="25" name="Chart 0" descr=""/>
           <p:cNvGraphicFramePr/>
           <p:nvPr/>
         </p:nvGraphicFramePr>
         <p:xfrm>
-          <a:off x="274320" y="3977640"/>
-          <a:ext cx="4206240" cy="1051560"/>
+          <a:off x="274320" y="3950208"/>
+          <a:ext cx="4206240" cy="914400"/>
         </p:xfrm>
         <a:graphic xmlns:a="http://schemas.openxmlformats.org/drawingml/2006/main">
           <a:graphicData uri="http://schemas.openxmlformats.org/drawingml/2006/chart">
-            <c:chart xmlns:c="http://schemas.openxmlformats.org/drawingml/2006/chart" r:id="rId3"/>
+            <c:chart xmlns:c="http://schemas.openxmlformats.org/drawingml/2006/chart" r:id="rId4"/>
           </a:graphicData>
         </a:graphic>
       </p:graphicFrame>
       <p:sp>
         <p:nvSpPr>
-          <p:cNvPr id="19" name="Text 14"/>
-          <p:cNvSpPr txBox="1"/>
-          <p:nvPr/>
-        </p:nvSpPr>
-        <p:spPr>
-          <a:xfrm>
-            <a:off x="4754880" y="4023360"/>
+          <p:cNvPr id="26" name="Text 20"/>
+          <p:cNvSpPr txBox="1"/>
+          <p:nvPr/>
+        </p:nvSpPr>
+        <p:spPr>
+          <a:xfrm>
+            <a:off x="4800600" y="4041648"/>
             <a:ext cx="4023360" cy="182880"/>
           </a:xfrm>
           <a:prstGeom prst="rect">
@@ -4872,14 +5679,14 @@
       </p:sp>
       <p:sp>
         <p:nvSpPr>
-          <p:cNvPr id="20" name="Text 15"/>
-          <p:cNvSpPr txBox="1"/>
-          <p:nvPr/>
-        </p:nvSpPr>
-        <p:spPr>
-          <a:xfrm>
-            <a:off x="4754880" y="4224528"/>
-            <a:ext cx="4023360" cy="822960"/>
+          <p:cNvPr id="27" name="Text 21"/>
+          <p:cNvSpPr txBox="1"/>
+          <p:nvPr/>
+        </p:nvSpPr>
+        <p:spPr>
+          <a:xfrm>
+            <a:off x="4800600" y="4224528"/>
+            <a:ext cx="3931920" cy="640080"/>
           </a:xfrm>
           <a:prstGeom prst="rect">
             <a:avLst/>
@@ -5010,109 +5817,33 @@
       </p:grpSpPr>
       <p:pic>
         <p:nvPicPr>
-          <p:cNvPr id="2" name="Image 0" descr="logo.jpg">    </p:cNvPr>
+          <p:cNvPr id="2" name="Image 0" descr="ripple-light.png">    </p:cNvPr>
           <p:cNvPicPr>
             <a:picLocks noChangeAspect="1"/>
           </p:cNvPicPr>
           <p:nvPr/>
         </p:nvPicPr>
         <p:blipFill>
-          <a:blip r:embed="rId1"/>
+          <a:blip r:embed="rId1">
+            <a:alphaModFix amt="22000"/>
+          </a:blip>
           <a:stretch>
             <a:fillRect/>
           </a:stretch>
         </p:blipFill>
         <p:spPr>
           <a:xfrm>
-            <a:off x="8193024" y="91440"/>
-            <a:ext cx="832104" cy="612648"/>
+            <a:off x="6766560" y="-1371600"/>
+            <a:ext cx="3474720" cy="3474720"/>
           </a:xfrm>
           <a:prstGeom prst="rect">
             <a:avLst/>
           </a:prstGeom>
         </p:spPr>
       </p:pic>
-      <p:sp>
-        <p:nvSpPr>
-          <p:cNvPr id="3" name="Text 0"/>
-          <p:cNvSpPr txBox="1"/>
-          <p:nvPr/>
-        </p:nvSpPr>
-        <p:spPr>
-          <a:xfrm>
-            <a:off x="310896" y="448056"/>
-            <a:ext cx="7680960" cy="576072"/>
-          </a:xfrm>
-          <a:prstGeom prst="rect">
-            <a:avLst/>
-          </a:prstGeom>
-          <a:noFill/>
-          <a:ln/>
-        </p:spPr>
-        <p:txBody>
-          <a:bodyPr wrap="square" lIns="0" tIns="0" rIns="0" bIns="0" rtlCol="0" anchor="ctr"/>
-          <a:lstStyle/>
-          <a:p>
-            <a:pPr indent="0" marL="0">
-              <a:buNone/>
-            </a:pPr>
-            <a:r>
-              <a:rPr lang="en-US" sz="2800" dirty="0">
-                <a:solidFill>
-                  <a:srgbClr val="351C75"/>
-                </a:solidFill>
-                <a:latin typeface="Impact" pitchFamily="34" charset="0"/>
-                <a:ea typeface="Impact" pitchFamily="34" charset="-122"/>
-                <a:cs typeface="Impact" pitchFamily="34" charset="-120"/>
-              </a:rPr>
-              <a:t>Feasibility</a:t>
-            </a:r>
-            <a:endParaRPr lang="en-US" sz="2800" dirty="0"/>
-          </a:p>
-        </p:txBody>
-      </p:sp>
-      <p:sp>
-        <p:nvSpPr>
-          <p:cNvPr id="4" name="Text 1"/>
-          <p:cNvSpPr txBox="1"/>
-          <p:nvPr/>
-        </p:nvSpPr>
-        <p:spPr>
-          <a:xfrm>
-            <a:off x="310896" y="1024128"/>
-            <a:ext cx="8503920" cy="274320"/>
-          </a:xfrm>
-          <a:prstGeom prst="rect">
-            <a:avLst/>
-          </a:prstGeom>
-          <a:noFill/>
-          <a:ln/>
-        </p:spPr>
-        <p:txBody>
-          <a:bodyPr wrap="square" lIns="0" tIns="0" rIns="0" bIns="0" rtlCol="0" anchor="ctr"/>
-          <a:lstStyle/>
-          <a:p>
-            <a:pPr indent="0" marL="0">
-              <a:buNone/>
-            </a:pPr>
-            <a:r>
-              <a:rPr lang="en-US" sz="1150" dirty="0">
-                <a:solidFill>
-                  <a:srgbClr val="6B6685"/>
-                </a:solidFill>
-                <a:latin typeface="Arial" pitchFamily="34" charset="0"/>
-                <a:ea typeface="Arial" pitchFamily="34" charset="-122"/>
-                <a:cs typeface="Arial" pitchFamily="34" charset="-120"/>
-              </a:rPr>
-              <a:t>Built, tested and running end to end — the numbers below are live output from the tool.</a:t>
-            </a:r>
-            <a:endParaRPr lang="en-US" sz="1150" dirty="0"/>
-          </a:p>
-        </p:txBody>
-      </p:sp>
       <p:pic>
         <p:nvPicPr>
-          <p:cNvPr id="5" name="Image 1" descr="path-light.png">    </p:cNvPr>
+          <p:cNvPr id="3" name="Image 1" descr="logo.jpg">    </p:cNvPr>
           <p:cNvPicPr>
             <a:picLocks noChangeAspect="1"/>
           </p:cNvPicPr>
@@ -5126,6 +5857,248 @@
         </p:blipFill>
         <p:spPr>
           <a:xfrm>
+            <a:off x="8193024" y="91440"/>
+            <a:ext cx="832104" cy="612648"/>
+          </a:xfrm>
+          <a:prstGeom prst="rect">
+            <a:avLst/>
+          </a:prstGeom>
+        </p:spPr>
+      </p:pic>
+      <p:sp>
+        <p:nvSpPr>
+          <p:cNvPr id="4" name="Text 0"/>
+          <p:cNvSpPr txBox="1"/>
+          <p:nvPr/>
+        </p:nvSpPr>
+        <p:spPr>
+          <a:xfrm>
+            <a:off x="310896" y="256032"/>
+            <a:ext cx="5486400" cy="182880"/>
+          </a:xfrm>
+          <a:prstGeom prst="rect">
+            <a:avLst/>
+          </a:prstGeom>
+          <a:noFill/>
+          <a:ln/>
+        </p:spPr>
+        <p:txBody>
+          <a:bodyPr wrap="square" lIns="0" tIns="0" rIns="0" bIns="0" rtlCol="0" anchor="ctr"/>
+          <a:lstStyle/>
+          <a:p>
+            <a:pPr indent="0" marL="0">
+              <a:buNone/>
+            </a:pPr>
+            <a:r>
+              <a:rPr lang="en-US" sz="850" b="1" spc="300" kern="0" dirty="0">
+                <a:solidFill>
+                  <a:srgbClr val="A855F7"/>
+                </a:solidFill>
+                <a:latin typeface="Arial" pitchFamily="34" charset="0"/>
+                <a:ea typeface="Arial" pitchFamily="34" charset="-122"/>
+                <a:cs typeface="Arial" pitchFamily="34" charset="-120"/>
+              </a:rPr>
+              <a:t>SIMULATION, MITIGATION AND WHAT IS ALREADY BUILT</a:t>
+            </a:r>
+            <a:endParaRPr lang="en-US" sz="850" dirty="0"/>
+          </a:p>
+        </p:txBody>
+      </p:sp>
+      <p:sp>
+        <p:nvSpPr>
+          <p:cNvPr id="5" name="Text 1"/>
+          <p:cNvSpPr txBox="1"/>
+          <p:nvPr/>
+        </p:nvSpPr>
+        <p:spPr>
+          <a:xfrm>
+            <a:off x="310896" y="448056"/>
+            <a:ext cx="7680960" cy="576072"/>
+          </a:xfrm>
+          <a:prstGeom prst="rect">
+            <a:avLst/>
+          </a:prstGeom>
+          <a:noFill/>
+          <a:ln/>
+        </p:spPr>
+        <p:txBody>
+          <a:bodyPr wrap="square" lIns="0" tIns="0" rIns="0" bIns="0" rtlCol="0" anchor="ctr"/>
+          <a:lstStyle/>
+          <a:p>
+            <a:pPr indent="0" marL="0">
+              <a:buNone/>
+            </a:pPr>
+            <a:r>
+              <a:rPr lang="en-US" sz="2800" dirty="0">
+                <a:solidFill>
+                  <a:srgbClr val="351C75"/>
+                </a:solidFill>
+                <a:latin typeface="Impact" pitchFamily="34" charset="0"/>
+                <a:ea typeface="Impact" pitchFamily="34" charset="-122"/>
+                <a:cs typeface="Impact" pitchFamily="34" charset="-120"/>
+              </a:rPr>
+              <a:t>Feasibility</a:t>
+            </a:r>
+            <a:endParaRPr lang="en-US" sz="2800" dirty="0"/>
+          </a:p>
+        </p:txBody>
+      </p:sp>
+      <p:sp>
+        <p:nvSpPr>
+          <p:cNvPr id="6" name="Shape 2"/>
+          <p:cNvSpPr/>
+          <p:nvPr/>
+        </p:nvSpPr>
+        <p:spPr>
+          <a:xfrm>
+            <a:off x="310896" y="4956048"/>
+            <a:ext cx="8522208" cy="0"/>
+          </a:xfrm>
+          <a:prstGeom prst="line">
+            <a:avLst/>
+          </a:prstGeom>
+          <a:noFill/>
+          <a:ln w="9525">
+            <a:solidFill>
+              <a:srgbClr val="D9D3EA"/>
+            </a:solidFill>
+            <a:prstDash val="solid"/>
+          </a:ln>
+        </p:spPr>
+      </p:sp>
+      <p:sp>
+        <p:nvSpPr>
+          <p:cNvPr id="7" name="Text 3"/>
+          <p:cNvSpPr txBox="1"/>
+          <p:nvPr/>
+        </p:nvSpPr>
+        <p:spPr>
+          <a:xfrm>
+            <a:off x="310896" y="4983480"/>
+            <a:ext cx="5486400" cy="146304"/>
+          </a:xfrm>
+          <a:prstGeom prst="rect">
+            <a:avLst/>
+          </a:prstGeom>
+          <a:noFill/>
+          <a:ln/>
+        </p:spPr>
+        <p:txBody>
+          <a:bodyPr wrap="square" lIns="0" tIns="0" rIns="0" bIns="0" rtlCol="0" anchor="ctr"/>
+          <a:lstStyle/>
+          <a:p>
+            <a:pPr indent="0" marL="0">
+              <a:buNone/>
+            </a:pPr>
+            <a:r>
+              <a:rPr lang="en-US" sz="700" spc="200" kern="0" dirty="0">
+                <a:solidFill>
+                  <a:srgbClr val="6B6685"/>
+                </a:solidFill>
+                <a:latin typeface="Arial" pitchFamily="34" charset="0"/>
+                <a:ea typeface="Arial" pitchFamily="34" charset="-122"/>
+                <a:cs typeface="Arial" pitchFamily="34" charset="-120"/>
+              </a:rPr>
+              <a:t>TEAM SPECTRA  ·  RIPPLEGUARD  ·  MANIPAL HACKATHON 2026</a:t>
+            </a:r>
+            <a:endParaRPr lang="en-US" sz="700" dirty="0"/>
+          </a:p>
+        </p:txBody>
+      </p:sp>
+      <p:sp>
+        <p:nvSpPr>
+          <p:cNvPr id="8" name="Text 4"/>
+          <p:cNvSpPr txBox="1"/>
+          <p:nvPr/>
+        </p:nvSpPr>
+        <p:spPr>
+          <a:xfrm>
+            <a:off x="7863840" y="4983480"/>
+            <a:ext cx="969264" cy="146304"/>
+          </a:xfrm>
+          <a:prstGeom prst="rect">
+            <a:avLst/>
+          </a:prstGeom>
+          <a:noFill/>
+          <a:ln/>
+        </p:spPr>
+        <p:txBody>
+          <a:bodyPr wrap="square" lIns="0" tIns="0" rIns="0" bIns="0" rtlCol="0" anchor="ctr"/>
+          <a:lstStyle/>
+          <a:p>
+            <a:pPr algn="r" indent="0" marL="0">
+              <a:buNone/>
+            </a:pPr>
+            <a:r>
+              <a:rPr lang="en-US" sz="700" spc="200" kern="0" dirty="0">
+                <a:solidFill>
+                  <a:srgbClr val="6B6685"/>
+                </a:solidFill>
+                <a:latin typeface="Arial" pitchFamily="34" charset="0"/>
+                <a:ea typeface="Arial" pitchFamily="34" charset="-122"/>
+                <a:cs typeface="Arial" pitchFamily="34" charset="-120"/>
+              </a:rPr>
+              <a:t>5 / 6</a:t>
+            </a:r>
+            <a:endParaRPr lang="en-US" sz="700" dirty="0"/>
+          </a:p>
+        </p:txBody>
+      </p:sp>
+      <p:sp>
+        <p:nvSpPr>
+          <p:cNvPr id="9" name="Text 5"/>
+          <p:cNvSpPr txBox="1"/>
+          <p:nvPr/>
+        </p:nvSpPr>
+        <p:spPr>
+          <a:xfrm>
+            <a:off x="310896" y="1024128"/>
+            <a:ext cx="8503920" cy="274320"/>
+          </a:xfrm>
+          <a:prstGeom prst="rect">
+            <a:avLst/>
+          </a:prstGeom>
+          <a:noFill/>
+          <a:ln/>
+        </p:spPr>
+        <p:txBody>
+          <a:bodyPr wrap="square" lIns="0" tIns="0" rIns="0" bIns="0" rtlCol="0" anchor="ctr"/>
+          <a:lstStyle/>
+          <a:p>
+            <a:pPr indent="0" marL="0">
+              <a:buNone/>
+            </a:pPr>
+            <a:r>
+              <a:rPr lang="en-US" sz="1150" dirty="0">
+                <a:solidFill>
+                  <a:srgbClr val="6B6685"/>
+                </a:solidFill>
+                <a:latin typeface="Arial" pitchFamily="34" charset="0"/>
+                <a:ea typeface="Arial" pitchFamily="34" charset="-122"/>
+                <a:cs typeface="Arial" pitchFamily="34" charset="-120"/>
+              </a:rPr>
+              <a:t>Built, tested and running end to end — the numbers below are live output from the tool.</a:t>
+            </a:r>
+            <a:endParaRPr lang="en-US" sz="1150" dirty="0"/>
+          </a:p>
+        </p:txBody>
+      </p:sp>
+      <p:pic>
+        <p:nvPicPr>
+          <p:cNvPr id="10" name="Image 2" descr="path-light.png">    </p:cNvPr>
+          <p:cNvPicPr>
+            <a:picLocks noChangeAspect="1"/>
+          </p:cNvPicPr>
+          <p:nvPr/>
+        </p:nvPicPr>
+        <p:blipFill>
+          <a:blip r:embed="rId3"/>
+          <a:stretch>
+            <a:fillRect/>
+          </a:stretch>
+        </p:blipFill>
+        <p:spPr>
+          <a:xfrm>
             <a:off x="274320" y="1371600"/>
             <a:ext cx="4754880" cy="2404872"/>
           </a:xfrm>
@@ -5136,7 +6109,7 @@
       </p:pic>
       <p:sp>
         <p:nvSpPr>
-          <p:cNvPr id="6" name="Text 2"/>
+          <p:cNvPr id="11" name="Text 6"/>
           <p:cNvSpPr txBox="1"/>
           <p:nvPr/>
         </p:nvSpPr>
@@ -5217,7 +6190,7 @@
       </p:sp>
       <p:graphicFrame>
         <p:nvGraphicFramePr>
-          <p:cNvPr id="7" name="Chart 0" descr=""/>
+          <p:cNvPr id="12" name="Chart 0" descr=""/>
           <p:cNvGraphicFramePr/>
           <p:nvPr/>
         </p:nvGraphicFramePr>
@@ -5227,13 +6200,13 @@
         </p:xfrm>
         <a:graphic xmlns:a="http://schemas.openxmlformats.org/drawingml/2006/main">
           <a:graphicData uri="http://schemas.openxmlformats.org/drawingml/2006/chart">
-            <c:chart xmlns:c="http://schemas.openxmlformats.org/drawingml/2006/chart" r:id="rId3"/>
+            <c:chart xmlns:c="http://schemas.openxmlformats.org/drawingml/2006/chart" r:id="rId4"/>
           </a:graphicData>
         </a:graphic>
       </p:graphicFrame>
       <p:sp>
         <p:nvSpPr>
-          <p:cNvPr id="8" name="Text 3"/>
+          <p:cNvPr id="13" name="Text 7"/>
           <p:cNvSpPr txBox="1"/>
           <p:nvPr/>
         </p:nvSpPr>
@@ -5272,7 +6245,7 @@
       </p:sp>
       <p:sp>
         <p:nvSpPr>
-          <p:cNvPr id="9" name="Text 4"/>
+          <p:cNvPr id="14" name="Text 8"/>
           <p:cNvSpPr txBox="1"/>
           <p:nvPr/>
         </p:nvSpPr>
@@ -5311,7 +6284,7 @@
       </p:sp>
       <p:sp>
         <p:nvSpPr>
-          <p:cNvPr id="10" name="Text 5"/>
+          <p:cNvPr id="15" name="Text 9"/>
           <p:cNvSpPr txBox="1"/>
           <p:nvPr/>
         </p:nvSpPr>
@@ -5350,7 +6323,7 @@
       </p:sp>
       <p:sp>
         <p:nvSpPr>
-          <p:cNvPr id="11" name="Text 6"/>
+          <p:cNvPr id="16" name="Text 10"/>
           <p:cNvSpPr txBox="1"/>
           <p:nvPr/>
         </p:nvSpPr>
@@ -5389,19 +6362,23 @@
       </p:sp>
       <p:sp>
         <p:nvSpPr>
-          <p:cNvPr id="12" name="Shape 7"/>
+          <p:cNvPr id="17" name="Shape 11"/>
           <p:cNvSpPr/>
           <p:nvPr/>
         </p:nvSpPr>
         <p:spPr>
           <a:xfrm>
             <a:off x="310896" y="4315968"/>
-            <a:ext cx="8503920" cy="0"/>
-          </a:xfrm>
-          <a:prstGeom prst="line">
-            <a:avLst/>
-          </a:prstGeom>
-          <a:noFill/>
+            <a:ext cx="1609344" cy="566928"/>
+          </a:xfrm>
+          <a:prstGeom prst="roundRect">
+            <a:avLst>
+              <a:gd name="adj" fmla="val 16129"/>
+            </a:avLst>
+          </a:prstGeom>
+          <a:solidFill>
+            <a:srgbClr val="F4F1FB"/>
+          </a:solidFill>
           <a:ln w="9525">
             <a:solidFill>
               <a:srgbClr val="D9D3EA"/>
@@ -5412,14 +6389,14 @@
       </p:sp>
       <p:sp>
         <p:nvSpPr>
-          <p:cNvPr id="13" name="Text 8"/>
-          <p:cNvSpPr txBox="1"/>
-          <p:nvPr/>
-        </p:nvSpPr>
-        <p:spPr>
-          <a:xfrm>
-            <a:off x="310896" y="4389120"/>
-            <a:ext cx="1645920" cy="365760"/>
+          <p:cNvPr id="18" name="Text 12"/>
+          <p:cNvSpPr txBox="1"/>
+          <p:nvPr/>
+        </p:nvSpPr>
+        <p:spPr>
+          <a:xfrm>
+            <a:off x="420624" y="4343400"/>
+            <a:ext cx="1463040" cy="310896"/>
           </a:xfrm>
           <a:prstGeom prst="rect">
             <a:avLst/>
@@ -5435,7 +6412,7 @@
               <a:buNone/>
             </a:pPr>
             <a:r>
-              <a:rPr lang="en-US" sz="2000" b="1" dirty="0">
+              <a:rPr lang="en-US" sz="1800" b="1" dirty="0">
                 <a:solidFill>
                   <a:srgbClr val="7C3AED"/>
                 </a:solidFill>
@@ -5445,20 +6422,20 @@
               </a:rPr>
               <a:t>13 / 13</a:t>
             </a:r>
-            <a:endParaRPr lang="en-US" sz="2000" dirty="0"/>
-          </a:p>
-        </p:txBody>
-      </p:sp>
-      <p:sp>
-        <p:nvSpPr>
-          <p:cNvPr id="14" name="Text 9"/>
-          <p:cNvSpPr txBox="1"/>
-          <p:nvPr/>
-        </p:nvSpPr>
-        <p:spPr>
-          <a:xfrm>
-            <a:off x="310896" y="4736592"/>
-            <a:ext cx="1645920" cy="201168"/>
+            <a:endParaRPr lang="en-US" sz="1800" dirty="0"/>
+          </a:p>
+        </p:txBody>
+      </p:sp>
+      <p:sp>
+        <p:nvSpPr>
+          <p:cNvPr id="19" name="Text 13"/>
+          <p:cNvSpPr txBox="1"/>
+          <p:nvPr/>
+        </p:nvSpPr>
+        <p:spPr>
+          <a:xfrm>
+            <a:off x="420624" y="4645152"/>
+            <a:ext cx="1463040" cy="182880"/>
           </a:xfrm>
           <a:prstGeom prst="rect">
             <a:avLst/>
@@ -5474,7 +6451,7 @@
               <a:buNone/>
             </a:pPr>
             <a:r>
-              <a:rPr lang="en-US" sz="850" dirty="0">
+              <a:rPr lang="en-US" sz="800" dirty="0">
                 <a:solidFill>
                   <a:srgbClr val="6B6685"/>
                 </a:solidFill>
@@ -5484,20 +6461,47 @@
               </a:rPr>
               <a:t>tests passing</a:t>
             </a:r>
-            <a:endParaRPr lang="en-US" sz="850" dirty="0"/>
-          </a:p>
-        </p:txBody>
-      </p:sp>
-      <p:sp>
-        <p:nvSpPr>
-          <p:cNvPr id="15" name="Text 10"/>
-          <p:cNvSpPr txBox="1"/>
-          <p:nvPr/>
-        </p:nvSpPr>
-        <p:spPr>
-          <a:xfrm>
-            <a:off x="2011680" y="4389120"/>
-            <a:ext cx="1645920" cy="365760"/>
+            <a:endParaRPr lang="en-US" sz="800" dirty="0"/>
+          </a:p>
+        </p:txBody>
+      </p:sp>
+      <p:sp>
+        <p:nvSpPr>
+          <p:cNvPr id="20" name="Shape 14"/>
+          <p:cNvSpPr/>
+          <p:nvPr/>
+        </p:nvSpPr>
+        <p:spPr>
+          <a:xfrm>
+            <a:off x="2029968" y="4315968"/>
+            <a:ext cx="1609344" cy="566928"/>
+          </a:xfrm>
+          <a:prstGeom prst="roundRect">
+            <a:avLst>
+              <a:gd name="adj" fmla="val 16129"/>
+            </a:avLst>
+          </a:prstGeom>
+          <a:solidFill>
+            <a:srgbClr val="F4F1FB"/>
+          </a:solidFill>
+          <a:ln w="9525">
+            <a:solidFill>
+              <a:srgbClr val="D9D3EA"/>
+            </a:solidFill>
+            <a:prstDash val="solid"/>
+          </a:ln>
+        </p:spPr>
+      </p:sp>
+      <p:sp>
+        <p:nvSpPr>
+          <p:cNvPr id="21" name="Text 15"/>
+          <p:cNvSpPr txBox="1"/>
+          <p:nvPr/>
+        </p:nvSpPr>
+        <p:spPr>
+          <a:xfrm>
+            <a:off x="2139696" y="4343400"/>
+            <a:ext cx="1463040" cy="310896"/>
           </a:xfrm>
           <a:prstGeom prst="rect">
             <a:avLst/>
@@ -5513,7 +6517,7 @@
               <a:buNone/>
             </a:pPr>
             <a:r>
-              <a:rPr lang="en-US" sz="2000" b="1" dirty="0">
+              <a:rPr lang="en-US" sz="1800" b="1" dirty="0">
                 <a:solidFill>
                   <a:srgbClr val="7C3AED"/>
                 </a:solidFill>
@@ -5523,20 +6527,20 @@
               </a:rPr>
               <a:t>~3.7k</a:t>
             </a:r>
-            <a:endParaRPr lang="en-US" sz="2000" dirty="0"/>
-          </a:p>
-        </p:txBody>
-      </p:sp>
-      <p:sp>
-        <p:nvSpPr>
-          <p:cNvPr id="16" name="Text 11"/>
-          <p:cNvSpPr txBox="1"/>
-          <p:nvPr/>
-        </p:nvSpPr>
-        <p:spPr>
-          <a:xfrm>
-            <a:off x="2011680" y="4736592"/>
-            <a:ext cx="1645920" cy="201168"/>
+            <a:endParaRPr lang="en-US" sz="1800" dirty="0"/>
+          </a:p>
+        </p:txBody>
+      </p:sp>
+      <p:sp>
+        <p:nvSpPr>
+          <p:cNvPr id="22" name="Text 16"/>
+          <p:cNvSpPr txBox="1"/>
+          <p:nvPr/>
+        </p:nvSpPr>
+        <p:spPr>
+          <a:xfrm>
+            <a:off x="2139696" y="4645152"/>
+            <a:ext cx="1463040" cy="182880"/>
           </a:xfrm>
           <a:prstGeom prst="rect">
             <a:avLst/>
@@ -5552,7 +6556,7 @@
               <a:buNone/>
             </a:pPr>
             <a:r>
-              <a:rPr lang="en-US" sz="850" dirty="0">
+              <a:rPr lang="en-US" sz="800" dirty="0">
                 <a:solidFill>
                   <a:srgbClr val="6B6685"/>
                 </a:solidFill>
@@ -5562,20 +6566,47 @@
               </a:rPr>
               <a:t>lines of code</a:t>
             </a:r>
-            <a:endParaRPr lang="en-US" sz="850" dirty="0"/>
-          </a:p>
-        </p:txBody>
-      </p:sp>
-      <p:sp>
-        <p:nvSpPr>
-          <p:cNvPr id="17" name="Text 12"/>
-          <p:cNvSpPr txBox="1"/>
-          <p:nvPr/>
-        </p:nvSpPr>
-        <p:spPr>
-          <a:xfrm>
-            <a:off x="3712464" y="4389120"/>
-            <a:ext cx="1645920" cy="365760"/>
+            <a:endParaRPr lang="en-US" sz="800" dirty="0"/>
+          </a:p>
+        </p:txBody>
+      </p:sp>
+      <p:sp>
+        <p:nvSpPr>
+          <p:cNvPr id="23" name="Shape 17"/>
+          <p:cNvSpPr/>
+          <p:nvPr/>
+        </p:nvSpPr>
+        <p:spPr>
+          <a:xfrm>
+            <a:off x="3749040" y="4315968"/>
+            <a:ext cx="1609344" cy="566928"/>
+          </a:xfrm>
+          <a:prstGeom prst="roundRect">
+            <a:avLst>
+              <a:gd name="adj" fmla="val 16129"/>
+            </a:avLst>
+          </a:prstGeom>
+          <a:solidFill>
+            <a:srgbClr val="F4F1FB"/>
+          </a:solidFill>
+          <a:ln w="9525">
+            <a:solidFill>
+              <a:srgbClr val="D9D3EA"/>
+            </a:solidFill>
+            <a:prstDash val="solid"/>
+          </a:ln>
+        </p:spPr>
+      </p:sp>
+      <p:sp>
+        <p:nvSpPr>
+          <p:cNvPr id="24" name="Text 18"/>
+          <p:cNvSpPr txBox="1"/>
+          <p:nvPr/>
+        </p:nvSpPr>
+        <p:spPr>
+          <a:xfrm>
+            <a:off x="3858768" y="4343400"/>
+            <a:ext cx="1463040" cy="310896"/>
           </a:xfrm>
           <a:prstGeom prst="rect">
             <a:avLst/>
@@ -5591,7 +6622,7 @@
               <a:buNone/>
             </a:pPr>
             <a:r>
-              <a:rPr lang="en-US" sz="2000" b="1" dirty="0">
+              <a:rPr lang="en-US" sz="1800" b="1" dirty="0">
                 <a:solidFill>
                   <a:srgbClr val="7C3AED"/>
                 </a:solidFill>
@@ -5601,20 +6632,20 @@
               </a:rPr>
               <a:t>19</a:t>
             </a:r>
-            <a:endParaRPr lang="en-US" sz="2000" dirty="0"/>
-          </a:p>
-        </p:txBody>
-      </p:sp>
-      <p:sp>
-        <p:nvSpPr>
-          <p:cNvPr id="18" name="Text 13"/>
-          <p:cNvSpPr txBox="1"/>
-          <p:nvPr/>
-        </p:nvSpPr>
-        <p:spPr>
-          <a:xfrm>
-            <a:off x="3712464" y="4736592"/>
-            <a:ext cx="1645920" cy="201168"/>
+            <a:endParaRPr lang="en-US" sz="1800" dirty="0"/>
+          </a:p>
+        </p:txBody>
+      </p:sp>
+      <p:sp>
+        <p:nvSpPr>
+          <p:cNvPr id="25" name="Text 19"/>
+          <p:cNvSpPr txBox="1"/>
+          <p:nvPr/>
+        </p:nvSpPr>
+        <p:spPr>
+          <a:xfrm>
+            <a:off x="3858768" y="4645152"/>
+            <a:ext cx="1463040" cy="182880"/>
           </a:xfrm>
           <a:prstGeom prst="rect">
             <a:avLst/>
@@ -5630,7 +6661,7 @@
               <a:buNone/>
             </a:pPr>
             <a:r>
-              <a:rPr lang="en-US" sz="850" dirty="0">
+              <a:rPr lang="en-US" sz="800" dirty="0">
                 <a:solidFill>
                   <a:srgbClr val="6B6685"/>
                 </a:solidFill>
@@ -5640,20 +6671,47 @@
               </a:rPr>
               <a:t>REST endpoints + SSE</a:t>
             </a:r>
-            <a:endParaRPr lang="en-US" sz="850" dirty="0"/>
-          </a:p>
-        </p:txBody>
-      </p:sp>
-      <p:sp>
-        <p:nvSpPr>
-          <p:cNvPr id="19" name="Text 14"/>
-          <p:cNvSpPr txBox="1"/>
-          <p:nvPr/>
-        </p:nvSpPr>
-        <p:spPr>
-          <a:xfrm>
-            <a:off x="5413248" y="4389120"/>
-            <a:ext cx="1645920" cy="365760"/>
+            <a:endParaRPr lang="en-US" sz="800" dirty="0"/>
+          </a:p>
+        </p:txBody>
+      </p:sp>
+      <p:sp>
+        <p:nvSpPr>
+          <p:cNvPr id="26" name="Shape 20"/>
+          <p:cNvSpPr/>
+          <p:nvPr/>
+        </p:nvSpPr>
+        <p:spPr>
+          <a:xfrm>
+            <a:off x="5468112" y="4315968"/>
+            <a:ext cx="1609344" cy="566928"/>
+          </a:xfrm>
+          <a:prstGeom prst="roundRect">
+            <a:avLst>
+              <a:gd name="adj" fmla="val 16129"/>
+            </a:avLst>
+          </a:prstGeom>
+          <a:solidFill>
+            <a:srgbClr val="F4F1FB"/>
+          </a:solidFill>
+          <a:ln w="9525">
+            <a:solidFill>
+              <a:srgbClr val="D9D3EA"/>
+            </a:solidFill>
+            <a:prstDash val="solid"/>
+          </a:ln>
+        </p:spPr>
+      </p:sp>
+      <p:sp>
+        <p:nvSpPr>
+          <p:cNvPr id="27" name="Text 21"/>
+          <p:cNvSpPr txBox="1"/>
+          <p:nvPr/>
+        </p:nvSpPr>
+        <p:spPr>
+          <a:xfrm>
+            <a:off x="5577840" y="4343400"/>
+            <a:ext cx="1463040" cy="310896"/>
           </a:xfrm>
           <a:prstGeom prst="rect">
             <a:avLst/>
@@ -5669,7 +6727,7 @@
               <a:buNone/>
             </a:pPr>
             <a:r>
-              <a:rPr lang="en-US" sz="2000" b="1" dirty="0">
+              <a:rPr lang="en-US" sz="1800" b="1" dirty="0">
                 <a:solidFill>
                   <a:srgbClr val="059669"/>
                 </a:solidFill>
@@ -5679,20 +6737,20 @@
               </a:rPr>
               <a:t>0</a:t>
             </a:r>
-            <a:endParaRPr lang="en-US" sz="2000" dirty="0"/>
-          </a:p>
-        </p:txBody>
-      </p:sp>
-      <p:sp>
-        <p:nvSpPr>
-          <p:cNvPr id="20" name="Text 15"/>
-          <p:cNvSpPr txBox="1"/>
-          <p:nvPr/>
-        </p:nvSpPr>
-        <p:spPr>
-          <a:xfrm>
-            <a:off x="5413248" y="4736592"/>
-            <a:ext cx="1645920" cy="201168"/>
+            <a:endParaRPr lang="en-US" sz="1800" dirty="0"/>
+          </a:p>
+        </p:txBody>
+      </p:sp>
+      <p:sp>
+        <p:nvSpPr>
+          <p:cNvPr id="28" name="Text 22"/>
+          <p:cNvSpPr txBox="1"/>
+          <p:nvPr/>
+        </p:nvSpPr>
+        <p:spPr>
+          <a:xfrm>
+            <a:off x="5577840" y="4645152"/>
+            <a:ext cx="1463040" cy="182880"/>
           </a:xfrm>
           <a:prstGeom prst="rect">
             <a:avLst/>
@@ -5708,7 +6766,7 @@
               <a:buNone/>
             </a:pPr>
             <a:r>
-              <a:rPr lang="en-US" sz="850" dirty="0">
+              <a:rPr lang="en-US" sz="800" dirty="0">
                 <a:solidFill>
                   <a:srgbClr val="6B6685"/>
                 </a:solidFill>
@@ -5718,20 +6776,47 @@
               </a:rPr>
               <a:t>API keys or paid feeds</a:t>
             </a:r>
-            <a:endParaRPr lang="en-US" sz="850" dirty="0"/>
-          </a:p>
-        </p:txBody>
-      </p:sp>
-      <p:sp>
-        <p:nvSpPr>
-          <p:cNvPr id="21" name="Text 16"/>
-          <p:cNvSpPr txBox="1"/>
-          <p:nvPr/>
-        </p:nvSpPr>
-        <p:spPr>
-          <a:xfrm>
-            <a:off x="7114032" y="4389120"/>
-            <a:ext cx="1645920" cy="365760"/>
+            <a:endParaRPr lang="en-US" sz="800" dirty="0"/>
+          </a:p>
+        </p:txBody>
+      </p:sp>
+      <p:sp>
+        <p:nvSpPr>
+          <p:cNvPr id="29" name="Shape 23"/>
+          <p:cNvSpPr/>
+          <p:nvPr/>
+        </p:nvSpPr>
+        <p:spPr>
+          <a:xfrm>
+            <a:off x="7187184" y="4315968"/>
+            <a:ext cx="1609344" cy="566928"/>
+          </a:xfrm>
+          <a:prstGeom prst="roundRect">
+            <a:avLst>
+              <a:gd name="adj" fmla="val 16129"/>
+            </a:avLst>
+          </a:prstGeom>
+          <a:solidFill>
+            <a:srgbClr val="F4F1FB"/>
+          </a:solidFill>
+          <a:ln w="9525">
+            <a:solidFill>
+              <a:srgbClr val="D9D3EA"/>
+            </a:solidFill>
+            <a:prstDash val="solid"/>
+          </a:ln>
+        </p:spPr>
+      </p:sp>
+      <p:sp>
+        <p:nvSpPr>
+          <p:cNvPr id="30" name="Text 24"/>
+          <p:cNvSpPr txBox="1"/>
+          <p:nvPr/>
+        </p:nvSpPr>
+        <p:spPr>
+          <a:xfrm>
+            <a:off x="7296912" y="4343400"/>
+            <a:ext cx="1463040" cy="310896"/>
           </a:xfrm>
           <a:prstGeom prst="rect">
             <a:avLst/>
@@ -5747,7 +6832,7 @@
               <a:buNone/>
             </a:pPr>
             <a:r>
-              <a:rPr lang="en-US" sz="2000" b="1" dirty="0">
+              <a:rPr lang="en-US" sz="1800" b="1" dirty="0">
                 <a:solidFill>
                   <a:srgbClr val="7C3AED"/>
                 </a:solidFill>
@@ -5757,20 +6842,20 @@
               </a:rPr>
               <a:t>&lt; 1 s</a:t>
             </a:r>
-            <a:endParaRPr lang="en-US" sz="2000" dirty="0"/>
-          </a:p>
-        </p:txBody>
-      </p:sp>
-      <p:sp>
-        <p:nvSpPr>
-          <p:cNvPr id="22" name="Text 17"/>
-          <p:cNvSpPr txBox="1"/>
-          <p:nvPr/>
-        </p:nvSpPr>
-        <p:spPr>
-          <a:xfrm>
-            <a:off x="7114032" y="4736592"/>
-            <a:ext cx="1645920" cy="201168"/>
+            <a:endParaRPr lang="en-US" sz="1800" dirty="0"/>
+          </a:p>
+        </p:txBody>
+      </p:sp>
+      <p:sp>
+        <p:nvSpPr>
+          <p:cNvPr id="31" name="Text 25"/>
+          <p:cNvSpPr txBox="1"/>
+          <p:nvPr/>
+        </p:nvSpPr>
+        <p:spPr>
+          <a:xfrm>
+            <a:off x="7296912" y="4645152"/>
+            <a:ext cx="1463040" cy="182880"/>
           </a:xfrm>
           <a:prstGeom prst="rect">
             <a:avLst/>
@@ -5786,7 +6871,7 @@
               <a:buNone/>
             </a:pPr>
             <a:r>
-              <a:rPr lang="en-US" sz="850" dirty="0">
+              <a:rPr lang="en-US" sz="800" dirty="0">
                 <a:solidFill>
                   <a:srgbClr val="6B6685"/>
                 </a:solidFill>
@@ -5796,7 +6881,7 @@
               </a:rPr>
               <a:t>scan of 49 packages</a:t>
             </a:r>
-            <a:endParaRPr lang="en-US" sz="850" dirty="0"/>
+            <a:endParaRPr lang="en-US" sz="800" dirty="0"/>
           </a:p>
         </p:txBody>
       </p:sp>
@@ -5834,20 +6919,46 @@
       </p:grpSpPr>
       <p:pic>
         <p:nvPicPr>
-          <p:cNvPr id="2" name="Image 0" descr="logo.jpg">    </p:cNvPr>
+          <p:cNvPr id="2" name="Image 0" descr="ripple-light.png">    </p:cNvPr>
           <p:cNvPicPr>
             <a:picLocks noChangeAspect="1"/>
           </p:cNvPicPr>
           <p:nvPr/>
         </p:nvPicPr>
         <p:blipFill>
-          <a:blip r:embed="rId1"/>
+          <a:blip r:embed="rId1">
+            <a:alphaModFix amt="22000"/>
+          </a:blip>
           <a:stretch>
             <a:fillRect/>
           </a:stretch>
         </p:blipFill>
         <p:spPr>
           <a:xfrm>
+            <a:off x="6766560" y="-1371600"/>
+            <a:ext cx="3474720" cy="3474720"/>
+          </a:xfrm>
+          <a:prstGeom prst="rect">
+            <a:avLst/>
+          </a:prstGeom>
+        </p:spPr>
+      </p:pic>
+      <p:pic>
+        <p:nvPicPr>
+          <p:cNvPr id="3" name="Image 1" descr="logo.jpg">    </p:cNvPr>
+          <p:cNvPicPr>
+            <a:picLocks noChangeAspect="1"/>
+          </p:cNvPicPr>
+          <p:nvPr/>
+        </p:nvPicPr>
+        <p:blipFill>
+          <a:blip r:embed="rId2"/>
+          <a:stretch>
+            <a:fillRect/>
+          </a:stretch>
+        </p:blipFill>
+        <p:spPr>
+          <a:xfrm>
             <a:off x="8193024" y="91440"/>
             <a:ext cx="832104" cy="612648"/>
           </a:xfrm>
@@ -5858,7 +6969,46 @@
       </p:pic>
       <p:sp>
         <p:nvSpPr>
-          <p:cNvPr id="3" name="Text 0"/>
+          <p:cNvPr id="4" name="Text 0"/>
+          <p:cNvSpPr txBox="1"/>
+          <p:nvPr/>
+        </p:nvSpPr>
+        <p:spPr>
+          <a:xfrm>
+            <a:off x="310896" y="256032"/>
+            <a:ext cx="5486400" cy="182880"/>
+          </a:xfrm>
+          <a:prstGeom prst="rect">
+            <a:avLst/>
+          </a:prstGeom>
+          <a:noFill/>
+          <a:ln/>
+        </p:spPr>
+        <p:txBody>
+          <a:bodyPr wrap="square" lIns="0" tIns="0" rIns="0" bIns="0" rtlCol="0" anchor="ctr"/>
+          <a:lstStyle/>
+          <a:p>
+            <a:pPr indent="0" marL="0">
+              <a:buNone/>
+            </a:pPr>
+            <a:r>
+              <a:rPr lang="en-US" sz="850" b="1" spc="300" kern="0" dirty="0">
+                <a:solidFill>
+                  <a:srgbClr val="A855F7"/>
+                </a:solidFill>
+                <a:latin typeface="Arial" pitchFamily="34" charset="0"/>
+                <a:ea typeface="Arial" pitchFamily="34" charset="-122"/>
+                <a:cs typeface="Arial" pitchFamily="34" charset="-120"/>
+              </a:rPr>
+              <a:t>OPEN-SOURCE CLI TODAY · CI GATE TOMORROW</a:t>
+            </a:r>
+            <a:endParaRPr lang="en-US" sz="850" dirty="0"/>
+          </a:p>
+        </p:txBody>
+      </p:sp>
+      <p:sp>
+        <p:nvSpPr>
+          <p:cNvPr id="5" name="Text 1"/>
           <p:cNvSpPr txBox="1"/>
           <p:nvPr/>
         </p:nvSpPr>
@@ -5897,131 +7047,14 @@
       </p:sp>
       <p:sp>
         <p:nvSpPr>
-          <p:cNvPr id="4" name="Text 1"/>
-          <p:cNvSpPr txBox="1"/>
-          <p:nvPr/>
-        </p:nvSpPr>
-        <p:spPr>
-          <a:xfrm>
-            <a:off x="310896" y="1143000"/>
-            <a:ext cx="1280160" cy="274320"/>
-          </a:xfrm>
-          <a:prstGeom prst="rect">
-            <a:avLst/>
-          </a:prstGeom>
-          <a:noFill/>
-          <a:ln/>
-        </p:spPr>
-        <p:txBody>
-          <a:bodyPr wrap="square" lIns="0" tIns="0" rIns="0" bIns="0" rtlCol="0" anchor="ctr"/>
-          <a:lstStyle/>
-          <a:p>
-            <a:pPr indent="0" marL="0">
-              <a:buNone/>
-            </a:pPr>
-            <a:r>
-              <a:rPr lang="en-US" sz="1500" b="1" dirty="0">
-                <a:solidFill>
-                  <a:srgbClr val="1F1B2E"/>
-                </a:solidFill>
-                <a:latin typeface="Arial" pitchFamily="34" charset="0"/>
-                <a:ea typeface="Arial" pitchFamily="34" charset="-122"/>
-                <a:cs typeface="Arial" pitchFamily="34" charset="-120"/>
-              </a:rPr>
-              <a:t>Free</a:t>
-            </a:r>
-            <a:endParaRPr lang="en-US" sz="1500" dirty="0"/>
-          </a:p>
-        </p:txBody>
-      </p:sp>
-      <p:sp>
-        <p:nvSpPr>
-          <p:cNvPr id="5" name="Text 2"/>
-          <p:cNvSpPr txBox="1"/>
-          <p:nvPr/>
-        </p:nvSpPr>
-        <p:spPr>
-          <a:xfrm>
-            <a:off x="1600200" y="1161288"/>
-            <a:ext cx="3108960" cy="365760"/>
-          </a:xfrm>
-          <a:prstGeom prst="rect">
-            <a:avLst/>
-          </a:prstGeom>
-          <a:noFill/>
-          <a:ln/>
-        </p:spPr>
-        <p:txBody>
-          <a:bodyPr wrap="square" lIns="0" tIns="0" rIns="0" bIns="0" rtlCol="0" anchor="t"/>
-          <a:lstStyle/>
-          <a:p>
-            <a:pPr indent="0" marL="0">
-              <a:buNone/>
-            </a:pPr>
-            <a:r>
-              <a:rPr lang="en-US" sz="950" dirty="0">
-                <a:solidFill>
-                  <a:srgbClr val="1F1B2E"/>
-                </a:solidFill>
-                <a:latin typeface="Arial" pitchFamily="34" charset="0"/>
-                <a:ea typeface="Arial" pitchFamily="34" charset="-122"/>
-                <a:cs typeface="Arial" pitchFamily="34" charset="-120"/>
-              </a:rPr>
-              <a:t>CLI + single-project dashboard</a:t>
-            </a:r>
-            <a:endParaRPr lang="en-US" sz="950" dirty="0"/>
-          </a:p>
-        </p:txBody>
-      </p:sp>
-      <p:sp>
-        <p:nvSpPr>
-          <p:cNvPr id="6" name="Text 3"/>
-          <p:cNvSpPr txBox="1"/>
-          <p:nvPr/>
-        </p:nvSpPr>
-        <p:spPr>
-          <a:xfrm>
-            <a:off x="1600200" y="1527048"/>
-            <a:ext cx="3108960" cy="182880"/>
-          </a:xfrm>
-          <a:prstGeom prst="rect">
-            <a:avLst/>
-          </a:prstGeom>
-          <a:noFill/>
-          <a:ln/>
-        </p:spPr>
-        <p:txBody>
-          <a:bodyPr wrap="square" lIns="0" tIns="0" rIns="0" bIns="0" rtlCol="0" anchor="ctr"/>
-          <a:lstStyle/>
-          <a:p>
-            <a:pPr indent="0" marL="0">
-              <a:buNone/>
-            </a:pPr>
-            <a:r>
-              <a:rPr lang="en-US" sz="800" i="1" dirty="0">
-                <a:solidFill>
-                  <a:srgbClr val="6B6685"/>
-                </a:solidFill>
-                <a:latin typeface="Arial" pitchFamily="34" charset="0"/>
-                <a:ea typeface="Arial" pitchFamily="34" charset="-122"/>
-                <a:cs typeface="Arial" pitchFamily="34" charset="-120"/>
-              </a:rPr>
-              <a:t>adoption engine · open source core</a:t>
-            </a:r>
-            <a:endParaRPr lang="en-US" sz="800" dirty="0"/>
-          </a:p>
-        </p:txBody>
-      </p:sp>
-      <p:sp>
-        <p:nvSpPr>
-          <p:cNvPr id="7" name="Shape 4"/>
+          <p:cNvPr id="6" name="Shape 2"/>
           <p:cNvSpPr/>
           <p:nvPr/>
         </p:nvSpPr>
         <p:spPr>
           <a:xfrm>
-            <a:off x="310896" y="1764792"/>
-            <a:ext cx="4389120" cy="0"/>
+            <a:off x="310896" y="4956048"/>
+            <a:ext cx="8522208" cy="0"/>
           </a:xfrm>
           <a:prstGeom prst="line">
             <a:avLst/>
@@ -6037,14 +7070,14 @@
       </p:sp>
       <p:sp>
         <p:nvSpPr>
-          <p:cNvPr id="8" name="Text 5"/>
-          <p:cNvSpPr txBox="1"/>
-          <p:nvPr/>
-        </p:nvSpPr>
-        <p:spPr>
-          <a:xfrm>
-            <a:off x="310896" y="1856232"/>
-            <a:ext cx="1280160" cy="274320"/>
+          <p:cNvPr id="7" name="Text 3"/>
+          <p:cNvSpPr txBox="1"/>
+          <p:nvPr/>
+        </p:nvSpPr>
+        <p:spPr>
+          <a:xfrm>
+            <a:off x="310896" y="4983480"/>
+            <a:ext cx="5486400" cy="146304"/>
           </a:xfrm>
           <a:prstGeom prst="rect">
             <a:avLst/>
@@ -6060,69 +7093,30 @@
               <a:buNone/>
             </a:pPr>
             <a:r>
-              <a:rPr lang="en-US" sz="1500" b="1" dirty="0">
-                <a:solidFill>
-                  <a:srgbClr val="7C3AED"/>
-                </a:solidFill>
-                <a:latin typeface="Arial" pitchFamily="34" charset="0"/>
-                <a:ea typeface="Arial" pitchFamily="34" charset="-122"/>
-                <a:cs typeface="Arial" pitchFamily="34" charset="-120"/>
-              </a:rPr>
-              <a:t>Team</a:t>
-            </a:r>
-            <a:endParaRPr lang="en-US" sz="1500" dirty="0"/>
-          </a:p>
-        </p:txBody>
-      </p:sp>
-      <p:sp>
-        <p:nvSpPr>
-          <p:cNvPr id="9" name="Text 6"/>
-          <p:cNvSpPr txBox="1"/>
-          <p:nvPr/>
-        </p:nvSpPr>
-        <p:spPr>
-          <a:xfrm>
-            <a:off x="1600200" y="1874520"/>
-            <a:ext cx="3108960" cy="365760"/>
-          </a:xfrm>
-          <a:prstGeom prst="rect">
-            <a:avLst/>
-          </a:prstGeom>
-          <a:noFill/>
-          <a:ln/>
-        </p:spPr>
-        <p:txBody>
-          <a:bodyPr wrap="square" lIns="0" tIns="0" rIns="0" bIns="0" rtlCol="0" anchor="t"/>
-          <a:lstStyle/>
-          <a:p>
-            <a:pPr indent="0" marL="0">
-              <a:buNone/>
-            </a:pPr>
-            <a:r>
-              <a:rPr lang="en-US" sz="950" dirty="0">
-                <a:solidFill>
-                  <a:srgbClr val="1F1B2E"/>
-                </a:solidFill>
-                <a:latin typeface="Arial" pitchFamily="34" charset="0"/>
-                <a:ea typeface="Arial" pitchFamily="34" charset="-122"/>
-                <a:cs typeface="Arial" pitchFamily="34" charset="-120"/>
-              </a:rPr>
-              <a:t>per-seat SaaS · scan history · Slack alerts · GitHub Action CI gate</a:t>
-            </a:r>
-            <a:endParaRPr lang="en-US" sz="950" dirty="0"/>
-          </a:p>
-        </p:txBody>
-      </p:sp>
-      <p:sp>
-        <p:nvSpPr>
-          <p:cNvPr id="10" name="Text 7"/>
-          <p:cNvSpPr txBox="1"/>
-          <p:nvPr/>
-        </p:nvSpPr>
-        <p:spPr>
-          <a:xfrm>
-            <a:off x="1600200" y="2240280"/>
-            <a:ext cx="3108960" cy="182880"/>
+              <a:rPr lang="en-US" sz="700" spc="200" kern="0" dirty="0">
+                <a:solidFill>
+                  <a:srgbClr val="6B6685"/>
+                </a:solidFill>
+                <a:latin typeface="Arial" pitchFamily="34" charset="0"/>
+                <a:ea typeface="Arial" pitchFamily="34" charset="-122"/>
+                <a:cs typeface="Arial" pitchFamily="34" charset="-120"/>
+              </a:rPr>
+              <a:t>TEAM SPECTRA  ·  RIPPLEGUARD  ·  MANIPAL HACKATHON 2026</a:t>
+            </a:r>
+            <a:endParaRPr lang="en-US" sz="700" dirty="0"/>
+          </a:p>
+        </p:txBody>
+      </p:sp>
+      <p:sp>
+        <p:nvSpPr>
+          <p:cNvPr id="8" name="Text 4"/>
+          <p:cNvSpPr txBox="1"/>
+          <p:nvPr/>
+        </p:nvSpPr>
+        <p:spPr>
+          <a:xfrm>
+            <a:off x="7863840" y="4983480"/>
+            <a:ext cx="969264" cy="146304"/>
           </a:xfrm>
           <a:prstGeom prst="rect">
             <a:avLst/>
@@ -6134,11 +7128,11 @@
           <a:bodyPr wrap="square" lIns="0" tIns="0" rIns="0" bIns="0" rtlCol="0" anchor="ctr"/>
           <a:lstStyle/>
           <a:p>
-            <a:pPr indent="0" marL="0">
-              <a:buNone/>
-            </a:pPr>
-            <a:r>
-              <a:rPr lang="en-US" sz="800" i="1" dirty="0">
+            <a:pPr algn="r" indent="0" marL="0">
+              <a:buNone/>
+            </a:pPr>
+            <a:r>
+              <a:rPr lang="en-US" sz="700" spc="200" kern="0" dirty="0">
                 <a:solidFill>
                   <a:srgbClr val="6B6685"/>
                 </a:solidFill>
@@ -6146,27 +7140,31 @@
                 <a:ea typeface="Arial" pitchFamily="34" charset="-122"/>
                 <a:cs typeface="Arial" pitchFamily="34" charset="-120"/>
               </a:rPr>
-              <a:t>the wedge into every pipeline</a:t>
-            </a:r>
-            <a:endParaRPr lang="en-US" sz="800" dirty="0"/>
-          </a:p>
-        </p:txBody>
-      </p:sp>
-      <p:sp>
-        <p:nvSpPr>
-          <p:cNvPr id="11" name="Shape 8"/>
+              <a:t>6 / 6</a:t>
+            </a:r>
+            <a:endParaRPr lang="en-US" sz="700" dirty="0"/>
+          </a:p>
+        </p:txBody>
+      </p:sp>
+      <p:sp>
+        <p:nvSpPr>
+          <p:cNvPr id="9" name="Shape 5"/>
           <p:cNvSpPr/>
           <p:nvPr/>
         </p:nvSpPr>
         <p:spPr>
           <a:xfrm>
-            <a:off x="310896" y="2478024"/>
-            <a:ext cx="4389120" cy="0"/>
-          </a:xfrm>
-          <a:prstGeom prst="line">
-            <a:avLst/>
-          </a:prstGeom>
-          <a:noFill/>
+            <a:off x="5074920" y="1051560"/>
+            <a:ext cx="3749040" cy="3794760"/>
+          </a:xfrm>
+          <a:prstGeom prst="roundRect">
+            <a:avLst>
+              <a:gd name="adj" fmla="val 2439"/>
+            </a:avLst>
+          </a:prstGeom>
+          <a:solidFill>
+            <a:srgbClr val="F4F1FB"/>
+          </a:solidFill>
           <a:ln w="9525">
             <a:solidFill>
               <a:srgbClr val="D9D3EA"/>
@@ -6177,14 +7175,63 @@
       </p:sp>
       <p:sp>
         <p:nvSpPr>
-          <p:cNvPr id="12" name="Text 9"/>
-          <p:cNvSpPr txBox="1"/>
-          <p:nvPr/>
-        </p:nvSpPr>
-        <p:spPr>
-          <a:xfrm>
-            <a:off x="310896" y="2569464"/>
-            <a:ext cx="1280160" cy="274320"/>
+          <p:cNvPr id="10" name="Shape 6"/>
+          <p:cNvSpPr/>
+          <p:nvPr/>
+        </p:nvSpPr>
+        <p:spPr>
+          <a:xfrm>
+            <a:off x="310896" y="1124712"/>
+            <a:ext cx="365760" cy="365760"/>
+          </a:xfrm>
+          <a:prstGeom prst="ellipse">
+            <a:avLst/>
+          </a:prstGeom>
+          <a:solidFill>
+            <a:srgbClr val="351C75"/>
+          </a:solidFill>
+          <a:ln w="12700">
+            <a:solidFill>
+              <a:srgbClr val="351C75"/>
+            </a:solidFill>
+            <a:prstDash val="solid"/>
+          </a:ln>
+        </p:spPr>
+      </p:sp>
+      <p:pic>
+        <p:nvPicPr>
+          <p:cNvPr id="11" name="Image 2" descr="preencoded.png">    </p:cNvPr>
+          <p:cNvPicPr>
+            <a:picLocks noChangeAspect="1"/>
+          </p:cNvPicPr>
+          <p:nvPr/>
+        </p:nvPicPr>
+        <p:blipFill>
+          <a:blip r:embed="rId3"/>
+          <a:stretch>
+            <a:fillRect/>
+          </a:stretch>
+        </p:blipFill>
+        <p:spPr>
+          <a:xfrm>
+            <a:off x="402336" y="1216152"/>
+            <a:ext cx="182880" cy="182880"/>
+          </a:xfrm>
+          <a:prstGeom prst="rect">
+            <a:avLst/>
+          </a:prstGeom>
+        </p:spPr>
+      </p:pic>
+      <p:sp>
+        <p:nvSpPr>
+          <p:cNvPr id="12" name="Text 7"/>
+          <p:cNvSpPr txBox="1"/>
+          <p:nvPr/>
+        </p:nvSpPr>
+        <p:spPr>
+          <a:xfrm>
+            <a:off x="749808" y="1143000"/>
+            <a:ext cx="1051560" cy="274320"/>
           </a:xfrm>
           <a:prstGeom prst="rect">
             <a:avLst/>
@@ -6200,7 +7247,7 @@
               <a:buNone/>
             </a:pPr>
             <a:r>
-              <a:rPr lang="en-US" sz="1500" b="1" dirty="0">
+              <a:rPr lang="en-US" sz="1300" b="1" dirty="0">
                 <a:solidFill>
                   <a:srgbClr val="1F1B2E"/>
                 </a:solidFill>
@@ -6208,22 +7255,400 @@
                 <a:ea typeface="Arial" pitchFamily="34" charset="-122"/>
                 <a:cs typeface="Arial" pitchFamily="34" charset="-120"/>
               </a:rPr>
+              <a:t>Free</a:t>
+            </a:r>
+            <a:endParaRPr lang="en-US" sz="1300" dirty="0"/>
+          </a:p>
+        </p:txBody>
+      </p:sp>
+      <p:sp>
+        <p:nvSpPr>
+          <p:cNvPr id="13" name="Text 8"/>
+          <p:cNvSpPr txBox="1"/>
+          <p:nvPr/>
+        </p:nvSpPr>
+        <p:spPr>
+          <a:xfrm>
+            <a:off x="1828800" y="1161288"/>
+            <a:ext cx="2880360" cy="365760"/>
+          </a:xfrm>
+          <a:prstGeom prst="rect">
+            <a:avLst/>
+          </a:prstGeom>
+          <a:noFill/>
+          <a:ln/>
+        </p:spPr>
+        <p:txBody>
+          <a:bodyPr wrap="square" lIns="0" tIns="0" rIns="0" bIns="0" rtlCol="0" anchor="t"/>
+          <a:lstStyle/>
+          <a:p>
+            <a:pPr indent="0" marL="0">
+              <a:buNone/>
+            </a:pPr>
+            <a:r>
+              <a:rPr lang="en-US" sz="950" dirty="0">
+                <a:solidFill>
+                  <a:srgbClr val="1F1B2E"/>
+                </a:solidFill>
+                <a:latin typeface="Arial" pitchFamily="34" charset="0"/>
+                <a:ea typeface="Arial" pitchFamily="34" charset="-122"/>
+                <a:cs typeface="Arial" pitchFamily="34" charset="-120"/>
+              </a:rPr>
+              <a:t>CLI + single-project dashboard</a:t>
+            </a:r>
+            <a:endParaRPr lang="en-US" sz="950" dirty="0"/>
+          </a:p>
+        </p:txBody>
+      </p:sp>
+      <p:sp>
+        <p:nvSpPr>
+          <p:cNvPr id="14" name="Text 9"/>
+          <p:cNvSpPr txBox="1"/>
+          <p:nvPr/>
+        </p:nvSpPr>
+        <p:spPr>
+          <a:xfrm>
+            <a:off x="1828800" y="1527048"/>
+            <a:ext cx="3108960" cy="182880"/>
+          </a:xfrm>
+          <a:prstGeom prst="rect">
+            <a:avLst/>
+          </a:prstGeom>
+          <a:noFill/>
+          <a:ln/>
+        </p:spPr>
+        <p:txBody>
+          <a:bodyPr wrap="square" lIns="0" tIns="0" rIns="0" bIns="0" rtlCol="0" anchor="ctr"/>
+          <a:lstStyle/>
+          <a:p>
+            <a:pPr indent="0" marL="0">
+              <a:buNone/>
+            </a:pPr>
+            <a:r>
+              <a:rPr lang="en-US" sz="800" i="1" dirty="0">
+                <a:solidFill>
+                  <a:srgbClr val="6B6685"/>
+                </a:solidFill>
+                <a:latin typeface="Arial" pitchFamily="34" charset="0"/>
+                <a:ea typeface="Arial" pitchFamily="34" charset="-122"/>
+                <a:cs typeface="Arial" pitchFamily="34" charset="-120"/>
+              </a:rPr>
+              <a:t>adoption engine · open source core</a:t>
+            </a:r>
+            <a:endParaRPr lang="en-US" sz="800" dirty="0"/>
+          </a:p>
+        </p:txBody>
+      </p:sp>
+      <p:sp>
+        <p:nvSpPr>
+          <p:cNvPr id="15" name="Shape 10"/>
+          <p:cNvSpPr/>
+          <p:nvPr/>
+        </p:nvSpPr>
+        <p:spPr>
+          <a:xfrm>
+            <a:off x="310896" y="1764792"/>
+            <a:ext cx="4389120" cy="0"/>
+          </a:xfrm>
+          <a:prstGeom prst="line">
+            <a:avLst/>
+          </a:prstGeom>
+          <a:noFill/>
+          <a:ln w="9525">
+            <a:solidFill>
+              <a:srgbClr val="D9D3EA"/>
+            </a:solidFill>
+            <a:prstDash val="solid"/>
+          </a:ln>
+        </p:spPr>
+      </p:sp>
+      <p:sp>
+        <p:nvSpPr>
+          <p:cNvPr id="16" name="Shape 11"/>
+          <p:cNvSpPr/>
+          <p:nvPr/>
+        </p:nvSpPr>
+        <p:spPr>
+          <a:xfrm>
+            <a:off x="310896" y="1837944"/>
+            <a:ext cx="365760" cy="365760"/>
+          </a:xfrm>
+          <a:prstGeom prst="ellipse">
+            <a:avLst/>
+          </a:prstGeom>
+          <a:solidFill>
+            <a:srgbClr val="7C3AED"/>
+          </a:solidFill>
+          <a:ln w="12700">
+            <a:solidFill>
+              <a:srgbClr val="7C3AED"/>
+            </a:solidFill>
+            <a:prstDash val="solid"/>
+          </a:ln>
+        </p:spPr>
+      </p:sp>
+      <p:pic>
+        <p:nvPicPr>
+          <p:cNvPr id="17" name="Image 3" descr="preencoded.png">    </p:cNvPr>
+          <p:cNvPicPr>
+            <a:picLocks noChangeAspect="1"/>
+          </p:cNvPicPr>
+          <p:nvPr/>
+        </p:nvPicPr>
+        <p:blipFill>
+          <a:blip r:embed="rId4"/>
+          <a:stretch>
+            <a:fillRect/>
+          </a:stretch>
+        </p:blipFill>
+        <p:spPr>
+          <a:xfrm>
+            <a:off x="402336" y="1929384"/>
+            <a:ext cx="182880" cy="182880"/>
+          </a:xfrm>
+          <a:prstGeom prst="rect">
+            <a:avLst/>
+          </a:prstGeom>
+        </p:spPr>
+      </p:pic>
+      <p:sp>
+        <p:nvSpPr>
+          <p:cNvPr id="18" name="Text 12"/>
+          <p:cNvSpPr txBox="1"/>
+          <p:nvPr/>
+        </p:nvSpPr>
+        <p:spPr>
+          <a:xfrm>
+            <a:off x="749808" y="1856232"/>
+            <a:ext cx="1051560" cy="274320"/>
+          </a:xfrm>
+          <a:prstGeom prst="rect">
+            <a:avLst/>
+          </a:prstGeom>
+          <a:noFill/>
+          <a:ln/>
+        </p:spPr>
+        <p:txBody>
+          <a:bodyPr wrap="square" lIns="0" tIns="0" rIns="0" bIns="0" rtlCol="0" anchor="ctr"/>
+          <a:lstStyle/>
+          <a:p>
+            <a:pPr indent="0" marL="0">
+              <a:buNone/>
+            </a:pPr>
+            <a:r>
+              <a:rPr lang="en-US" sz="1300" b="1" dirty="0">
+                <a:solidFill>
+                  <a:srgbClr val="7C3AED"/>
+                </a:solidFill>
+                <a:latin typeface="Arial" pitchFamily="34" charset="0"/>
+                <a:ea typeface="Arial" pitchFamily="34" charset="-122"/>
+                <a:cs typeface="Arial" pitchFamily="34" charset="-120"/>
+              </a:rPr>
+              <a:t>Team</a:t>
+            </a:r>
+            <a:endParaRPr lang="en-US" sz="1300" dirty="0"/>
+          </a:p>
+        </p:txBody>
+      </p:sp>
+      <p:sp>
+        <p:nvSpPr>
+          <p:cNvPr id="19" name="Text 13"/>
+          <p:cNvSpPr txBox="1"/>
+          <p:nvPr/>
+        </p:nvSpPr>
+        <p:spPr>
+          <a:xfrm>
+            <a:off x="1828800" y="1874520"/>
+            <a:ext cx="2880360" cy="365760"/>
+          </a:xfrm>
+          <a:prstGeom prst="rect">
+            <a:avLst/>
+          </a:prstGeom>
+          <a:noFill/>
+          <a:ln/>
+        </p:spPr>
+        <p:txBody>
+          <a:bodyPr wrap="square" lIns="0" tIns="0" rIns="0" bIns="0" rtlCol="0" anchor="t"/>
+          <a:lstStyle/>
+          <a:p>
+            <a:pPr indent="0" marL="0">
+              <a:buNone/>
+            </a:pPr>
+            <a:r>
+              <a:rPr lang="en-US" sz="950" dirty="0">
+                <a:solidFill>
+                  <a:srgbClr val="1F1B2E"/>
+                </a:solidFill>
+                <a:latin typeface="Arial" pitchFamily="34" charset="0"/>
+                <a:ea typeface="Arial" pitchFamily="34" charset="-122"/>
+                <a:cs typeface="Arial" pitchFamily="34" charset="-120"/>
+              </a:rPr>
+              <a:t>per-seat SaaS · scan history · Slack alerts · GitHub Action CI gate</a:t>
+            </a:r>
+            <a:endParaRPr lang="en-US" sz="950" dirty="0"/>
+          </a:p>
+        </p:txBody>
+      </p:sp>
+      <p:sp>
+        <p:nvSpPr>
+          <p:cNvPr id="20" name="Text 14"/>
+          <p:cNvSpPr txBox="1"/>
+          <p:nvPr/>
+        </p:nvSpPr>
+        <p:spPr>
+          <a:xfrm>
+            <a:off x="1828800" y="2240280"/>
+            <a:ext cx="3108960" cy="182880"/>
+          </a:xfrm>
+          <a:prstGeom prst="rect">
+            <a:avLst/>
+          </a:prstGeom>
+          <a:noFill/>
+          <a:ln/>
+        </p:spPr>
+        <p:txBody>
+          <a:bodyPr wrap="square" lIns="0" tIns="0" rIns="0" bIns="0" rtlCol="0" anchor="ctr"/>
+          <a:lstStyle/>
+          <a:p>
+            <a:pPr indent="0" marL="0">
+              <a:buNone/>
+            </a:pPr>
+            <a:r>
+              <a:rPr lang="en-US" sz="800" i="1" dirty="0">
+                <a:solidFill>
+                  <a:srgbClr val="6B6685"/>
+                </a:solidFill>
+                <a:latin typeface="Arial" pitchFamily="34" charset="0"/>
+                <a:ea typeface="Arial" pitchFamily="34" charset="-122"/>
+                <a:cs typeface="Arial" pitchFamily="34" charset="-120"/>
+              </a:rPr>
+              <a:t>the wedge into every pipeline</a:t>
+            </a:r>
+            <a:endParaRPr lang="en-US" sz="800" dirty="0"/>
+          </a:p>
+        </p:txBody>
+      </p:sp>
+      <p:sp>
+        <p:nvSpPr>
+          <p:cNvPr id="21" name="Shape 15"/>
+          <p:cNvSpPr/>
+          <p:nvPr/>
+        </p:nvSpPr>
+        <p:spPr>
+          <a:xfrm>
+            <a:off x="310896" y="2478024"/>
+            <a:ext cx="4389120" cy="0"/>
+          </a:xfrm>
+          <a:prstGeom prst="line">
+            <a:avLst/>
+          </a:prstGeom>
+          <a:noFill/>
+          <a:ln w="9525">
+            <a:solidFill>
+              <a:srgbClr val="D9D3EA"/>
+            </a:solidFill>
+            <a:prstDash val="solid"/>
+          </a:ln>
+        </p:spPr>
+      </p:sp>
+      <p:sp>
+        <p:nvSpPr>
+          <p:cNvPr id="22" name="Shape 16"/>
+          <p:cNvSpPr/>
+          <p:nvPr/>
+        </p:nvSpPr>
+        <p:spPr>
+          <a:xfrm>
+            <a:off x="310896" y="2551176"/>
+            <a:ext cx="365760" cy="365760"/>
+          </a:xfrm>
+          <a:prstGeom prst="ellipse">
+            <a:avLst/>
+          </a:prstGeom>
+          <a:solidFill>
+            <a:srgbClr val="351C75"/>
+          </a:solidFill>
+          <a:ln w="12700">
+            <a:solidFill>
+              <a:srgbClr val="351C75"/>
+            </a:solidFill>
+            <a:prstDash val="solid"/>
+          </a:ln>
+        </p:spPr>
+      </p:sp>
+      <p:pic>
+        <p:nvPicPr>
+          <p:cNvPr id="23" name="Image 4" descr="preencoded.png">    </p:cNvPr>
+          <p:cNvPicPr>
+            <a:picLocks noChangeAspect="1"/>
+          </p:cNvPicPr>
+          <p:nvPr/>
+        </p:nvPicPr>
+        <p:blipFill>
+          <a:blip r:embed="rId5"/>
+          <a:stretch>
+            <a:fillRect/>
+          </a:stretch>
+        </p:blipFill>
+        <p:spPr>
+          <a:xfrm>
+            <a:off x="402336" y="2642616"/>
+            <a:ext cx="182880" cy="182880"/>
+          </a:xfrm>
+          <a:prstGeom prst="rect">
+            <a:avLst/>
+          </a:prstGeom>
+        </p:spPr>
+      </p:pic>
+      <p:sp>
+        <p:nvSpPr>
+          <p:cNvPr id="24" name="Text 17"/>
+          <p:cNvSpPr txBox="1"/>
+          <p:nvPr/>
+        </p:nvSpPr>
+        <p:spPr>
+          <a:xfrm>
+            <a:off x="749808" y="2569464"/>
+            <a:ext cx="1051560" cy="274320"/>
+          </a:xfrm>
+          <a:prstGeom prst="rect">
+            <a:avLst/>
+          </a:prstGeom>
+          <a:noFill/>
+          <a:ln/>
+        </p:spPr>
+        <p:txBody>
+          <a:bodyPr wrap="square" lIns="0" tIns="0" rIns="0" bIns="0" rtlCol="0" anchor="ctr"/>
+          <a:lstStyle/>
+          <a:p>
+            <a:pPr indent="0" marL="0">
+              <a:buNone/>
+            </a:pPr>
+            <a:r>
+              <a:rPr lang="en-US" sz="1300" b="1" dirty="0">
+                <a:solidFill>
+                  <a:srgbClr val="1F1B2E"/>
+                </a:solidFill>
+                <a:latin typeface="Arial" pitchFamily="34" charset="0"/>
+                <a:ea typeface="Arial" pitchFamily="34" charset="-122"/>
+                <a:cs typeface="Arial" pitchFamily="34" charset="-120"/>
+              </a:rPr>
               <a:t>Enterprise</a:t>
             </a:r>
-            <a:endParaRPr lang="en-US" sz="1500" dirty="0"/>
-          </a:p>
-        </p:txBody>
-      </p:sp>
-      <p:sp>
-        <p:nvSpPr>
-          <p:cNvPr id="13" name="Text 10"/>
-          <p:cNvSpPr txBox="1"/>
-          <p:nvPr/>
-        </p:nvSpPr>
-        <p:spPr>
-          <a:xfrm>
-            <a:off x="1600200" y="2587752"/>
-            <a:ext cx="3108960" cy="365760"/>
+            <a:endParaRPr lang="en-US" sz="1300" dirty="0"/>
+          </a:p>
+        </p:txBody>
+      </p:sp>
+      <p:sp>
+        <p:nvSpPr>
+          <p:cNvPr id="25" name="Text 18"/>
+          <p:cNvSpPr txBox="1"/>
+          <p:nvPr/>
+        </p:nvSpPr>
+        <p:spPr>
+          <a:xfrm>
+            <a:off x="1828800" y="2587752"/>
+            <a:ext cx="2880360" cy="365760"/>
           </a:xfrm>
           <a:prstGeom prst="rect">
             <a:avLst/>
@@ -6255,13 +7680,13 @@
       </p:sp>
       <p:sp>
         <p:nvSpPr>
-          <p:cNvPr id="14" name="Text 11"/>
-          <p:cNvSpPr txBox="1"/>
-          <p:nvPr/>
-        </p:nvSpPr>
-        <p:spPr>
-          <a:xfrm>
-            <a:off x="1600200" y="2953512"/>
+          <p:cNvPr id="26" name="Text 19"/>
+          <p:cNvSpPr txBox="1"/>
+          <p:nvPr/>
+        </p:nvSpPr>
+        <p:spPr>
+          <a:xfrm>
+            <a:off x="1828800" y="2953512"/>
             <a:ext cx="3108960" cy="182880"/>
           </a:xfrm>
           <a:prstGeom prst="rect">
@@ -6294,7 +7719,7 @@
       </p:sp>
       <p:sp>
         <p:nvSpPr>
-          <p:cNvPr id="15" name="Text 12"/>
+          <p:cNvPr id="27" name="Text 20"/>
           <p:cNvSpPr txBox="1"/>
           <p:nvPr/>
         </p:nvSpPr>
@@ -6333,7 +7758,7 @@
       </p:sp>
       <p:sp>
         <p:nvSpPr>
-          <p:cNvPr id="16" name="Text 13"/>
+          <p:cNvPr id="28" name="Text 21"/>
           <p:cNvSpPr txBox="1"/>
           <p:nvPr/>
         </p:nvSpPr>
@@ -6372,7 +7797,7 @@
       </p:sp>
       <p:sp>
         <p:nvSpPr>
-          <p:cNvPr id="17" name="Text 14"/>
+          <p:cNvPr id="29" name="Text 22"/>
           <p:cNvSpPr txBox="1"/>
           <p:nvPr/>
         </p:nvSpPr>
@@ -6411,7 +7836,7 @@
       </p:sp>
       <p:sp>
         <p:nvSpPr>
-          <p:cNvPr id="18" name="Shape 15"/>
+          <p:cNvPr id="30" name="Shape 23"/>
           <p:cNvSpPr/>
           <p:nvPr/>
         </p:nvSpPr>
@@ -6434,7 +7859,7 @@
       </p:sp>
       <p:sp>
         <p:nvSpPr>
-          <p:cNvPr id="19" name="Shape 16"/>
+          <p:cNvPr id="31" name="Shape 24"/>
           <p:cNvSpPr/>
           <p:nvPr/>
         </p:nvSpPr>
@@ -6459,7 +7884,7 @@
       </p:sp>
       <p:sp>
         <p:nvSpPr>
-          <p:cNvPr id="20" name="Text 17"/>
+          <p:cNvPr id="32" name="Text 25"/>
           <p:cNvSpPr txBox="1"/>
           <p:nvPr/>
         </p:nvSpPr>
@@ -6498,7 +7923,7 @@
       </p:sp>
       <p:sp>
         <p:nvSpPr>
-          <p:cNvPr id="21" name="Text 18"/>
+          <p:cNvPr id="33" name="Text 26"/>
           <p:cNvSpPr txBox="1"/>
           <p:nvPr/>
         </p:nvSpPr>
@@ -6537,7 +7962,7 @@
       </p:sp>
       <p:sp>
         <p:nvSpPr>
-          <p:cNvPr id="22" name="Shape 19"/>
+          <p:cNvPr id="34" name="Shape 27"/>
           <p:cNvSpPr/>
           <p:nvPr/>
         </p:nvSpPr>
@@ -6562,7 +7987,7 @@
       </p:sp>
       <p:sp>
         <p:nvSpPr>
-          <p:cNvPr id="23" name="Text 20"/>
+          <p:cNvPr id="35" name="Text 28"/>
           <p:cNvSpPr txBox="1"/>
           <p:nvPr/>
         </p:nvSpPr>
@@ -6601,7 +8026,7 @@
       </p:sp>
       <p:sp>
         <p:nvSpPr>
-          <p:cNvPr id="24" name="Text 21"/>
+          <p:cNvPr id="36" name="Text 29"/>
           <p:cNvSpPr txBox="1"/>
           <p:nvPr/>
         </p:nvSpPr>
@@ -6640,7 +8065,7 @@
       </p:sp>
       <p:sp>
         <p:nvSpPr>
-          <p:cNvPr id="25" name="Shape 22"/>
+          <p:cNvPr id="37" name="Shape 30"/>
           <p:cNvSpPr/>
           <p:nvPr/>
         </p:nvSpPr>
@@ -6665,7 +8090,7 @@
       </p:sp>
       <p:sp>
         <p:nvSpPr>
-          <p:cNvPr id="26" name="Text 23"/>
+          <p:cNvPr id="38" name="Text 31"/>
           <p:cNvSpPr txBox="1"/>
           <p:nvPr/>
         </p:nvSpPr>
@@ -6704,7 +8129,7 @@
       </p:sp>
       <p:sp>
         <p:nvSpPr>
-          <p:cNvPr id="27" name="Text 24"/>
+          <p:cNvPr id="39" name="Text 32"/>
           <p:cNvSpPr txBox="1"/>
           <p:nvPr/>
         </p:nvSpPr>
@@ -6743,7 +8168,7 @@
       </p:sp>
       <p:sp>
         <p:nvSpPr>
-          <p:cNvPr id="28" name="Shape 25"/>
+          <p:cNvPr id="40" name="Shape 33"/>
           <p:cNvSpPr/>
           <p:nvPr/>
         </p:nvSpPr>
@@ -6768,7 +8193,7 @@
       </p:sp>
       <p:sp>
         <p:nvSpPr>
-          <p:cNvPr id="29" name="Text 26"/>
+          <p:cNvPr id="41" name="Text 34"/>
           <p:cNvSpPr txBox="1"/>
           <p:nvPr/>
         </p:nvSpPr>
@@ -6807,7 +8232,7 @@
       </p:sp>
       <p:sp>
         <p:nvSpPr>
-          <p:cNvPr id="30" name="Text 27"/>
+          <p:cNvPr id="42" name="Text 35"/>
           <p:cNvSpPr txBox="1"/>
           <p:nvPr/>
         </p:nvSpPr>
@@ -6846,36 +8271,13 @@
       </p:sp>
       <p:sp>
         <p:nvSpPr>
-          <p:cNvPr id="31" name="Shape 28"/>
-          <p:cNvSpPr/>
-          <p:nvPr/>
-        </p:nvSpPr>
-        <p:spPr>
-          <a:xfrm>
-            <a:off x="5029200" y="1143000"/>
-            <a:ext cx="0" cy="3657600"/>
-          </a:xfrm>
-          <a:prstGeom prst="line">
-            <a:avLst/>
-          </a:prstGeom>
-          <a:noFill/>
-          <a:ln w="9525">
-            <a:solidFill>
-              <a:srgbClr val="D9D3EA"/>
-            </a:solidFill>
-            <a:prstDash val="solid"/>
-          </a:ln>
-        </p:spPr>
-      </p:sp>
-      <p:sp>
-        <p:nvSpPr>
-          <p:cNvPr id="32" name="Text 29"/>
-          <p:cNvSpPr txBox="1"/>
-          <p:nvPr/>
-        </p:nvSpPr>
-        <p:spPr>
-          <a:xfrm>
-            <a:off x="5303520" y="1143000"/>
+          <p:cNvPr id="43" name="Text 36"/>
+          <p:cNvSpPr txBox="1"/>
+          <p:nvPr/>
+        </p:nvSpPr>
+        <p:spPr>
+          <a:xfrm>
+            <a:off x="5303520" y="1170432"/>
             <a:ext cx="3474720" cy="201168"/>
           </a:xfrm>
           <a:prstGeom prst="rect">
@@ -6908,7 +8310,7 @@
       </p:sp>
       <p:sp>
         <p:nvSpPr>
-          <p:cNvPr id="33" name="Shape 30"/>
+          <p:cNvPr id="44" name="Shape 37"/>
           <p:cNvSpPr/>
           <p:nvPr/>
         </p:nvSpPr>
@@ -6933,14 +8335,14 @@
       </p:sp>
       <p:pic>
         <p:nvPicPr>
-          <p:cNvPr id="34" name="Image 1" descr="qr-github.png">    </p:cNvPr>
+          <p:cNvPr id="45" name="Image 5" descr="qr-github.png">    </p:cNvPr>
           <p:cNvPicPr>
             <a:picLocks noChangeAspect="1"/>
           </p:cNvPicPr>
           <p:nvPr/>
         </p:nvPicPr>
         <p:blipFill>
-          <a:blip r:embed="rId2"/>
+          <a:blip r:embed="rId6"/>
           <a:stretch>
             <a:fillRect/>
           </a:stretch>
@@ -6957,14 +8359,63 @@
       </p:pic>
       <p:sp>
         <p:nvSpPr>
-          <p:cNvPr id="35" name="Text 31"/>
-          <p:cNvSpPr txBox="1"/>
-          <p:nvPr/>
-        </p:nvSpPr>
-        <p:spPr>
-          <a:xfrm>
-            <a:off x="6492240" y="1673352"/>
-            <a:ext cx="2286000" cy="274320"/>
+          <p:cNvPr id="46" name="Shape 38"/>
+          <p:cNvSpPr/>
+          <p:nvPr/>
+        </p:nvSpPr>
+        <p:spPr>
+          <a:xfrm>
+            <a:off x="6446520" y="1737360"/>
+            <a:ext cx="347472" cy="347472"/>
+          </a:xfrm>
+          <a:prstGeom prst="ellipse">
+            <a:avLst/>
+          </a:prstGeom>
+          <a:solidFill>
+            <a:srgbClr val="7C3AED"/>
+          </a:solidFill>
+          <a:ln w="12700">
+            <a:solidFill>
+              <a:srgbClr val="7C3AED"/>
+            </a:solidFill>
+            <a:prstDash val="solid"/>
+          </a:ln>
+        </p:spPr>
+      </p:sp>
+      <p:pic>
+        <p:nvPicPr>
+          <p:cNvPr id="47" name="Image 6" descr="preencoded.png">    </p:cNvPr>
+          <p:cNvPicPr>
+            <a:picLocks noChangeAspect="1"/>
+          </p:cNvPicPr>
+          <p:nvPr/>
+        </p:nvPicPr>
+        <p:blipFill>
+          <a:blip r:embed="rId7"/>
+          <a:stretch>
+            <a:fillRect/>
+          </a:stretch>
+        </p:blipFill>
+        <p:spPr>
+          <a:xfrm>
+            <a:off x="6533388" y="1824228"/>
+            <a:ext cx="173736" cy="173736"/>
+          </a:xfrm>
+          <a:prstGeom prst="rect">
+            <a:avLst/>
+          </a:prstGeom>
+        </p:spPr>
+      </p:pic>
+      <p:sp>
+        <p:nvSpPr>
+          <p:cNvPr id="48" name="Text 39"/>
+          <p:cNvSpPr txBox="1"/>
+          <p:nvPr/>
+        </p:nvSpPr>
+        <p:spPr>
+          <a:xfrm>
+            <a:off x="6903720" y="1645920"/>
+            <a:ext cx="1828800" cy="274320"/>
           </a:xfrm>
           <a:prstGeom prst="rect">
             <a:avLst/>
@@ -6980,7 +8431,7 @@
               <a:buNone/>
             </a:pPr>
             <a:r>
-              <a:rPr lang="en-US" sz="1400" b="1" dirty="0">
+              <a:rPr lang="en-US" sz="1300" b="1" dirty="0">
                 <a:solidFill>
                   <a:srgbClr val="351C75"/>
                 </a:solidFill>
@@ -6990,20 +8441,20 @@
               </a:rPr>
               <a:t>GitHub repo</a:t>
             </a:r>
-            <a:endParaRPr lang="en-US" sz="1400" dirty="0"/>
-          </a:p>
-        </p:txBody>
-      </p:sp>
-      <p:sp>
-        <p:nvSpPr>
-          <p:cNvPr id="36" name="Text 32"/>
-          <p:cNvSpPr txBox="1"/>
-          <p:nvPr/>
-        </p:nvSpPr>
-        <p:spPr>
-          <a:xfrm>
-            <a:off x="6492240" y="1965960"/>
-            <a:ext cx="2286000" cy="365760"/>
+            <a:endParaRPr lang="en-US" sz="1300" dirty="0"/>
+          </a:p>
+        </p:txBody>
+      </p:sp>
+      <p:sp>
+        <p:nvSpPr>
+          <p:cNvPr id="49" name="Text 40"/>
+          <p:cNvSpPr txBox="1"/>
+          <p:nvPr/>
+        </p:nvSpPr>
+        <p:spPr>
+          <a:xfrm>
+            <a:off x="6903720" y="1938528"/>
+            <a:ext cx="1828800" cy="411480"/>
           </a:xfrm>
           <a:prstGeom prst="rect">
             <a:avLst/>
@@ -7019,7 +8470,7 @@
               <a:buNone/>
             </a:pPr>
             <a:r>
-              <a:rPr lang="en-US" sz="800" dirty="0">
+              <a:rPr lang="en-US" sz="750" dirty="0">
                 <a:solidFill>
                   <a:srgbClr val="6B6685"/>
                 </a:solidFill>
@@ -7029,13 +8480,13 @@
               </a:rPr>
               <a:t>github.com/Rohit-girish-Belagali/Spectra</a:t>
             </a:r>
-            <a:endParaRPr lang="en-US" sz="800" dirty="0"/>
-          </a:p>
-        </p:txBody>
-      </p:sp>
-      <p:sp>
-        <p:nvSpPr>
-          <p:cNvPr id="37" name="Shape 33"/>
+            <a:endParaRPr lang="en-US" sz="750" dirty="0"/>
+          </a:p>
+        </p:txBody>
+      </p:sp>
+      <p:sp>
+        <p:nvSpPr>
+          <p:cNvPr id="50" name="Shape 41"/>
           <p:cNvSpPr/>
           <p:nvPr/>
         </p:nvSpPr>
@@ -7060,14 +8511,14 @@
       </p:sp>
       <p:pic>
         <p:nvPicPr>
-          <p:cNvPr id="38" name="Image 2" descr="qr-live.png">    </p:cNvPr>
+          <p:cNvPr id="51" name="Image 7" descr="qr-live.png">    </p:cNvPr>
           <p:cNvPicPr>
             <a:picLocks noChangeAspect="1"/>
           </p:cNvPicPr>
           <p:nvPr/>
         </p:nvPicPr>
         <p:blipFill>
-          <a:blip r:embed="rId3"/>
+          <a:blip r:embed="rId8"/>
           <a:stretch>
             <a:fillRect/>
           </a:stretch>
@@ -7084,14 +8535,63 @@
       </p:pic>
       <p:sp>
         <p:nvSpPr>
-          <p:cNvPr id="39" name="Text 34"/>
-          <p:cNvSpPr txBox="1"/>
-          <p:nvPr/>
-        </p:nvSpPr>
-        <p:spPr>
-          <a:xfrm>
-            <a:off x="6492240" y="2807208"/>
-            <a:ext cx="2286000" cy="274320"/>
+          <p:cNvPr id="52" name="Shape 42"/>
+          <p:cNvSpPr/>
+          <p:nvPr/>
+        </p:nvSpPr>
+        <p:spPr>
+          <a:xfrm>
+            <a:off x="6446520" y="2871216"/>
+            <a:ext cx="347472" cy="347472"/>
+          </a:xfrm>
+          <a:prstGeom prst="ellipse">
+            <a:avLst/>
+          </a:prstGeom>
+          <a:solidFill>
+            <a:srgbClr val="7C3AED"/>
+          </a:solidFill>
+          <a:ln w="12700">
+            <a:solidFill>
+              <a:srgbClr val="7C3AED"/>
+            </a:solidFill>
+            <a:prstDash val="solid"/>
+          </a:ln>
+        </p:spPr>
+      </p:sp>
+      <p:pic>
+        <p:nvPicPr>
+          <p:cNvPr id="53" name="Image 8" descr="preencoded.png">    </p:cNvPr>
+          <p:cNvPicPr>
+            <a:picLocks noChangeAspect="1"/>
+          </p:cNvPicPr>
+          <p:nvPr/>
+        </p:nvPicPr>
+        <p:blipFill>
+          <a:blip r:embed="rId9"/>
+          <a:stretch>
+            <a:fillRect/>
+          </a:stretch>
+        </p:blipFill>
+        <p:spPr>
+          <a:xfrm>
+            <a:off x="6533388" y="2958084"/>
+            <a:ext cx="173736" cy="173736"/>
+          </a:xfrm>
+          <a:prstGeom prst="rect">
+            <a:avLst/>
+          </a:prstGeom>
+        </p:spPr>
+      </p:pic>
+      <p:sp>
+        <p:nvSpPr>
+          <p:cNvPr id="54" name="Text 43"/>
+          <p:cNvSpPr txBox="1"/>
+          <p:nvPr/>
+        </p:nvSpPr>
+        <p:spPr>
+          <a:xfrm>
+            <a:off x="6903720" y="2779776"/>
+            <a:ext cx="1828800" cy="274320"/>
           </a:xfrm>
           <a:prstGeom prst="rect">
             <a:avLst/>
@@ -7107,7 +8607,7 @@
               <a:buNone/>
             </a:pPr>
             <a:r>
-              <a:rPr lang="en-US" sz="1400" b="1" dirty="0">
+              <a:rPr lang="en-US" sz="1300" b="1" dirty="0">
                 <a:solidFill>
                   <a:srgbClr val="351C75"/>
                 </a:solidFill>
@@ -7117,20 +8617,20 @@
               </a:rPr>
               <a:t>Live dashboard</a:t>
             </a:r>
-            <a:endParaRPr lang="en-US" sz="1400" dirty="0"/>
-          </a:p>
-        </p:txBody>
-      </p:sp>
-      <p:sp>
-        <p:nvSpPr>
-          <p:cNvPr id="40" name="Text 35"/>
-          <p:cNvSpPr txBox="1"/>
-          <p:nvPr/>
-        </p:nvSpPr>
-        <p:spPr>
-          <a:xfrm>
-            <a:off x="6492240" y="3099816"/>
-            <a:ext cx="2286000" cy="365760"/>
+            <a:endParaRPr lang="en-US" sz="1300" dirty="0"/>
+          </a:p>
+        </p:txBody>
+      </p:sp>
+      <p:sp>
+        <p:nvSpPr>
+          <p:cNvPr id="55" name="Text 44"/>
+          <p:cNvSpPr txBox="1"/>
+          <p:nvPr/>
+        </p:nvSpPr>
+        <p:spPr>
+          <a:xfrm>
+            <a:off x="6903720" y="3072384"/>
+            <a:ext cx="1828800" cy="411480"/>
           </a:xfrm>
           <a:prstGeom prst="rect">
             <a:avLst/>
@@ -7146,7 +8646,7 @@
               <a:buNone/>
             </a:pPr>
             <a:r>
-              <a:rPr lang="en-US" sz="800" dirty="0">
+              <a:rPr lang="en-US" sz="750" dirty="0">
                 <a:solidFill>
                   <a:srgbClr val="6B6685"/>
                 </a:solidFill>
@@ -7156,13 +8656,13 @@
               </a:rPr>
               <a:t>spectra.rohitgb.info</a:t>
             </a:r>
-            <a:endParaRPr lang="en-US" sz="800" dirty="0"/>
-          </a:p>
-        </p:txBody>
-      </p:sp>
-      <p:sp>
-        <p:nvSpPr>
-          <p:cNvPr id="41" name="Shape 36"/>
+            <a:endParaRPr lang="en-US" sz="750" dirty="0"/>
+          </a:p>
+        </p:txBody>
+      </p:sp>
+      <p:sp>
+        <p:nvSpPr>
+          <p:cNvPr id="56" name="Shape 45"/>
           <p:cNvSpPr/>
           <p:nvPr/>
         </p:nvSpPr>
@@ -7187,14 +8687,14 @@
       </p:sp>
       <p:pic>
         <p:nvPicPr>
-          <p:cNvPr id="42" name="Image 3" descr="qr-video.png">    </p:cNvPr>
+          <p:cNvPr id="57" name="Image 9" descr="qr-video.png">    </p:cNvPr>
           <p:cNvPicPr>
             <a:picLocks noChangeAspect="1"/>
           </p:cNvPicPr>
           <p:nvPr/>
         </p:nvPicPr>
         <p:blipFill>
-          <a:blip r:embed="rId4"/>
+          <a:blip r:embed="rId10"/>
           <a:stretch>
             <a:fillRect/>
           </a:stretch>
@@ -7211,14 +8711,63 @@
       </p:pic>
       <p:sp>
         <p:nvSpPr>
-          <p:cNvPr id="43" name="Text 37"/>
-          <p:cNvSpPr txBox="1"/>
-          <p:nvPr/>
-        </p:nvSpPr>
-        <p:spPr>
-          <a:xfrm>
-            <a:off x="6492240" y="3941064"/>
-            <a:ext cx="2286000" cy="274320"/>
+          <p:cNvPr id="58" name="Shape 46"/>
+          <p:cNvSpPr/>
+          <p:nvPr/>
+        </p:nvSpPr>
+        <p:spPr>
+          <a:xfrm>
+            <a:off x="6446520" y="4005072"/>
+            <a:ext cx="347472" cy="347472"/>
+          </a:xfrm>
+          <a:prstGeom prst="ellipse">
+            <a:avLst/>
+          </a:prstGeom>
+          <a:solidFill>
+            <a:srgbClr val="7C3AED"/>
+          </a:solidFill>
+          <a:ln w="12700">
+            <a:solidFill>
+              <a:srgbClr val="7C3AED"/>
+            </a:solidFill>
+            <a:prstDash val="solid"/>
+          </a:ln>
+        </p:spPr>
+      </p:sp>
+      <p:pic>
+        <p:nvPicPr>
+          <p:cNvPr id="59" name="Image 10" descr="preencoded.png">    </p:cNvPr>
+          <p:cNvPicPr>
+            <a:picLocks noChangeAspect="1"/>
+          </p:cNvPicPr>
+          <p:nvPr/>
+        </p:nvPicPr>
+        <p:blipFill>
+          <a:blip r:embed="rId11"/>
+          <a:stretch>
+            <a:fillRect/>
+          </a:stretch>
+        </p:blipFill>
+        <p:spPr>
+          <a:xfrm>
+            <a:off x="6533388" y="4091940"/>
+            <a:ext cx="173736" cy="173736"/>
+          </a:xfrm>
+          <a:prstGeom prst="rect">
+            <a:avLst/>
+          </a:prstGeom>
+        </p:spPr>
+      </p:pic>
+      <p:sp>
+        <p:nvSpPr>
+          <p:cNvPr id="60" name="Text 47"/>
+          <p:cNvSpPr txBox="1"/>
+          <p:nvPr/>
+        </p:nvSpPr>
+        <p:spPr>
+          <a:xfrm>
+            <a:off x="6903720" y="3913632"/>
+            <a:ext cx="1828800" cy="274320"/>
           </a:xfrm>
           <a:prstGeom prst="rect">
             <a:avLst/>
@@ -7234,7 +8783,7 @@
               <a:buNone/>
             </a:pPr>
             <a:r>
-              <a:rPr lang="en-US" sz="1400" b="1" dirty="0">
+              <a:rPr lang="en-US" sz="1300" b="1" dirty="0">
                 <a:solidFill>
                   <a:srgbClr val="351C75"/>
                 </a:solidFill>
@@ -7244,20 +8793,20 @@
               </a:rPr>
               <a:t>Demo video</a:t>
             </a:r>
-            <a:endParaRPr lang="en-US" sz="1400" dirty="0"/>
-          </a:p>
-        </p:txBody>
-      </p:sp>
-      <p:sp>
-        <p:nvSpPr>
-          <p:cNvPr id="44" name="Text 38"/>
-          <p:cNvSpPr txBox="1"/>
-          <p:nvPr/>
-        </p:nvSpPr>
-        <p:spPr>
-          <a:xfrm>
-            <a:off x="6492240" y="4233672"/>
-            <a:ext cx="2286000" cy="365760"/>
+            <a:endParaRPr lang="en-US" sz="1300" dirty="0"/>
+          </a:p>
+        </p:txBody>
+      </p:sp>
+      <p:sp>
+        <p:nvSpPr>
+          <p:cNvPr id="61" name="Text 48"/>
+          <p:cNvSpPr txBox="1"/>
+          <p:nvPr/>
+        </p:nvSpPr>
+        <p:spPr>
+          <a:xfrm>
+            <a:off x="6903720" y="4206240"/>
+            <a:ext cx="1828800" cy="411480"/>
           </a:xfrm>
           <a:prstGeom prst="rect">
             <a:avLst/>
@@ -7273,7 +8822,7 @@
               <a:buNone/>
             </a:pPr>
             <a:r>
-              <a:rPr lang="en-US" sz="800" dirty="0">
+              <a:rPr lang="en-US" sz="750" dirty="0">
                 <a:solidFill>
                   <a:srgbClr val="6B6685"/>
                 </a:solidFill>
@@ -7283,7 +8832,7 @@
               </a:rPr>
               <a:t>youtu.be/rq-swil9kwo</a:t>
             </a:r>
-            <a:endParaRPr lang="en-US" sz="800" dirty="0"/>
+            <a:endParaRPr lang="en-US" sz="750" dirty="0"/>
           </a:p>
         </p:txBody>
       </p:sp>
